--- a/Santander_LimitedCompany_Walkthrough.pptx
+++ b/Santander_LimitedCompany_Walkthrough.pptx
@@ -3298,7 +3298,7 @@
         </p:spPr>
         <p:txBody>
           <a:bodyPr wrap="square">
-            <a:spAutoFit/>
+            <a:normAutofit/>
           </a:bodyPr>
           <a:lstStyle/>
           <a:p>
@@ -3333,7 +3333,7 @@
         </p:spPr>
         <p:txBody>
           <a:bodyPr wrap="square">
-            <a:spAutoFit/>
+            <a:normAutofit/>
           </a:bodyPr>
           <a:lstStyle/>
           <a:p>
@@ -3369,7 +3369,7 @@
         </p:spPr>
         <p:txBody>
           <a:bodyPr wrap="square">
-            <a:spAutoFit/>
+            <a:normAutofit/>
           </a:bodyPr>
           <a:lstStyle/>
           <a:p>
@@ -3404,7 +3404,7 @@
         </p:spPr>
         <p:txBody>
           <a:bodyPr wrap="square">
-            <a:spAutoFit/>
+            <a:normAutofit/>
           </a:bodyPr>
           <a:lstStyle/>
           <a:p>
@@ -3439,7 +3439,7 @@
         </p:spPr>
         <p:txBody>
           <a:bodyPr wrap="square">
-            <a:spAutoFit/>
+            <a:normAutofit/>
           </a:bodyPr>
           <a:lstStyle/>
           <a:p>
@@ -3621,7 +3621,7 @@
         </p:spPr>
         <p:txBody>
           <a:bodyPr wrap="square">
-            <a:spAutoFit/>
+            <a:normAutofit/>
           </a:bodyPr>
           <a:lstStyle/>
           <a:p>
@@ -3656,7 +3656,7 @@
         </p:spPr>
         <p:txBody>
           <a:bodyPr wrap="square">
-            <a:spAutoFit/>
+            <a:normAutofit/>
           </a:bodyPr>
           <a:lstStyle/>
           <a:p>
@@ -3734,7 +3734,7 @@
         </p:spPr>
         <p:txBody>
           <a:bodyPr wrap="square">
-            <a:spAutoFit/>
+            <a:normAutofit/>
           </a:bodyPr>
           <a:lstStyle/>
           <a:p>
@@ -3814,7 +3814,7 @@
         </p:spPr>
         <p:txBody>
           <a:bodyPr wrap="square">
-            <a:spAutoFit/>
+            <a:normAutofit/>
           </a:bodyPr>
           <a:lstStyle/>
           <a:p>
@@ -4093,7 +4093,7 @@
         </p:spPr>
         <p:txBody>
           <a:bodyPr wrap="square">
-            <a:spAutoFit/>
+            <a:normAutofit/>
           </a:bodyPr>
           <a:lstStyle/>
           <a:p>
@@ -4173,7 +4173,7 @@
         </p:spPr>
         <p:txBody>
           <a:bodyPr wrap="square">
-            <a:spAutoFit/>
+            <a:normAutofit/>
           </a:bodyPr>
           <a:lstStyle/>
           <a:p>
@@ -4711,7 +4711,7 @@
         </p:spPr>
         <p:txBody>
           <a:bodyPr wrap="square">
-            <a:spAutoFit/>
+            <a:normAutofit/>
           </a:bodyPr>
           <a:lstStyle/>
           <a:p>
@@ -4746,7 +4746,7 @@
         </p:spPr>
         <p:txBody>
           <a:bodyPr wrap="square">
-            <a:spAutoFit/>
+            <a:normAutofit/>
           </a:bodyPr>
           <a:lstStyle/>
           <a:p>
@@ -4824,7 +4824,7 @@
         </p:spPr>
         <p:txBody>
           <a:bodyPr wrap="square">
-            <a:spAutoFit/>
+            <a:normAutofit/>
           </a:bodyPr>
           <a:lstStyle/>
           <a:p>
@@ -4904,7 +4904,7 @@
         </p:spPr>
         <p:txBody>
           <a:bodyPr wrap="square">
-            <a:spAutoFit/>
+            <a:normAutofit/>
           </a:bodyPr>
           <a:lstStyle/>
           <a:p>
@@ -5231,7 +5231,7 @@
         </p:spPr>
         <p:txBody>
           <a:bodyPr wrap="square">
-            <a:spAutoFit/>
+            <a:normAutofit/>
           </a:bodyPr>
           <a:lstStyle/>
           <a:p>
@@ -5311,7 +5311,7 @@
         </p:spPr>
         <p:txBody>
           <a:bodyPr wrap="square">
-            <a:spAutoFit/>
+            <a:normAutofit/>
           </a:bodyPr>
           <a:lstStyle/>
           <a:p>
@@ -5860,7 +5860,7 @@
         </p:spPr>
         <p:txBody>
           <a:bodyPr wrap="square">
-            <a:spAutoFit/>
+            <a:normAutofit/>
           </a:bodyPr>
           <a:lstStyle/>
           <a:p>
@@ -5895,7 +5895,7 @@
         </p:spPr>
         <p:txBody>
           <a:bodyPr wrap="square">
-            <a:spAutoFit/>
+            <a:normAutofit/>
           </a:bodyPr>
           <a:lstStyle/>
           <a:p>
@@ -5930,7 +5930,7 @@
         </p:spPr>
         <p:txBody>
           <a:bodyPr wrap="square">
-            <a:spAutoFit/>
+            <a:normAutofit/>
           </a:bodyPr>
           <a:lstStyle/>
           <a:p>
@@ -5967,7 +5967,7 @@
         </p:spPr>
         <p:txBody>
           <a:bodyPr wrap="square">
-            <a:spAutoFit/>
+            <a:normAutofit/>
           </a:bodyPr>
           <a:lstStyle/>
           <a:p>
@@ -6045,7 +6045,7 @@
         </p:spPr>
         <p:txBody>
           <a:bodyPr wrap="square">
-            <a:spAutoFit/>
+            <a:normAutofit/>
           </a:bodyPr>
           <a:lstStyle/>
           <a:p>
@@ -6594,7 +6594,7 @@
         </p:spPr>
         <p:txBody>
           <a:bodyPr wrap="square">
-            <a:spAutoFit/>
+            <a:normAutofit/>
           </a:bodyPr>
           <a:lstStyle/>
           <a:p>
@@ -6629,7 +6629,7 @@
         </p:spPr>
         <p:txBody>
           <a:bodyPr wrap="square">
-            <a:spAutoFit/>
+            <a:normAutofit/>
           </a:bodyPr>
           <a:lstStyle/>
           <a:p>
@@ -6665,7 +6665,7 @@
         </p:spPr>
         <p:txBody>
           <a:bodyPr wrap="square">
-            <a:spAutoFit/>
+            <a:normAutofit/>
           </a:bodyPr>
           <a:lstStyle/>
           <a:p>
@@ -6847,7 +6847,7 @@
         </p:spPr>
         <p:txBody>
           <a:bodyPr wrap="square">
-            <a:spAutoFit/>
+            <a:normAutofit/>
           </a:bodyPr>
           <a:lstStyle/>
           <a:p>
@@ -6882,7 +6882,7 @@
         </p:spPr>
         <p:txBody>
           <a:bodyPr wrap="square">
-            <a:spAutoFit/>
+            <a:normAutofit/>
           </a:bodyPr>
           <a:lstStyle/>
           <a:p>
@@ -6960,7 +6960,7 @@
         </p:spPr>
         <p:txBody>
           <a:bodyPr wrap="square">
-            <a:spAutoFit/>
+            <a:normAutofit/>
           </a:bodyPr>
           <a:lstStyle/>
           <a:p>
@@ -7040,7 +7040,7 @@
         </p:spPr>
         <p:txBody>
           <a:bodyPr wrap="square">
-            <a:spAutoFit/>
+            <a:normAutofit/>
           </a:bodyPr>
           <a:lstStyle/>
           <a:p>
@@ -7383,7 +7383,7 @@
         </p:spPr>
         <p:txBody>
           <a:bodyPr wrap="square">
-            <a:spAutoFit/>
+            <a:normAutofit/>
           </a:bodyPr>
           <a:lstStyle/>
           <a:p>
@@ -7463,7 +7463,7 @@
         </p:spPr>
         <p:txBody>
           <a:bodyPr wrap="square">
-            <a:spAutoFit/>
+            <a:normAutofit/>
           </a:bodyPr>
           <a:lstStyle/>
           <a:p>
@@ -8060,7 +8060,7 @@
         </p:spPr>
         <p:txBody>
           <a:bodyPr wrap="square">
-            <a:spAutoFit/>
+            <a:normAutofit/>
           </a:bodyPr>
           <a:lstStyle/>
           <a:p>
@@ -8095,7 +8095,7 @@
         </p:spPr>
         <p:txBody>
           <a:bodyPr wrap="square">
-            <a:spAutoFit/>
+            <a:normAutofit/>
           </a:bodyPr>
           <a:lstStyle/>
           <a:p>
@@ -8130,7 +8130,7 @@
         </p:spPr>
         <p:txBody>
           <a:bodyPr wrap="square">
-            <a:spAutoFit/>
+            <a:normAutofit/>
           </a:bodyPr>
           <a:lstStyle/>
           <a:p>
@@ -8167,7 +8167,7 @@
         </p:spPr>
         <p:txBody>
           <a:bodyPr wrap="square">
-            <a:spAutoFit/>
+            <a:normAutofit/>
           </a:bodyPr>
           <a:lstStyle/>
           <a:p>
@@ -8245,7 +8245,7 @@
         </p:spPr>
         <p:txBody>
           <a:bodyPr wrap="square">
-            <a:spAutoFit/>
+            <a:normAutofit/>
           </a:bodyPr>
           <a:lstStyle/>
           <a:p>
@@ -8767,7 +8767,7 @@
         </p:spPr>
         <p:txBody>
           <a:bodyPr wrap="square">
-            <a:spAutoFit/>
+            <a:normAutofit/>
           </a:bodyPr>
           <a:lstStyle/>
           <a:p>
@@ -8802,7 +8802,7 @@
         </p:spPr>
         <p:txBody>
           <a:bodyPr wrap="square">
-            <a:spAutoFit/>
+            <a:normAutofit/>
           </a:bodyPr>
           <a:lstStyle/>
           <a:p>
@@ -8880,7 +8880,7 @@
         </p:spPr>
         <p:txBody>
           <a:bodyPr wrap="square">
-            <a:spAutoFit/>
+            <a:normAutofit/>
           </a:bodyPr>
           <a:lstStyle/>
           <a:p>
@@ -8960,7 +8960,7 @@
         </p:spPr>
         <p:txBody>
           <a:bodyPr wrap="square">
-            <a:spAutoFit/>
+            <a:normAutofit/>
           </a:bodyPr>
           <a:lstStyle/>
           <a:p>
@@ -9447,7 +9447,7 @@
         </p:spPr>
         <p:txBody>
           <a:bodyPr wrap="square">
-            <a:spAutoFit/>
+            <a:normAutofit/>
           </a:bodyPr>
           <a:lstStyle/>
           <a:p>
@@ -9527,7 +9527,7 @@
         </p:spPr>
         <p:txBody>
           <a:bodyPr wrap="square">
-            <a:spAutoFit/>
+            <a:normAutofit/>
           </a:bodyPr>
           <a:lstStyle/>
           <a:p>
@@ -10177,7 +10177,7 @@
         </p:spPr>
         <p:txBody>
           <a:bodyPr wrap="square">
-            <a:spAutoFit/>
+            <a:normAutofit/>
           </a:bodyPr>
           <a:lstStyle/>
           <a:p>
@@ -10212,7 +10212,7 @@
         </p:spPr>
         <p:txBody>
           <a:bodyPr wrap="square">
-            <a:spAutoFit/>
+            <a:normAutofit/>
           </a:bodyPr>
           <a:lstStyle/>
           <a:p>
@@ -10378,7 +10378,7 @@
         </p:spPr>
         <p:txBody>
           <a:bodyPr wrap="square">
-            <a:spAutoFit/>
+            <a:normAutofit/>
           </a:bodyPr>
           <a:lstStyle/>
           <a:p>
@@ -10413,7 +10413,7 @@
         </p:spPr>
         <p:txBody>
           <a:bodyPr wrap="square">
-            <a:spAutoFit/>
+            <a:normAutofit/>
           </a:bodyPr>
           <a:lstStyle/>
           <a:p>
@@ -10448,7 +10448,7 @@
         </p:spPr>
         <p:txBody>
           <a:bodyPr wrap="square">
-            <a:spAutoFit/>
+            <a:normAutofit/>
           </a:bodyPr>
           <a:lstStyle/>
           <a:p>
@@ -10799,7 +10799,7 @@
         </p:spPr>
         <p:txBody>
           <a:bodyPr wrap="square">
-            <a:spAutoFit/>
+            <a:normAutofit/>
           </a:bodyPr>
           <a:lstStyle/>
           <a:p>
@@ -10834,7 +10834,7 @@
         </p:spPr>
         <p:txBody>
           <a:bodyPr wrap="square">
-            <a:spAutoFit/>
+            <a:normAutofit/>
           </a:bodyPr>
           <a:lstStyle/>
           <a:p>
@@ -10869,7 +10869,7 @@
         </p:spPr>
         <p:txBody>
           <a:bodyPr wrap="square">
-            <a:spAutoFit/>
+            <a:normAutofit/>
           </a:bodyPr>
           <a:lstStyle/>
           <a:p>
@@ -11236,7 +11236,7 @@
         </p:spPr>
         <p:txBody>
           <a:bodyPr wrap="square">
-            <a:spAutoFit/>
+            <a:normAutofit/>
           </a:bodyPr>
           <a:lstStyle/>
           <a:p>
@@ -11271,7 +11271,7 @@
         </p:spPr>
         <p:txBody>
           <a:bodyPr wrap="square">
-            <a:spAutoFit/>
+            <a:normAutofit/>
           </a:bodyPr>
           <a:lstStyle/>
           <a:p>
@@ -11306,7 +11306,7 @@
         </p:spPr>
         <p:txBody>
           <a:bodyPr wrap="square">
-            <a:spAutoFit/>
+            <a:normAutofit/>
           </a:bodyPr>
           <a:lstStyle/>
           <a:p>
@@ -11759,7 +11759,7 @@
         </p:spPr>
         <p:txBody>
           <a:bodyPr wrap="square">
-            <a:spAutoFit/>
+            <a:normAutofit/>
           </a:bodyPr>
           <a:lstStyle/>
           <a:p>
@@ -11794,7 +11794,7 @@
         </p:spPr>
         <p:txBody>
           <a:bodyPr wrap="square">
-            <a:spAutoFit/>
+            <a:normAutofit/>
           </a:bodyPr>
           <a:lstStyle/>
           <a:p>
@@ -11829,7 +11829,7 @@
         </p:spPr>
         <p:txBody>
           <a:bodyPr wrap="square">
-            <a:spAutoFit/>
+            <a:normAutofit/>
           </a:bodyPr>
           <a:lstStyle/>
           <a:p>
@@ -12011,7 +12011,7 @@
         </p:spPr>
         <p:txBody>
           <a:bodyPr wrap="square">
-            <a:spAutoFit/>
+            <a:normAutofit/>
           </a:bodyPr>
           <a:lstStyle/>
           <a:p>
@@ -12046,7 +12046,7 @@
         </p:spPr>
         <p:txBody>
           <a:bodyPr wrap="square">
-            <a:spAutoFit/>
+            <a:normAutofit/>
           </a:bodyPr>
           <a:lstStyle/>
           <a:p>
@@ -12124,7 +12124,7 @@
         </p:spPr>
         <p:txBody>
           <a:bodyPr wrap="square">
-            <a:spAutoFit/>
+            <a:normAutofit/>
           </a:bodyPr>
           <a:lstStyle/>
           <a:p>
@@ -12204,7 +12204,7 @@
         </p:spPr>
         <p:txBody>
           <a:bodyPr wrap="square">
-            <a:spAutoFit/>
+            <a:normAutofit/>
           </a:bodyPr>
           <a:lstStyle/>
           <a:p>
@@ -12611,7 +12611,7 @@
         </p:spPr>
         <p:txBody>
           <a:bodyPr wrap="square">
-            <a:spAutoFit/>
+            <a:normAutofit/>
           </a:bodyPr>
           <a:lstStyle/>
           <a:p>
@@ -12691,7 +12691,7 @@
         </p:spPr>
         <p:txBody>
           <a:bodyPr wrap="square">
-            <a:spAutoFit/>
+            <a:normAutofit/>
           </a:bodyPr>
           <a:lstStyle/>
           <a:p>
@@ -13277,7 +13277,7 @@
         </p:spPr>
         <p:txBody>
           <a:bodyPr wrap="square">
-            <a:spAutoFit/>
+            <a:normAutofit/>
           </a:bodyPr>
           <a:lstStyle/>
           <a:p>
@@ -13312,7 +13312,7 @@
         </p:spPr>
         <p:txBody>
           <a:bodyPr wrap="square">
-            <a:spAutoFit/>
+            <a:normAutofit/>
           </a:bodyPr>
           <a:lstStyle/>
           <a:p>
@@ -13390,7 +13390,7 @@
         </p:spPr>
         <p:txBody>
           <a:bodyPr wrap="square">
-            <a:spAutoFit/>
+            <a:normAutofit/>
           </a:bodyPr>
           <a:lstStyle/>
           <a:p>
@@ -13470,7 +13470,7 @@
         </p:spPr>
         <p:txBody>
           <a:bodyPr wrap="square">
-            <a:spAutoFit/>
+            <a:normAutofit/>
           </a:bodyPr>
           <a:lstStyle/>
           <a:p>
@@ -13813,7 +13813,7 @@
         </p:spPr>
         <p:txBody>
           <a:bodyPr wrap="square">
-            <a:spAutoFit/>
+            <a:normAutofit/>
           </a:bodyPr>
           <a:lstStyle/>
           <a:p>
@@ -13893,7 +13893,7 @@
         </p:spPr>
         <p:txBody>
           <a:bodyPr wrap="square">
-            <a:spAutoFit/>
+            <a:normAutofit/>
           </a:bodyPr>
           <a:lstStyle/>
           <a:p>
@@ -14415,7 +14415,7 @@
         </p:spPr>
         <p:txBody>
           <a:bodyPr wrap="square">
-            <a:spAutoFit/>
+            <a:normAutofit/>
           </a:bodyPr>
           <a:lstStyle/>
           <a:p>
@@ -14450,7 +14450,7 @@
         </p:spPr>
         <p:txBody>
           <a:bodyPr wrap="square">
-            <a:spAutoFit/>
+            <a:normAutofit/>
           </a:bodyPr>
           <a:lstStyle/>
           <a:p>
@@ -14528,7 +14528,7 @@
         </p:spPr>
         <p:txBody>
           <a:bodyPr wrap="square">
-            <a:spAutoFit/>
+            <a:normAutofit/>
           </a:bodyPr>
           <a:lstStyle/>
           <a:p>
@@ -14606,7 +14606,7 @@
         </p:spPr>
         <p:txBody>
           <a:bodyPr wrap="square">
-            <a:spAutoFit/>
+            <a:normAutofit/>
           </a:bodyPr>
           <a:lstStyle/>
           <a:p>
@@ -14641,7 +14641,7 @@
         </p:spPr>
         <p:txBody>
           <a:bodyPr wrap="square">
-            <a:spAutoFit/>
+            <a:normAutofit/>
           </a:bodyPr>
           <a:lstStyle/>
           <a:p>
@@ -14835,7 +14835,7 @@
         </p:spPr>
         <p:txBody>
           <a:bodyPr wrap="square">
-            <a:spAutoFit/>
+            <a:normAutofit/>
           </a:bodyPr>
           <a:lstStyle/>
           <a:p>
@@ -14870,7 +14870,7 @@
         </p:spPr>
         <p:txBody>
           <a:bodyPr wrap="square">
-            <a:spAutoFit/>
+            <a:normAutofit/>
           </a:bodyPr>
           <a:lstStyle/>
           <a:p>
@@ -15048,7 +15048,7 @@
         </p:spPr>
         <p:txBody>
           <a:bodyPr wrap="square">
-            <a:spAutoFit/>
+            <a:normAutofit/>
           </a:bodyPr>
           <a:lstStyle/>
           <a:p>
@@ -15083,7 +15083,7 @@
         </p:spPr>
         <p:txBody>
           <a:bodyPr wrap="square">
-            <a:spAutoFit/>
+            <a:normAutofit/>
           </a:bodyPr>
           <a:lstStyle/>
           <a:p>
@@ -15261,7 +15261,7 @@
         </p:spPr>
         <p:txBody>
           <a:bodyPr wrap="square">
-            <a:spAutoFit/>
+            <a:normAutofit/>
           </a:bodyPr>
           <a:lstStyle/>
           <a:p>
@@ -15296,7 +15296,7 @@
         </p:spPr>
         <p:txBody>
           <a:bodyPr wrap="square">
-            <a:spAutoFit/>
+            <a:normAutofit/>
           </a:bodyPr>
           <a:lstStyle/>
           <a:p>
@@ -15431,7 +15431,7 @@
         </p:spPr>
         <p:txBody>
           <a:bodyPr wrap="square">
-            <a:spAutoFit/>
+            <a:normAutofit/>
           </a:bodyPr>
           <a:lstStyle/>
           <a:p>
@@ -15656,7 +15656,7 @@
         </p:spPr>
         <p:txBody>
           <a:bodyPr wrap="square">
-            <a:spAutoFit/>
+            <a:normAutofit/>
           </a:bodyPr>
           <a:lstStyle/>
           <a:p>
@@ -15691,7 +15691,7 @@
         </p:spPr>
         <p:txBody>
           <a:bodyPr wrap="square">
-            <a:spAutoFit/>
+            <a:normAutofit/>
           </a:bodyPr>
           <a:lstStyle/>
           <a:p>
@@ -15726,7 +15726,7 @@
         </p:spPr>
         <p:txBody>
           <a:bodyPr wrap="square">
-            <a:spAutoFit/>
+            <a:normAutofit/>
           </a:bodyPr>
           <a:lstStyle/>
           <a:p>
@@ -15761,7 +15761,7 @@
         </p:spPr>
         <p:txBody>
           <a:bodyPr wrap="square">
-            <a:spAutoFit/>
+            <a:normAutofit/>
           </a:bodyPr>
           <a:lstStyle/>
           <a:p>
@@ -15943,7 +15943,7 @@
         </p:spPr>
         <p:txBody>
           <a:bodyPr wrap="square">
-            <a:spAutoFit/>
+            <a:normAutofit/>
           </a:bodyPr>
           <a:lstStyle/>
           <a:p>
@@ -15978,7 +15978,7 @@
         </p:spPr>
         <p:txBody>
           <a:bodyPr wrap="square">
-            <a:spAutoFit/>
+            <a:normAutofit/>
           </a:bodyPr>
           <a:lstStyle/>
           <a:p>
@@ -16142,7 +16142,7 @@
         </p:spPr>
         <p:txBody>
           <a:bodyPr wrap="square">
-            <a:spAutoFit/>
+            <a:normAutofit/>
           </a:bodyPr>
           <a:lstStyle/>
           <a:p>
@@ -16177,7 +16177,7 @@
         </p:spPr>
         <p:txBody>
           <a:bodyPr wrap="square">
-            <a:spAutoFit/>
+            <a:normAutofit/>
           </a:bodyPr>
           <a:lstStyle/>
           <a:p>
@@ -16298,7 +16298,7 @@
         </p:spPr>
         <p:txBody>
           <a:bodyPr wrap="square">
-            <a:spAutoFit/>
+            <a:normAutofit/>
           </a:bodyPr>
           <a:lstStyle/>
           <a:p>
@@ -16333,7 +16333,7 @@
         </p:spPr>
         <p:txBody>
           <a:bodyPr wrap="square">
-            <a:spAutoFit/>
+            <a:normAutofit/>
           </a:bodyPr>
           <a:lstStyle/>
           <a:p>
@@ -16454,7 +16454,7 @@
         </p:spPr>
         <p:txBody>
           <a:bodyPr wrap="square">
-            <a:spAutoFit/>
+            <a:normAutofit/>
           </a:bodyPr>
           <a:lstStyle/>
           <a:p>
@@ -16489,7 +16489,7 @@
         </p:spPr>
         <p:txBody>
           <a:bodyPr wrap="square">
-            <a:spAutoFit/>
+            <a:normAutofit/>
           </a:bodyPr>
           <a:lstStyle/>
           <a:p>
@@ -16610,7 +16610,7 @@
         </p:spPr>
         <p:txBody>
           <a:bodyPr wrap="square">
-            <a:spAutoFit/>
+            <a:normAutofit/>
           </a:bodyPr>
           <a:lstStyle/>
           <a:p>
@@ -16645,7 +16645,7 @@
         </p:spPr>
         <p:txBody>
           <a:bodyPr wrap="square">
-            <a:spAutoFit/>
+            <a:normAutofit/>
           </a:bodyPr>
           <a:lstStyle/>
           <a:p>
@@ -16827,7 +16827,7 @@
         </p:spPr>
         <p:txBody>
           <a:bodyPr wrap="square">
-            <a:spAutoFit/>
+            <a:normAutofit/>
           </a:bodyPr>
           <a:lstStyle/>
           <a:p>
@@ -16862,7 +16862,7 @@
         </p:spPr>
         <p:txBody>
           <a:bodyPr wrap="square">
-            <a:spAutoFit/>
+            <a:normAutofit/>
           </a:bodyPr>
           <a:lstStyle/>
           <a:p>
@@ -16940,7 +16940,7 @@
         </p:spPr>
         <p:txBody>
           <a:bodyPr wrap="square">
-            <a:spAutoFit/>
+            <a:normAutofit/>
           </a:bodyPr>
           <a:lstStyle/>
           <a:p>
@@ -17020,7 +17020,7 @@
         </p:spPr>
         <p:txBody>
           <a:bodyPr wrap="square">
-            <a:spAutoFit/>
+            <a:normAutofit/>
           </a:bodyPr>
           <a:lstStyle/>
           <a:p>
@@ -17395,7 +17395,7 @@
         </p:spPr>
         <p:txBody>
           <a:bodyPr wrap="square">
-            <a:spAutoFit/>
+            <a:normAutofit/>
           </a:bodyPr>
           <a:lstStyle/>
           <a:p>
@@ -17475,7 +17475,7 @@
         </p:spPr>
         <p:txBody>
           <a:bodyPr wrap="square">
-            <a:spAutoFit/>
+            <a:normAutofit/>
           </a:bodyPr>
           <a:lstStyle/>
           <a:p>
@@ -18072,7 +18072,7 @@
         </p:spPr>
         <p:txBody>
           <a:bodyPr wrap="square">
-            <a:spAutoFit/>
+            <a:normAutofit/>
           </a:bodyPr>
           <a:lstStyle/>
           <a:p>
@@ -18107,7 +18107,7 @@
         </p:spPr>
         <p:txBody>
           <a:bodyPr wrap="square">
-            <a:spAutoFit/>
+            <a:normAutofit/>
           </a:bodyPr>
           <a:lstStyle/>
           <a:p>
@@ -18143,7 +18143,7 @@
         </p:spPr>
         <p:txBody>
           <a:bodyPr wrap="square">
-            <a:spAutoFit/>
+            <a:normAutofit/>
           </a:bodyPr>
           <a:lstStyle/>
           <a:p>
@@ -18325,7 +18325,7 @@
         </p:spPr>
         <p:txBody>
           <a:bodyPr wrap="square">
-            <a:spAutoFit/>
+            <a:normAutofit/>
           </a:bodyPr>
           <a:lstStyle/>
           <a:p>
@@ -18360,7 +18360,7 @@
         </p:spPr>
         <p:txBody>
           <a:bodyPr wrap="square">
-            <a:spAutoFit/>
+            <a:normAutofit/>
           </a:bodyPr>
           <a:lstStyle/>
           <a:p>
@@ -18438,7 +18438,7 @@
         </p:spPr>
         <p:txBody>
           <a:bodyPr wrap="square">
-            <a:spAutoFit/>
+            <a:normAutofit/>
           </a:bodyPr>
           <a:lstStyle/>
           <a:p>
@@ -18518,7 +18518,7 @@
         </p:spPr>
         <p:txBody>
           <a:bodyPr wrap="square">
-            <a:spAutoFit/>
+            <a:normAutofit/>
           </a:bodyPr>
           <a:lstStyle/>
           <a:p>
@@ -18669,7 +18669,7 @@
         </p:spPr>
         <p:txBody>
           <a:bodyPr wrap="square">
-            <a:spAutoFit/>
+            <a:normAutofit/>
           </a:bodyPr>
           <a:lstStyle/>
           <a:p>
@@ -18749,7 +18749,7 @@
         </p:spPr>
         <p:txBody>
           <a:bodyPr wrap="square">
-            <a:spAutoFit/>
+            <a:normAutofit/>
           </a:bodyPr>
           <a:lstStyle/>
           <a:p>
@@ -19111,7 +19111,7 @@
         </p:spPr>
         <p:txBody>
           <a:bodyPr wrap="square">
-            <a:spAutoFit/>
+            <a:normAutofit/>
           </a:bodyPr>
           <a:lstStyle/>
           <a:p>
@@ -19146,7 +19146,7 @@
         </p:spPr>
         <p:txBody>
           <a:bodyPr wrap="square">
-            <a:spAutoFit/>
+            <a:normAutofit/>
           </a:bodyPr>
           <a:lstStyle/>
           <a:p>
@@ -19224,7 +19224,7 @@
         </p:spPr>
         <p:txBody>
           <a:bodyPr wrap="square">
-            <a:spAutoFit/>
+            <a:normAutofit/>
           </a:bodyPr>
           <a:lstStyle/>
           <a:p>
@@ -19302,7 +19302,7 @@
         </p:spPr>
         <p:txBody>
           <a:bodyPr wrap="square">
-            <a:spAutoFit/>
+            <a:normAutofit/>
           </a:bodyPr>
           <a:lstStyle/>
           <a:p>
@@ -19337,7 +19337,7 @@
         </p:spPr>
         <p:txBody>
           <a:bodyPr wrap="square">
-            <a:spAutoFit/>
+            <a:normAutofit/>
           </a:bodyPr>
           <a:lstStyle/>
           <a:p>
@@ -19531,7 +19531,7 @@
         </p:spPr>
         <p:txBody>
           <a:bodyPr wrap="square">
-            <a:spAutoFit/>
+            <a:normAutofit/>
           </a:bodyPr>
           <a:lstStyle/>
           <a:p>
@@ -19566,7 +19566,7 @@
         </p:spPr>
         <p:txBody>
           <a:bodyPr wrap="square">
-            <a:spAutoFit/>
+            <a:normAutofit/>
           </a:bodyPr>
           <a:lstStyle/>
           <a:p>
@@ -19776,7 +19776,7 @@
         </p:spPr>
         <p:txBody>
           <a:bodyPr wrap="square">
-            <a:spAutoFit/>
+            <a:normAutofit/>
           </a:bodyPr>
           <a:lstStyle/>
           <a:p>
@@ -19811,7 +19811,7 @@
         </p:spPr>
         <p:txBody>
           <a:bodyPr wrap="square">
-            <a:spAutoFit/>
+            <a:normAutofit/>
           </a:bodyPr>
           <a:lstStyle/>
           <a:p>
@@ -20141,7 +20141,7 @@
         </p:spPr>
         <p:txBody>
           <a:bodyPr wrap="square">
-            <a:spAutoFit/>
+            <a:normAutofit/>
           </a:bodyPr>
           <a:lstStyle/>
           <a:p>
@@ -20176,7 +20176,7 @@
         </p:spPr>
         <p:txBody>
           <a:bodyPr wrap="square">
-            <a:spAutoFit/>
+            <a:normAutofit/>
           </a:bodyPr>
           <a:lstStyle/>
           <a:p>
@@ -20254,7 +20254,7 @@
         </p:spPr>
         <p:txBody>
           <a:bodyPr wrap="square">
-            <a:spAutoFit/>
+            <a:normAutofit/>
           </a:bodyPr>
           <a:lstStyle/>
           <a:p>
@@ -20332,7 +20332,7 @@
         </p:spPr>
         <p:txBody>
           <a:bodyPr wrap="square">
-            <a:spAutoFit/>
+            <a:normAutofit/>
           </a:bodyPr>
           <a:lstStyle/>
           <a:p>
@@ -20367,7 +20367,7 @@
         </p:spPr>
         <p:txBody>
           <a:bodyPr wrap="square">
-            <a:spAutoFit/>
+            <a:normAutofit/>
           </a:bodyPr>
           <a:lstStyle/>
           <a:p>
@@ -20593,7 +20593,7 @@
         </p:spPr>
         <p:txBody>
           <a:bodyPr wrap="square">
-            <a:spAutoFit/>
+            <a:normAutofit/>
           </a:bodyPr>
           <a:lstStyle/>
           <a:p>
@@ -20628,7 +20628,7 @@
         </p:spPr>
         <p:txBody>
           <a:bodyPr wrap="square">
-            <a:spAutoFit/>
+            <a:normAutofit/>
           </a:bodyPr>
           <a:lstStyle/>
           <a:p>
@@ -20870,7 +20870,7 @@
         </p:spPr>
         <p:txBody>
           <a:bodyPr wrap="square">
-            <a:spAutoFit/>
+            <a:normAutofit/>
           </a:bodyPr>
           <a:lstStyle/>
           <a:p>
@@ -20905,7 +20905,7 @@
         </p:spPr>
         <p:txBody>
           <a:bodyPr wrap="square">
-            <a:spAutoFit/>
+            <a:normAutofit/>
           </a:bodyPr>
           <a:lstStyle/>
           <a:p>
@@ -21088,7 +21088,7 @@
         </p:spPr>
         <p:txBody>
           <a:bodyPr wrap="square">
-            <a:spAutoFit/>
+            <a:normAutofit/>
           </a:bodyPr>
           <a:lstStyle/>
           <a:p>
@@ -21313,7 +21313,7 @@
         </p:spPr>
         <p:txBody>
           <a:bodyPr wrap="square">
-            <a:spAutoFit/>
+            <a:normAutofit/>
           </a:bodyPr>
           <a:lstStyle/>
           <a:p>
@@ -21348,7 +21348,7 @@
         </p:spPr>
         <p:txBody>
           <a:bodyPr wrap="square">
-            <a:spAutoFit/>
+            <a:normAutofit/>
           </a:bodyPr>
           <a:lstStyle/>
           <a:p>
@@ -21383,7 +21383,7 @@
         </p:spPr>
         <p:txBody>
           <a:bodyPr wrap="square">
-            <a:spAutoFit/>
+            <a:normAutofit/>
           </a:bodyPr>
           <a:lstStyle/>
           <a:p>
@@ -21420,7 +21420,7 @@
         </p:spPr>
         <p:txBody>
           <a:bodyPr wrap="square">
-            <a:spAutoFit/>
+            <a:normAutofit/>
           </a:bodyPr>
           <a:lstStyle/>
           <a:p>
@@ -21498,7 +21498,7 @@
         </p:spPr>
         <p:txBody>
           <a:bodyPr wrap="square">
-            <a:spAutoFit/>
+            <a:normAutofit/>
           </a:bodyPr>
           <a:lstStyle/>
           <a:p>

--- a/Santander_LimitedCompany_Walkthrough.pptx
+++ b/Santander_LimitedCompany_Walkthrough.pptx
@@ -3301,7 +3301,7 @@
         </p:spPr>
         <p:txBody>
           <a:bodyPr wrap="square">
-            <a:normAutofit/>
+            <a:noAutofit/>
           </a:bodyPr>
           <a:lstStyle/>
           <a:p>
@@ -3336,7 +3336,7 @@
         </p:spPr>
         <p:txBody>
           <a:bodyPr wrap="square">
-            <a:normAutofit/>
+            <a:noAutofit/>
           </a:bodyPr>
           <a:lstStyle/>
           <a:p>
@@ -3372,7 +3372,7 @@
         </p:spPr>
         <p:txBody>
           <a:bodyPr wrap="square">
-            <a:normAutofit/>
+            <a:noAutofit/>
           </a:bodyPr>
           <a:lstStyle/>
           <a:p>
@@ -3407,7 +3407,7 @@
         </p:spPr>
         <p:txBody>
           <a:bodyPr wrap="square">
-            <a:normAutofit/>
+            <a:noAutofit/>
           </a:bodyPr>
           <a:lstStyle/>
           <a:p>
@@ -3442,7 +3442,7 @@
         </p:spPr>
         <p:txBody>
           <a:bodyPr wrap="square">
-            <a:normAutofit/>
+            <a:noAutofit/>
           </a:bodyPr>
           <a:lstStyle/>
           <a:p>
@@ -3624,7 +3624,7 @@
         </p:spPr>
         <p:txBody>
           <a:bodyPr wrap="square">
-            <a:normAutofit/>
+            <a:noAutofit/>
           </a:bodyPr>
           <a:lstStyle/>
           <a:p>
@@ -3659,7 +3659,7 @@
         </p:spPr>
         <p:txBody>
           <a:bodyPr wrap="square">
-            <a:normAutofit/>
+            <a:noAutofit/>
           </a:bodyPr>
           <a:lstStyle/>
           <a:p>
@@ -3737,7 +3737,7 @@
         </p:spPr>
         <p:txBody>
           <a:bodyPr wrap="square">
-            <a:normAutofit/>
+            <a:noAutofit/>
           </a:bodyPr>
           <a:lstStyle/>
           <a:p>
@@ -3817,7 +3817,7 @@
         </p:spPr>
         <p:txBody>
           <a:bodyPr wrap="square">
-            <a:normAutofit/>
+            <a:noAutofit/>
           </a:bodyPr>
           <a:lstStyle/>
           <a:p>
@@ -4096,7 +4096,7 @@
         </p:spPr>
         <p:txBody>
           <a:bodyPr wrap="square">
-            <a:normAutofit/>
+            <a:noAutofit/>
           </a:bodyPr>
           <a:lstStyle/>
           <a:p>
@@ -4176,7 +4176,7 @@
         </p:spPr>
         <p:txBody>
           <a:bodyPr wrap="square">
-            <a:normAutofit/>
+            <a:noAutofit/>
           </a:bodyPr>
           <a:lstStyle/>
           <a:p>
@@ -4714,7 +4714,7 @@
         </p:spPr>
         <p:txBody>
           <a:bodyPr wrap="square">
-            <a:normAutofit/>
+            <a:noAutofit/>
           </a:bodyPr>
           <a:lstStyle/>
           <a:p>
@@ -4749,7 +4749,7 @@
         </p:spPr>
         <p:txBody>
           <a:bodyPr wrap="square">
-            <a:normAutofit/>
+            <a:noAutofit/>
           </a:bodyPr>
           <a:lstStyle/>
           <a:p>
@@ -4827,7 +4827,7 @@
         </p:spPr>
         <p:txBody>
           <a:bodyPr wrap="square">
-            <a:normAutofit/>
+            <a:noAutofit/>
           </a:bodyPr>
           <a:lstStyle/>
           <a:p>
@@ -4907,7 +4907,7 @@
         </p:spPr>
         <p:txBody>
           <a:bodyPr wrap="square">
-            <a:normAutofit/>
+            <a:noAutofit/>
           </a:bodyPr>
           <a:lstStyle/>
           <a:p>
@@ -5234,7 +5234,7 @@
         </p:spPr>
         <p:txBody>
           <a:bodyPr wrap="square">
-            <a:normAutofit/>
+            <a:noAutofit/>
           </a:bodyPr>
           <a:lstStyle/>
           <a:p>
@@ -5314,7 +5314,7 @@
         </p:spPr>
         <p:txBody>
           <a:bodyPr wrap="square">
-            <a:normAutofit/>
+            <a:noAutofit/>
           </a:bodyPr>
           <a:lstStyle/>
           <a:p>
@@ -5863,7 +5863,7 @@
         </p:spPr>
         <p:txBody>
           <a:bodyPr wrap="square">
-            <a:normAutofit/>
+            <a:noAutofit/>
           </a:bodyPr>
           <a:lstStyle/>
           <a:p>
@@ -5898,7 +5898,7 @@
         </p:spPr>
         <p:txBody>
           <a:bodyPr wrap="square">
-            <a:normAutofit/>
+            <a:noAutofit/>
           </a:bodyPr>
           <a:lstStyle/>
           <a:p>
@@ -5933,7 +5933,7 @@
         </p:spPr>
         <p:txBody>
           <a:bodyPr wrap="square">
-            <a:normAutofit/>
+            <a:noAutofit/>
           </a:bodyPr>
           <a:lstStyle/>
           <a:p>
@@ -5970,13 +5970,13 @@
         </p:spPr>
         <p:txBody>
           <a:bodyPr wrap="square">
-            <a:normAutofit/>
+            <a:noAutofit/>
           </a:bodyPr>
           <a:lstStyle/>
           <a:p>
             <a:pPr algn="l"/>
             <a:r>
-              <a:rPr sz="2800" b="1" i="0">
+              <a:rPr sz="2600" b="1" i="0">
                 <a:solidFill>
                   <a:srgbClr val="1C1917"/>
                 </a:solidFill>
@@ -6038,8 +6038,8 @@
         </p:nvSpPr>
         <p:spPr>
           <a:xfrm>
-            <a:off x="4114800" y="2057400"/>
-            <a:ext cx="7680960" cy="4389120"/>
+            <a:off x="4114800" y="2011680"/>
+            <a:ext cx="7680960" cy="4663440"/>
           </a:xfrm>
           <a:prstGeom prst="rect">
             <a:avLst/>
@@ -6048,17 +6048,17 @@
         </p:spPr>
         <p:txBody>
           <a:bodyPr wrap="square">
-            <a:normAutofit/>
+            <a:noAutofit/>
           </a:bodyPr>
           <a:lstStyle/>
           <a:p>
             <a:pPr>
               <a:spcAft>
-                <a:spcPts val="600"/>
-              </a:spcAft>
-            </a:pPr>
-            <a:r>
-              <a:rPr sz="1300">
+                <a:spcPts val="300"/>
+              </a:spcAft>
+            </a:pPr>
+            <a:r>
+              <a:rPr sz="1000">
                 <a:solidFill>
                   <a:srgbClr val="44403C"/>
                 </a:solidFill>
@@ -6070,11 +6070,11 @@
           <a:p>
             <a:pPr>
               <a:spcAft>
-                <a:spcPts val="600"/>
-              </a:spcAft>
-            </a:pPr>
-            <a:r>
-              <a:rPr sz="1300">
+                <a:spcPts val="300"/>
+              </a:spcAft>
+            </a:pPr>
+            <a:r>
+              <a:rPr sz="1000">
                 <a:solidFill>
                   <a:srgbClr val="44403C"/>
                 </a:solidFill>
@@ -6086,11 +6086,11 @@
           <a:p>
             <a:pPr>
               <a:spcAft>
-                <a:spcPts val="600"/>
-              </a:spcAft>
-            </a:pPr>
-            <a:r>
-              <a:rPr sz="1300">
+                <a:spcPts val="300"/>
+              </a:spcAft>
+            </a:pPr>
+            <a:r>
+              <a:rPr sz="1000">
                 <a:solidFill>
                   <a:srgbClr val="44403C"/>
                 </a:solidFill>
@@ -6102,11 +6102,11 @@
           <a:p>
             <a:pPr>
               <a:spcAft>
-                <a:spcPts val="600"/>
-              </a:spcAft>
-            </a:pPr>
-            <a:r>
-              <a:rPr sz="1300">
+                <a:spcPts val="300"/>
+              </a:spcAft>
+            </a:pPr>
+            <a:r>
+              <a:rPr sz="1000">
                 <a:solidFill>
                   <a:srgbClr val="44403C"/>
                 </a:solidFill>
@@ -6118,11 +6118,11 @@
           <a:p>
             <a:pPr>
               <a:spcAft>
-                <a:spcPts val="600"/>
-              </a:spcAft>
-            </a:pPr>
-            <a:r>
-              <a:rPr sz="1300">
+                <a:spcPts val="300"/>
+              </a:spcAft>
+            </a:pPr>
+            <a:r>
+              <a:rPr sz="1000">
                 <a:solidFill>
                   <a:srgbClr val="44403C"/>
                 </a:solidFill>
@@ -6134,11 +6134,11 @@
           <a:p>
             <a:pPr>
               <a:spcAft>
-                <a:spcPts val="600"/>
-              </a:spcAft>
-            </a:pPr>
-            <a:r>
-              <a:rPr sz="1300">
+                <a:spcPts val="300"/>
+              </a:spcAft>
+            </a:pPr>
+            <a:r>
+              <a:rPr sz="1000">
                 <a:solidFill>
                   <a:srgbClr val="44403C"/>
                 </a:solidFill>
@@ -6150,11 +6150,11 @@
           <a:p>
             <a:pPr>
               <a:spcAft>
-                <a:spcPts val="600"/>
-              </a:spcAft>
-            </a:pPr>
-            <a:r>
-              <a:rPr sz="1300">
+                <a:spcPts val="300"/>
+              </a:spcAft>
+            </a:pPr>
+            <a:r>
+              <a:rPr sz="1000">
                 <a:solidFill>
                   <a:srgbClr val="44403C"/>
                 </a:solidFill>
@@ -6166,11 +6166,11 @@
           <a:p>
             <a:pPr>
               <a:spcAft>
-                <a:spcPts val="600"/>
-              </a:spcAft>
-            </a:pPr>
-            <a:r>
-              <a:rPr sz="1300">
+                <a:spcPts val="300"/>
+              </a:spcAft>
+            </a:pPr>
+            <a:r>
+              <a:rPr sz="1000">
                 <a:solidFill>
                   <a:srgbClr val="44403C"/>
                 </a:solidFill>
@@ -6182,11 +6182,11 @@
           <a:p>
             <a:pPr>
               <a:spcAft>
-                <a:spcPts val="600"/>
-              </a:spcAft>
-            </a:pPr>
-            <a:r>
-              <a:rPr sz="1300">
+                <a:spcPts val="300"/>
+              </a:spcAft>
+            </a:pPr>
+            <a:r>
+              <a:rPr sz="1000">
                 <a:solidFill>
                   <a:srgbClr val="44403C"/>
                 </a:solidFill>
@@ -6198,11 +6198,11 @@
           <a:p>
             <a:pPr>
               <a:spcAft>
-                <a:spcPts val="600"/>
-              </a:spcAft>
-            </a:pPr>
-            <a:r>
-              <a:rPr sz="1300">
+                <a:spcPts val="300"/>
+              </a:spcAft>
+            </a:pPr>
+            <a:r>
+              <a:rPr sz="1000">
                 <a:solidFill>
                   <a:srgbClr val="44403C"/>
                 </a:solidFill>
@@ -6214,11 +6214,11 @@
           <a:p>
             <a:pPr>
               <a:spcAft>
-                <a:spcPts val="600"/>
-              </a:spcAft>
-            </a:pPr>
-            <a:r>
-              <a:rPr sz="1300">
+                <a:spcPts val="300"/>
+              </a:spcAft>
+            </a:pPr>
+            <a:r>
+              <a:rPr sz="1000">
                 <a:solidFill>
                   <a:srgbClr val="44403C"/>
                 </a:solidFill>
@@ -6230,11 +6230,11 @@
           <a:p>
             <a:pPr>
               <a:spcAft>
-                <a:spcPts val="600"/>
-              </a:spcAft>
-            </a:pPr>
-            <a:r>
-              <a:rPr sz="1300">
+                <a:spcPts val="300"/>
+              </a:spcAft>
+            </a:pPr>
+            <a:r>
+              <a:rPr sz="1000">
                 <a:solidFill>
                   <a:srgbClr val="44403C"/>
                 </a:solidFill>
@@ -6246,11 +6246,11 @@
           <a:p>
             <a:pPr>
               <a:spcAft>
-                <a:spcPts val="600"/>
-              </a:spcAft>
-            </a:pPr>
-            <a:r>
-              <a:rPr sz="1300">
+                <a:spcPts val="300"/>
+              </a:spcAft>
+            </a:pPr>
+            <a:r>
+              <a:rPr sz="1000">
                 <a:solidFill>
                   <a:srgbClr val="44403C"/>
                 </a:solidFill>
@@ -6262,11 +6262,11 @@
           <a:p>
             <a:pPr>
               <a:spcAft>
-                <a:spcPts val="600"/>
-              </a:spcAft>
-            </a:pPr>
-            <a:r>
-              <a:rPr sz="1300">
+                <a:spcPts val="300"/>
+              </a:spcAft>
+            </a:pPr>
+            <a:r>
+              <a:rPr sz="1000">
                 <a:solidFill>
                   <a:srgbClr val="44403C"/>
                 </a:solidFill>
@@ -6278,11 +6278,11 @@
           <a:p>
             <a:pPr>
               <a:spcAft>
-                <a:spcPts val="600"/>
-              </a:spcAft>
-            </a:pPr>
-            <a:r>
-              <a:rPr sz="1300">
+                <a:spcPts val="300"/>
+              </a:spcAft>
+            </a:pPr>
+            <a:r>
+              <a:rPr sz="1000">
                 <a:solidFill>
                   <a:srgbClr val="44403C"/>
                 </a:solidFill>
@@ -6294,11 +6294,11 @@
           <a:p>
             <a:pPr>
               <a:spcAft>
-                <a:spcPts val="600"/>
-              </a:spcAft>
-            </a:pPr>
-            <a:r>
-              <a:rPr sz="1300">
+                <a:spcPts val="300"/>
+              </a:spcAft>
+            </a:pPr>
+            <a:r>
+              <a:rPr sz="1000">
                 <a:solidFill>
                   <a:srgbClr val="44403C"/>
                 </a:solidFill>
@@ -6310,11 +6310,11 @@
           <a:p>
             <a:pPr>
               <a:spcAft>
-                <a:spcPts val="600"/>
-              </a:spcAft>
-            </a:pPr>
-            <a:r>
-              <a:rPr sz="1300">
+                <a:spcPts val="300"/>
+              </a:spcAft>
+            </a:pPr>
+            <a:r>
+              <a:rPr sz="1000">
                 <a:solidFill>
                   <a:srgbClr val="44403C"/>
                 </a:solidFill>
@@ -6326,11 +6326,11 @@
           <a:p>
             <a:pPr>
               <a:spcAft>
-                <a:spcPts val="600"/>
-              </a:spcAft>
-            </a:pPr>
-            <a:r>
-              <a:rPr sz="1300">
+                <a:spcPts val="300"/>
+              </a:spcAft>
+            </a:pPr>
+            <a:r>
+              <a:rPr sz="1000">
                 <a:solidFill>
                   <a:srgbClr val="44403C"/>
                 </a:solidFill>
@@ -6342,11 +6342,11 @@
           <a:p>
             <a:pPr>
               <a:spcAft>
-                <a:spcPts val="600"/>
-              </a:spcAft>
-            </a:pPr>
-            <a:r>
-              <a:rPr sz="1300">
+                <a:spcPts val="300"/>
+              </a:spcAft>
+            </a:pPr>
+            <a:r>
+              <a:rPr sz="1000">
                 <a:solidFill>
                   <a:srgbClr val="44403C"/>
                 </a:solidFill>
@@ -6358,11 +6358,11 @@
           <a:p>
             <a:pPr>
               <a:spcAft>
-                <a:spcPts val="600"/>
-              </a:spcAft>
-            </a:pPr>
-            <a:r>
-              <a:rPr sz="1300">
+                <a:spcPts val="300"/>
+              </a:spcAft>
+            </a:pPr>
+            <a:r>
+              <a:rPr sz="1000">
                 <a:solidFill>
                   <a:srgbClr val="44403C"/>
                 </a:solidFill>
@@ -6374,11 +6374,11 @@
           <a:p>
             <a:pPr>
               <a:spcAft>
-                <a:spcPts val="600"/>
-              </a:spcAft>
-            </a:pPr>
-            <a:r>
-              <a:rPr sz="1300">
+                <a:spcPts val="300"/>
+              </a:spcAft>
+            </a:pPr>
+            <a:r>
+              <a:rPr sz="1000">
                 <a:solidFill>
                   <a:srgbClr val="44403C"/>
                 </a:solidFill>
@@ -6597,7 +6597,7 @@
         </p:spPr>
         <p:txBody>
           <a:bodyPr wrap="square">
-            <a:normAutofit/>
+            <a:noAutofit/>
           </a:bodyPr>
           <a:lstStyle/>
           <a:p>
@@ -6632,7 +6632,7 @@
         </p:spPr>
         <p:txBody>
           <a:bodyPr wrap="square">
-            <a:normAutofit/>
+            <a:noAutofit/>
           </a:bodyPr>
           <a:lstStyle/>
           <a:p>
@@ -6668,7 +6668,7 @@
         </p:spPr>
         <p:txBody>
           <a:bodyPr wrap="square">
-            <a:normAutofit/>
+            <a:noAutofit/>
           </a:bodyPr>
           <a:lstStyle/>
           <a:p>
@@ -6850,7 +6850,7 @@
         </p:spPr>
         <p:txBody>
           <a:bodyPr wrap="square">
-            <a:normAutofit/>
+            <a:noAutofit/>
           </a:bodyPr>
           <a:lstStyle/>
           <a:p>
@@ -6885,7 +6885,7 @@
         </p:spPr>
         <p:txBody>
           <a:bodyPr wrap="square">
-            <a:normAutofit/>
+            <a:noAutofit/>
           </a:bodyPr>
           <a:lstStyle/>
           <a:p>
@@ -6963,7 +6963,7 @@
         </p:spPr>
         <p:txBody>
           <a:bodyPr wrap="square">
-            <a:normAutofit/>
+            <a:noAutofit/>
           </a:bodyPr>
           <a:lstStyle/>
           <a:p>
@@ -7043,7 +7043,7 @@
         </p:spPr>
         <p:txBody>
           <a:bodyPr wrap="square">
-            <a:normAutofit/>
+            <a:noAutofit/>
           </a:bodyPr>
           <a:lstStyle/>
           <a:p>
@@ -7386,7 +7386,7 @@
         </p:spPr>
         <p:txBody>
           <a:bodyPr wrap="square">
-            <a:normAutofit/>
+            <a:noAutofit/>
           </a:bodyPr>
           <a:lstStyle/>
           <a:p>
@@ -7466,7 +7466,7 @@
         </p:spPr>
         <p:txBody>
           <a:bodyPr wrap="square">
-            <a:normAutofit/>
+            <a:noAutofit/>
           </a:bodyPr>
           <a:lstStyle/>
           <a:p>
@@ -8063,7 +8063,7 @@
         </p:spPr>
         <p:txBody>
           <a:bodyPr wrap="square">
-            <a:normAutofit/>
+            <a:noAutofit/>
           </a:bodyPr>
           <a:lstStyle/>
           <a:p>
@@ -8098,7 +8098,7 @@
         </p:spPr>
         <p:txBody>
           <a:bodyPr wrap="square">
-            <a:normAutofit/>
+            <a:noAutofit/>
           </a:bodyPr>
           <a:lstStyle/>
           <a:p>
@@ -8133,7 +8133,7 @@
         </p:spPr>
         <p:txBody>
           <a:bodyPr wrap="square">
-            <a:normAutofit/>
+            <a:noAutofit/>
           </a:bodyPr>
           <a:lstStyle/>
           <a:p>
@@ -8170,13 +8170,13 @@
         </p:spPr>
         <p:txBody>
           <a:bodyPr wrap="square">
-            <a:normAutofit/>
+            <a:noAutofit/>
           </a:bodyPr>
           <a:lstStyle/>
           <a:p>
             <a:pPr algn="l"/>
             <a:r>
-              <a:rPr sz="2800" b="1" i="0">
+              <a:rPr sz="2600" b="1" i="0">
                 <a:solidFill>
                   <a:srgbClr val="1C1917"/>
                 </a:solidFill>
@@ -8238,8 +8238,8 @@
         </p:nvSpPr>
         <p:spPr>
           <a:xfrm>
-            <a:off x="4114800" y="2057400"/>
-            <a:ext cx="7680960" cy="4389120"/>
+            <a:off x="4114800" y="2011680"/>
+            <a:ext cx="7680960" cy="4663440"/>
           </a:xfrm>
           <a:prstGeom prst="rect">
             <a:avLst/>
@@ -8248,17 +8248,17 @@
         </p:spPr>
         <p:txBody>
           <a:bodyPr wrap="square">
-            <a:normAutofit/>
+            <a:noAutofit/>
           </a:bodyPr>
           <a:lstStyle/>
           <a:p>
             <a:pPr>
               <a:spcAft>
-                <a:spcPts val="600"/>
-              </a:spcAft>
-            </a:pPr>
-            <a:r>
-              <a:rPr sz="1300">
+                <a:spcPts val="300"/>
+              </a:spcAft>
+            </a:pPr>
+            <a:r>
+              <a:rPr sz="1000">
                 <a:solidFill>
                   <a:srgbClr val="44403C"/>
                 </a:solidFill>
@@ -8270,11 +8270,11 @@
           <a:p>
             <a:pPr>
               <a:spcAft>
-                <a:spcPts val="600"/>
-              </a:spcAft>
-            </a:pPr>
-            <a:r>
-              <a:rPr sz="1300">
+                <a:spcPts val="300"/>
+              </a:spcAft>
+            </a:pPr>
+            <a:r>
+              <a:rPr sz="1000">
                 <a:solidFill>
                   <a:srgbClr val="44403C"/>
                 </a:solidFill>
@@ -8286,11 +8286,11 @@
           <a:p>
             <a:pPr>
               <a:spcAft>
-                <a:spcPts val="600"/>
-              </a:spcAft>
-            </a:pPr>
-            <a:r>
-              <a:rPr sz="1300">
+                <a:spcPts val="300"/>
+              </a:spcAft>
+            </a:pPr>
+            <a:r>
+              <a:rPr sz="1000">
                 <a:solidFill>
                   <a:srgbClr val="44403C"/>
                 </a:solidFill>
@@ -8302,11 +8302,11 @@
           <a:p>
             <a:pPr>
               <a:spcAft>
-                <a:spcPts val="600"/>
-              </a:spcAft>
-            </a:pPr>
-            <a:r>
-              <a:rPr sz="1300">
+                <a:spcPts val="300"/>
+              </a:spcAft>
+            </a:pPr>
+            <a:r>
+              <a:rPr sz="1000">
                 <a:solidFill>
                   <a:srgbClr val="44403C"/>
                 </a:solidFill>
@@ -8318,11 +8318,11 @@
           <a:p>
             <a:pPr>
               <a:spcAft>
-                <a:spcPts val="600"/>
-              </a:spcAft>
-            </a:pPr>
-            <a:r>
-              <a:rPr sz="1300">
+                <a:spcPts val="300"/>
+              </a:spcAft>
+            </a:pPr>
+            <a:r>
+              <a:rPr sz="1000">
                 <a:solidFill>
                   <a:srgbClr val="44403C"/>
                 </a:solidFill>
@@ -8334,11 +8334,11 @@
           <a:p>
             <a:pPr>
               <a:spcAft>
-                <a:spcPts val="600"/>
-              </a:spcAft>
-            </a:pPr>
-            <a:r>
-              <a:rPr sz="1300">
+                <a:spcPts val="300"/>
+              </a:spcAft>
+            </a:pPr>
+            <a:r>
+              <a:rPr sz="1000">
                 <a:solidFill>
                   <a:srgbClr val="44403C"/>
                 </a:solidFill>
@@ -8350,11 +8350,11 @@
           <a:p>
             <a:pPr>
               <a:spcAft>
-                <a:spcPts val="600"/>
-              </a:spcAft>
-            </a:pPr>
-            <a:r>
-              <a:rPr sz="1300">
+                <a:spcPts val="300"/>
+              </a:spcAft>
+            </a:pPr>
+            <a:r>
+              <a:rPr sz="1000">
                 <a:solidFill>
                   <a:srgbClr val="44403C"/>
                 </a:solidFill>
@@ -8366,11 +8366,11 @@
           <a:p>
             <a:pPr>
               <a:spcAft>
-                <a:spcPts val="600"/>
-              </a:spcAft>
-            </a:pPr>
-            <a:r>
-              <a:rPr sz="1300">
+                <a:spcPts val="300"/>
+              </a:spcAft>
+            </a:pPr>
+            <a:r>
+              <a:rPr sz="1000">
                 <a:solidFill>
                   <a:srgbClr val="44403C"/>
                 </a:solidFill>
@@ -8382,11 +8382,11 @@
           <a:p>
             <a:pPr>
               <a:spcAft>
-                <a:spcPts val="600"/>
-              </a:spcAft>
-            </a:pPr>
-            <a:r>
-              <a:rPr sz="1300">
+                <a:spcPts val="300"/>
+              </a:spcAft>
+            </a:pPr>
+            <a:r>
+              <a:rPr sz="1000">
                 <a:solidFill>
                   <a:srgbClr val="44403C"/>
                 </a:solidFill>
@@ -8398,11 +8398,11 @@
           <a:p>
             <a:pPr>
               <a:spcAft>
-                <a:spcPts val="600"/>
-              </a:spcAft>
-            </a:pPr>
-            <a:r>
-              <a:rPr sz="1300">
+                <a:spcPts val="300"/>
+              </a:spcAft>
+            </a:pPr>
+            <a:r>
+              <a:rPr sz="1000">
                 <a:solidFill>
                   <a:srgbClr val="44403C"/>
                 </a:solidFill>
@@ -8414,11 +8414,11 @@
           <a:p>
             <a:pPr>
               <a:spcAft>
-                <a:spcPts val="600"/>
-              </a:spcAft>
-            </a:pPr>
-            <a:r>
-              <a:rPr sz="1300">
+                <a:spcPts val="300"/>
+              </a:spcAft>
+            </a:pPr>
+            <a:r>
+              <a:rPr sz="1000">
                 <a:solidFill>
                   <a:srgbClr val="44403C"/>
                 </a:solidFill>
@@ -8430,11 +8430,11 @@
           <a:p>
             <a:pPr>
               <a:spcAft>
-                <a:spcPts val="600"/>
-              </a:spcAft>
-            </a:pPr>
-            <a:r>
-              <a:rPr sz="1300">
+                <a:spcPts val="300"/>
+              </a:spcAft>
+            </a:pPr>
+            <a:r>
+              <a:rPr sz="1000">
                 <a:solidFill>
                   <a:srgbClr val="44403C"/>
                 </a:solidFill>
@@ -8446,11 +8446,11 @@
           <a:p>
             <a:pPr>
               <a:spcAft>
-                <a:spcPts val="600"/>
-              </a:spcAft>
-            </a:pPr>
-            <a:r>
-              <a:rPr sz="1300">
+                <a:spcPts val="300"/>
+              </a:spcAft>
+            </a:pPr>
+            <a:r>
+              <a:rPr sz="1000">
                 <a:solidFill>
                   <a:srgbClr val="44403C"/>
                 </a:solidFill>
@@ -8462,11 +8462,11 @@
           <a:p>
             <a:pPr>
               <a:spcAft>
-                <a:spcPts val="600"/>
-              </a:spcAft>
-            </a:pPr>
-            <a:r>
-              <a:rPr sz="1300">
+                <a:spcPts val="300"/>
+              </a:spcAft>
+            </a:pPr>
+            <a:r>
+              <a:rPr sz="1000">
                 <a:solidFill>
                   <a:srgbClr val="44403C"/>
                 </a:solidFill>
@@ -8478,11 +8478,11 @@
           <a:p>
             <a:pPr>
               <a:spcAft>
-                <a:spcPts val="600"/>
-              </a:spcAft>
-            </a:pPr>
-            <a:r>
-              <a:rPr sz="1300">
+                <a:spcPts val="300"/>
+              </a:spcAft>
+            </a:pPr>
+            <a:r>
+              <a:rPr sz="1000">
                 <a:solidFill>
                   <a:srgbClr val="44403C"/>
                 </a:solidFill>
@@ -8494,11 +8494,11 @@
           <a:p>
             <a:pPr>
               <a:spcAft>
-                <a:spcPts val="600"/>
-              </a:spcAft>
-            </a:pPr>
-            <a:r>
-              <a:rPr sz="1300">
+                <a:spcPts val="300"/>
+              </a:spcAft>
+            </a:pPr>
+            <a:r>
+              <a:rPr sz="1000">
                 <a:solidFill>
                   <a:srgbClr val="44403C"/>
                 </a:solidFill>
@@ -8510,11 +8510,11 @@
           <a:p>
             <a:pPr>
               <a:spcAft>
-                <a:spcPts val="600"/>
-              </a:spcAft>
-            </a:pPr>
-            <a:r>
-              <a:rPr sz="1300">
+                <a:spcPts val="300"/>
+              </a:spcAft>
+            </a:pPr>
+            <a:r>
+              <a:rPr sz="1000">
                 <a:solidFill>
                   <a:srgbClr val="44403C"/>
                 </a:solidFill>
@@ -8526,11 +8526,11 @@
           <a:p>
             <a:pPr>
               <a:spcAft>
-                <a:spcPts val="600"/>
-              </a:spcAft>
-            </a:pPr>
-            <a:r>
-              <a:rPr sz="1300">
+                <a:spcPts val="300"/>
+              </a:spcAft>
+            </a:pPr>
+            <a:r>
+              <a:rPr sz="1000">
                 <a:solidFill>
                   <a:srgbClr val="44403C"/>
                 </a:solidFill>
@@ -8542,11 +8542,11 @@
           <a:p>
             <a:pPr>
               <a:spcAft>
-                <a:spcPts val="600"/>
-              </a:spcAft>
-            </a:pPr>
-            <a:r>
-              <a:rPr sz="1300">
+                <a:spcPts val="300"/>
+              </a:spcAft>
+            </a:pPr>
+            <a:r>
+              <a:rPr sz="1000">
                 <a:solidFill>
                   <a:srgbClr val="44403C"/>
                 </a:solidFill>
@@ -8558,11 +8558,11 @@
           <a:p>
             <a:pPr>
               <a:spcAft>
-                <a:spcPts val="600"/>
-              </a:spcAft>
-            </a:pPr>
-            <a:r>
-              <a:rPr sz="1300">
+                <a:spcPts val="300"/>
+              </a:spcAft>
+            </a:pPr>
+            <a:r>
+              <a:rPr sz="1000">
                 <a:solidFill>
                   <a:srgbClr val="44403C"/>
                 </a:solidFill>
@@ -8574,11 +8574,11 @@
           <a:p>
             <a:pPr>
               <a:spcAft>
-                <a:spcPts val="600"/>
-              </a:spcAft>
-            </a:pPr>
-            <a:r>
-              <a:rPr sz="1300">
+                <a:spcPts val="300"/>
+              </a:spcAft>
+            </a:pPr>
+            <a:r>
+              <a:rPr sz="1000">
                 <a:solidFill>
                   <a:srgbClr val="44403C"/>
                 </a:solidFill>
@@ -8590,11 +8590,11 @@
           <a:p>
             <a:pPr>
               <a:spcAft>
-                <a:spcPts val="600"/>
-              </a:spcAft>
-            </a:pPr>
-            <a:r>
-              <a:rPr sz="1300">
+                <a:spcPts val="300"/>
+              </a:spcAft>
+            </a:pPr>
+            <a:r>
+              <a:rPr sz="1000">
                 <a:solidFill>
                   <a:srgbClr val="44403C"/>
                 </a:solidFill>
@@ -8770,7 +8770,7 @@
         </p:spPr>
         <p:txBody>
           <a:bodyPr wrap="square">
-            <a:normAutofit/>
+            <a:noAutofit/>
           </a:bodyPr>
           <a:lstStyle/>
           <a:p>
@@ -8805,7 +8805,7 @@
         </p:spPr>
         <p:txBody>
           <a:bodyPr wrap="square">
-            <a:normAutofit/>
+            <a:noAutofit/>
           </a:bodyPr>
           <a:lstStyle/>
           <a:p>
@@ -8883,7 +8883,7 @@
         </p:spPr>
         <p:txBody>
           <a:bodyPr wrap="square">
-            <a:normAutofit/>
+            <a:noAutofit/>
           </a:bodyPr>
           <a:lstStyle/>
           <a:p>
@@ -8963,7 +8963,7 @@
         </p:spPr>
         <p:txBody>
           <a:bodyPr wrap="square">
-            <a:normAutofit/>
+            <a:noAutofit/>
           </a:bodyPr>
           <a:lstStyle/>
           <a:p>
@@ -9210,7 +9210,7 @@
         </p:spPr>
         <p:txBody>
           <a:bodyPr wrap="square">
-            <a:normAutofit/>
+            <a:noAutofit/>
           </a:bodyPr>
           <a:lstStyle/>
           <a:p>
@@ -9290,7 +9290,7 @@
         </p:spPr>
         <p:txBody>
           <a:bodyPr wrap="square">
-            <a:normAutofit/>
+            <a:noAutofit/>
           </a:bodyPr>
           <a:lstStyle/>
           <a:p>
@@ -9700,7 +9700,7 @@
         </p:spPr>
         <p:txBody>
           <a:bodyPr wrap="square">
-            <a:normAutofit/>
+            <a:noAutofit/>
           </a:bodyPr>
           <a:lstStyle/>
           <a:p>
@@ -9735,7 +9735,7 @@
         </p:spPr>
         <p:txBody>
           <a:bodyPr wrap="square">
-            <a:normAutofit/>
+            <a:noAutofit/>
           </a:bodyPr>
           <a:lstStyle/>
           <a:p>
@@ -9813,7 +9813,7 @@
         </p:spPr>
         <p:txBody>
           <a:bodyPr wrap="square">
-            <a:normAutofit/>
+            <a:noAutofit/>
           </a:bodyPr>
           <a:lstStyle/>
           <a:p>
@@ -9893,7 +9893,7 @@
         </p:spPr>
         <p:txBody>
           <a:bodyPr wrap="square">
-            <a:normAutofit/>
+            <a:noAutofit/>
           </a:bodyPr>
           <a:lstStyle/>
           <a:p>
@@ -10252,7 +10252,7 @@
         </p:spPr>
         <p:txBody>
           <a:bodyPr wrap="square">
-            <a:normAutofit/>
+            <a:noAutofit/>
           </a:bodyPr>
           <a:lstStyle/>
           <a:p>
@@ -10332,7 +10332,7 @@
         </p:spPr>
         <p:txBody>
           <a:bodyPr wrap="square">
-            <a:normAutofit/>
+            <a:noAutofit/>
           </a:bodyPr>
           <a:lstStyle/>
           <a:p>
@@ -10854,7 +10854,7 @@
         </p:spPr>
         <p:txBody>
           <a:bodyPr wrap="square">
-            <a:normAutofit/>
+            <a:noAutofit/>
           </a:bodyPr>
           <a:lstStyle/>
           <a:p>
@@ -10889,7 +10889,7 @@
         </p:spPr>
         <p:txBody>
           <a:bodyPr wrap="square">
-            <a:normAutofit/>
+            <a:noAutofit/>
           </a:bodyPr>
           <a:lstStyle/>
           <a:p>
@@ -11055,7 +11055,7 @@
         </p:spPr>
         <p:txBody>
           <a:bodyPr wrap="square">
-            <a:normAutofit/>
+            <a:noAutofit/>
           </a:bodyPr>
           <a:lstStyle/>
           <a:p>
@@ -11090,7 +11090,7 @@
         </p:spPr>
         <p:txBody>
           <a:bodyPr wrap="square">
-            <a:normAutofit/>
+            <a:noAutofit/>
           </a:bodyPr>
           <a:lstStyle/>
           <a:p>
@@ -11125,7 +11125,7 @@
         </p:spPr>
         <p:txBody>
           <a:bodyPr wrap="square">
-            <a:normAutofit/>
+            <a:noAutofit/>
           </a:bodyPr>
           <a:lstStyle/>
           <a:p>
@@ -11476,7 +11476,7 @@
         </p:spPr>
         <p:txBody>
           <a:bodyPr wrap="square">
-            <a:normAutofit/>
+            <a:noAutofit/>
           </a:bodyPr>
           <a:lstStyle/>
           <a:p>
@@ -11511,7 +11511,7 @@
         </p:spPr>
         <p:txBody>
           <a:bodyPr wrap="square">
-            <a:normAutofit/>
+            <a:noAutofit/>
           </a:bodyPr>
           <a:lstStyle/>
           <a:p>
@@ -11546,7 +11546,7 @@
         </p:spPr>
         <p:txBody>
           <a:bodyPr wrap="square">
-            <a:normAutofit/>
+            <a:noAutofit/>
           </a:bodyPr>
           <a:lstStyle/>
           <a:p>
@@ -11913,7 +11913,7 @@
         </p:spPr>
         <p:txBody>
           <a:bodyPr wrap="square">
-            <a:normAutofit/>
+            <a:noAutofit/>
           </a:bodyPr>
           <a:lstStyle/>
           <a:p>
@@ -11948,7 +11948,7 @@
         </p:spPr>
         <p:txBody>
           <a:bodyPr wrap="square">
-            <a:normAutofit/>
+            <a:noAutofit/>
           </a:bodyPr>
           <a:lstStyle/>
           <a:p>
@@ -11983,7 +11983,7 @@
         </p:spPr>
         <p:txBody>
           <a:bodyPr wrap="square">
-            <a:normAutofit/>
+            <a:noAutofit/>
           </a:bodyPr>
           <a:lstStyle/>
           <a:p>
@@ -12436,7 +12436,7 @@
         </p:spPr>
         <p:txBody>
           <a:bodyPr wrap="square">
-            <a:normAutofit/>
+            <a:noAutofit/>
           </a:bodyPr>
           <a:lstStyle/>
           <a:p>
@@ -12471,7 +12471,7 @@
         </p:spPr>
         <p:txBody>
           <a:bodyPr wrap="square">
-            <a:normAutofit/>
+            <a:noAutofit/>
           </a:bodyPr>
           <a:lstStyle/>
           <a:p>
@@ -12506,7 +12506,7 @@
         </p:spPr>
         <p:txBody>
           <a:bodyPr wrap="square">
-            <a:normAutofit/>
+            <a:noAutofit/>
           </a:bodyPr>
           <a:lstStyle/>
           <a:p>
@@ -12688,7 +12688,7 @@
         </p:spPr>
         <p:txBody>
           <a:bodyPr wrap="square">
-            <a:normAutofit/>
+            <a:noAutofit/>
           </a:bodyPr>
           <a:lstStyle/>
           <a:p>
@@ -12723,7 +12723,7 @@
         </p:spPr>
         <p:txBody>
           <a:bodyPr wrap="square">
-            <a:normAutofit/>
+            <a:noAutofit/>
           </a:bodyPr>
           <a:lstStyle/>
           <a:p>
@@ -12801,7 +12801,7 @@
         </p:spPr>
         <p:txBody>
           <a:bodyPr wrap="square">
-            <a:normAutofit/>
+            <a:noAutofit/>
           </a:bodyPr>
           <a:lstStyle/>
           <a:p>
@@ -12881,7 +12881,7 @@
         </p:spPr>
         <p:txBody>
           <a:bodyPr wrap="square">
-            <a:normAutofit/>
+            <a:noAutofit/>
           </a:bodyPr>
           <a:lstStyle/>
           <a:p>
@@ -13224,7 +13224,7 @@
         </p:spPr>
         <p:txBody>
           <a:bodyPr wrap="square">
-            <a:normAutofit/>
+            <a:noAutofit/>
           </a:bodyPr>
           <a:lstStyle/>
           <a:p>
@@ -13304,7 +13304,7 @@
         </p:spPr>
         <p:txBody>
           <a:bodyPr wrap="square">
-            <a:normAutofit/>
+            <a:noAutofit/>
           </a:bodyPr>
           <a:lstStyle/>
           <a:p>
@@ -13826,7 +13826,7 @@
         </p:spPr>
         <p:txBody>
           <a:bodyPr wrap="square">
-            <a:normAutofit/>
+            <a:noAutofit/>
           </a:bodyPr>
           <a:lstStyle/>
           <a:p>
@@ -13861,7 +13861,7 @@
         </p:spPr>
         <p:txBody>
           <a:bodyPr wrap="square">
-            <a:normAutofit/>
+            <a:noAutofit/>
           </a:bodyPr>
           <a:lstStyle/>
           <a:p>
@@ -13873,7 +13873,7 @@
                 </a:solidFill>
                 <a:latin typeface="Calibri"/>
               </a:rPr>
-              <a:t>Suggested script — 10 minutes, every headline feature. Opening + Command Centre + VAT.</a:t>
+              <a:t>Suggested 10-minute script — Opening, Command Centre, VAT.</a:t>
             </a:r>
           </a:p>
         </p:txBody>
@@ -13939,7 +13939,7 @@
         </p:spPr>
         <p:txBody>
           <a:bodyPr wrap="square">
-            <a:normAutofit/>
+            <a:noAutofit/>
           </a:bodyPr>
           <a:lstStyle/>
           <a:p>
@@ -14019,7 +14019,7 @@
         </p:spPr>
         <p:txBody>
           <a:bodyPr wrap="square">
-            <a:normAutofit/>
+            <a:noAutofit/>
           </a:bodyPr>
           <a:lstStyle/>
           <a:p>
@@ -14106,7 +14106,7 @@
         </p:spPr>
         <p:txBody>
           <a:bodyPr wrap="square">
-            <a:normAutofit/>
+            <a:noAutofit/>
           </a:bodyPr>
           <a:lstStyle/>
           <a:p>
@@ -14186,7 +14186,7 @@
         </p:spPr>
         <p:txBody>
           <a:bodyPr wrap="square">
-            <a:normAutofit/>
+            <a:noAutofit/>
           </a:bodyPr>
           <a:lstStyle/>
           <a:p>
@@ -14516,7 +14516,7 @@
         </p:spPr>
         <p:txBody>
           <a:bodyPr wrap="square">
-            <a:normAutofit/>
+            <a:noAutofit/>
           </a:bodyPr>
           <a:lstStyle/>
           <a:p>
@@ -14551,7 +14551,7 @@
         </p:spPr>
         <p:txBody>
           <a:bodyPr wrap="square">
-            <a:normAutofit/>
+            <a:noAutofit/>
           </a:bodyPr>
           <a:lstStyle/>
           <a:p>
@@ -14674,7 +14674,7 @@
         </p:spPr>
         <p:txBody>
           <a:bodyPr wrap="square">
-            <a:normAutofit/>
+            <a:noAutofit/>
           </a:bodyPr>
           <a:lstStyle/>
           <a:p>
@@ -15196,7 +15196,7 @@
         </p:spPr>
         <p:txBody>
           <a:bodyPr wrap="square">
-            <a:normAutofit/>
+            <a:noAutofit/>
           </a:bodyPr>
           <a:lstStyle/>
           <a:p>
@@ -15231,7 +15231,7 @@
         </p:spPr>
         <p:txBody>
           <a:bodyPr wrap="square">
-            <a:normAutofit/>
+            <a:noAutofit/>
           </a:bodyPr>
           <a:lstStyle/>
           <a:p>
@@ -15243,7 +15243,7 @@
                 </a:solidFill>
                 <a:latin typeface="Calibri"/>
               </a:rPr>
-              <a:t>Mandate change. Entity switching. Closing line. Follow-up questions.</a:t>
+              <a:t>Mandate change, entity switching, closing line and follow-up questions.</a:t>
             </a:r>
           </a:p>
         </p:txBody>
@@ -15309,7 +15309,7 @@
         </p:spPr>
         <p:txBody>
           <a:bodyPr wrap="square">
-            <a:normAutofit/>
+            <a:noAutofit/>
           </a:bodyPr>
           <a:lstStyle/>
           <a:p>
@@ -15389,7 +15389,7 @@
         </p:spPr>
         <p:txBody>
           <a:bodyPr wrap="square">
-            <a:normAutofit/>
+            <a:noAutofit/>
           </a:bodyPr>
           <a:lstStyle/>
           <a:p>
@@ -15716,7 +15716,7 @@
         </p:spPr>
         <p:txBody>
           <a:bodyPr wrap="square">
-            <a:normAutofit/>
+            <a:noAutofit/>
           </a:bodyPr>
           <a:lstStyle/>
           <a:p>
@@ -15796,7 +15796,7 @@
         </p:spPr>
         <p:txBody>
           <a:bodyPr wrap="square">
-            <a:normAutofit/>
+            <a:noAutofit/>
           </a:bodyPr>
           <a:lstStyle/>
           <a:p>
@@ -16318,7 +16318,7 @@
         </p:spPr>
         <p:txBody>
           <a:bodyPr wrap="square">
-            <a:normAutofit/>
+            <a:noAutofit/>
           </a:bodyPr>
           <a:lstStyle/>
           <a:p>
@@ -16353,7 +16353,7 @@
         </p:spPr>
         <p:txBody>
           <a:bodyPr wrap="square">
-            <a:normAutofit/>
+            <a:noAutofit/>
           </a:bodyPr>
           <a:lstStyle/>
           <a:p>
@@ -16431,7 +16431,7 @@
         </p:spPr>
         <p:txBody>
           <a:bodyPr wrap="square">
-            <a:normAutofit/>
+            <a:noAutofit/>
           </a:bodyPr>
           <a:lstStyle/>
           <a:p>
@@ -16509,7 +16509,7 @@
         </p:spPr>
         <p:txBody>
           <a:bodyPr wrap="square">
-            <a:normAutofit/>
+            <a:noAutofit/>
           </a:bodyPr>
           <a:lstStyle/>
           <a:p>
@@ -16544,7 +16544,7 @@
         </p:spPr>
         <p:txBody>
           <a:bodyPr wrap="square">
-            <a:normAutofit/>
+            <a:noAutofit/>
           </a:bodyPr>
           <a:lstStyle/>
           <a:p>
@@ -16738,7 +16738,7 @@
         </p:spPr>
         <p:txBody>
           <a:bodyPr wrap="square">
-            <a:normAutofit/>
+            <a:noAutofit/>
           </a:bodyPr>
           <a:lstStyle/>
           <a:p>
@@ -16773,7 +16773,7 @@
         </p:spPr>
         <p:txBody>
           <a:bodyPr wrap="square">
-            <a:normAutofit/>
+            <a:noAutofit/>
           </a:bodyPr>
           <a:lstStyle/>
           <a:p>
@@ -16951,7 +16951,7 @@
         </p:spPr>
         <p:txBody>
           <a:bodyPr wrap="square">
-            <a:normAutofit/>
+            <a:noAutofit/>
           </a:bodyPr>
           <a:lstStyle/>
           <a:p>
@@ -16986,7 +16986,7 @@
         </p:spPr>
         <p:txBody>
           <a:bodyPr wrap="square">
-            <a:normAutofit/>
+            <a:noAutofit/>
           </a:bodyPr>
           <a:lstStyle/>
           <a:p>
@@ -17164,7 +17164,7 @@
         </p:spPr>
         <p:txBody>
           <a:bodyPr wrap="square">
-            <a:normAutofit/>
+            <a:noAutofit/>
           </a:bodyPr>
           <a:lstStyle/>
           <a:p>
@@ -17199,7 +17199,7 @@
         </p:spPr>
         <p:txBody>
           <a:bodyPr wrap="square">
-            <a:normAutofit/>
+            <a:noAutofit/>
           </a:bodyPr>
           <a:lstStyle/>
           <a:p>
@@ -17334,7 +17334,7 @@
         </p:spPr>
         <p:txBody>
           <a:bodyPr wrap="square">
-            <a:normAutofit/>
+            <a:noAutofit/>
           </a:bodyPr>
           <a:lstStyle/>
           <a:p>
@@ -17559,7 +17559,7 @@
         </p:spPr>
         <p:txBody>
           <a:bodyPr wrap="square">
-            <a:normAutofit/>
+            <a:noAutofit/>
           </a:bodyPr>
           <a:lstStyle/>
           <a:p>
@@ -17594,7 +17594,7 @@
         </p:spPr>
         <p:txBody>
           <a:bodyPr wrap="square">
-            <a:normAutofit/>
+            <a:noAutofit/>
           </a:bodyPr>
           <a:lstStyle/>
           <a:p>
@@ -17629,7 +17629,7 @@
         </p:spPr>
         <p:txBody>
           <a:bodyPr wrap="square">
-            <a:normAutofit/>
+            <a:noAutofit/>
           </a:bodyPr>
           <a:lstStyle/>
           <a:p>
@@ -17664,7 +17664,7 @@
         </p:spPr>
         <p:txBody>
           <a:bodyPr wrap="square">
-            <a:normAutofit/>
+            <a:noAutofit/>
           </a:bodyPr>
           <a:lstStyle/>
           <a:p>
@@ -17846,7 +17846,7 @@
         </p:spPr>
         <p:txBody>
           <a:bodyPr wrap="square">
-            <a:normAutofit/>
+            <a:noAutofit/>
           </a:bodyPr>
           <a:lstStyle/>
           <a:p>
@@ -17881,7 +17881,7 @@
         </p:spPr>
         <p:txBody>
           <a:bodyPr wrap="square">
-            <a:normAutofit/>
+            <a:noAutofit/>
           </a:bodyPr>
           <a:lstStyle/>
           <a:p>
@@ -18045,7 +18045,7 @@
         </p:spPr>
         <p:txBody>
           <a:bodyPr wrap="square">
-            <a:normAutofit/>
+            <a:noAutofit/>
           </a:bodyPr>
           <a:lstStyle/>
           <a:p>
@@ -18080,7 +18080,7 @@
         </p:spPr>
         <p:txBody>
           <a:bodyPr wrap="square">
-            <a:normAutofit/>
+            <a:noAutofit/>
           </a:bodyPr>
           <a:lstStyle/>
           <a:p>
@@ -18201,7 +18201,7 @@
         </p:spPr>
         <p:txBody>
           <a:bodyPr wrap="square">
-            <a:normAutofit/>
+            <a:noAutofit/>
           </a:bodyPr>
           <a:lstStyle/>
           <a:p>
@@ -18236,7 +18236,7 @@
         </p:spPr>
         <p:txBody>
           <a:bodyPr wrap="square">
-            <a:normAutofit/>
+            <a:noAutofit/>
           </a:bodyPr>
           <a:lstStyle/>
           <a:p>
@@ -18357,7 +18357,7 @@
         </p:spPr>
         <p:txBody>
           <a:bodyPr wrap="square">
-            <a:normAutofit/>
+            <a:noAutofit/>
           </a:bodyPr>
           <a:lstStyle/>
           <a:p>
@@ -18392,7 +18392,7 @@
         </p:spPr>
         <p:txBody>
           <a:bodyPr wrap="square">
-            <a:normAutofit/>
+            <a:noAutofit/>
           </a:bodyPr>
           <a:lstStyle/>
           <a:p>
@@ -18513,7 +18513,7 @@
         </p:spPr>
         <p:txBody>
           <a:bodyPr wrap="square">
-            <a:normAutofit/>
+            <a:noAutofit/>
           </a:bodyPr>
           <a:lstStyle/>
           <a:p>
@@ -18548,7 +18548,7 @@
         </p:spPr>
         <p:txBody>
           <a:bodyPr wrap="square">
-            <a:normAutofit/>
+            <a:noAutofit/>
           </a:bodyPr>
           <a:lstStyle/>
           <a:p>
@@ -18730,7 +18730,7 @@
         </p:spPr>
         <p:txBody>
           <a:bodyPr wrap="square">
-            <a:normAutofit/>
+            <a:noAutofit/>
           </a:bodyPr>
           <a:lstStyle/>
           <a:p>
@@ -18765,7 +18765,7 @@
         </p:spPr>
         <p:txBody>
           <a:bodyPr wrap="square">
-            <a:normAutofit/>
+            <a:noAutofit/>
           </a:bodyPr>
           <a:lstStyle/>
           <a:p>
@@ -18843,7 +18843,7 @@
         </p:spPr>
         <p:txBody>
           <a:bodyPr wrap="square">
-            <a:normAutofit/>
+            <a:noAutofit/>
           </a:bodyPr>
           <a:lstStyle/>
           <a:p>
@@ -18923,7 +18923,7 @@
         </p:spPr>
         <p:txBody>
           <a:bodyPr wrap="square">
-            <a:normAutofit/>
+            <a:noAutofit/>
           </a:bodyPr>
           <a:lstStyle/>
           <a:p>
@@ -19298,7 +19298,7 @@
         </p:spPr>
         <p:txBody>
           <a:bodyPr wrap="square">
-            <a:normAutofit/>
+            <a:noAutofit/>
           </a:bodyPr>
           <a:lstStyle/>
           <a:p>
@@ -19378,7 +19378,7 @@
         </p:spPr>
         <p:txBody>
           <a:bodyPr wrap="square">
-            <a:normAutofit/>
+            <a:noAutofit/>
           </a:bodyPr>
           <a:lstStyle/>
           <a:p>
@@ -19975,7 +19975,7 @@
         </p:spPr>
         <p:txBody>
           <a:bodyPr wrap="square">
-            <a:normAutofit/>
+            <a:noAutofit/>
           </a:bodyPr>
           <a:lstStyle/>
           <a:p>
@@ -20010,7 +20010,7 @@
         </p:spPr>
         <p:txBody>
           <a:bodyPr wrap="square">
-            <a:normAutofit/>
+            <a:noAutofit/>
           </a:bodyPr>
           <a:lstStyle/>
           <a:p>
@@ -20046,7 +20046,7 @@
         </p:spPr>
         <p:txBody>
           <a:bodyPr wrap="square">
-            <a:normAutofit/>
+            <a:noAutofit/>
           </a:bodyPr>
           <a:lstStyle/>
           <a:p>
@@ -20228,7 +20228,7 @@
         </p:spPr>
         <p:txBody>
           <a:bodyPr wrap="square">
-            <a:normAutofit/>
+            <a:noAutofit/>
           </a:bodyPr>
           <a:lstStyle/>
           <a:p>
@@ -20263,7 +20263,7 @@
         </p:spPr>
         <p:txBody>
           <a:bodyPr wrap="square">
-            <a:normAutofit/>
+            <a:noAutofit/>
           </a:bodyPr>
           <a:lstStyle/>
           <a:p>
@@ -20341,7 +20341,7 @@
         </p:spPr>
         <p:txBody>
           <a:bodyPr wrap="square">
-            <a:normAutofit/>
+            <a:noAutofit/>
           </a:bodyPr>
           <a:lstStyle/>
           <a:p>
@@ -20421,7 +20421,7 @@
         </p:spPr>
         <p:txBody>
           <a:bodyPr wrap="square">
-            <a:normAutofit/>
+            <a:noAutofit/>
           </a:bodyPr>
           <a:lstStyle/>
           <a:p>
@@ -20572,7 +20572,7 @@
         </p:spPr>
         <p:txBody>
           <a:bodyPr wrap="square">
-            <a:normAutofit/>
+            <a:noAutofit/>
           </a:bodyPr>
           <a:lstStyle/>
           <a:p>
@@ -20652,7 +20652,7 @@
         </p:spPr>
         <p:txBody>
           <a:bodyPr wrap="square">
-            <a:normAutofit/>
+            <a:noAutofit/>
           </a:bodyPr>
           <a:lstStyle/>
           <a:p>
@@ -21014,7 +21014,7 @@
         </p:spPr>
         <p:txBody>
           <a:bodyPr wrap="square">
-            <a:normAutofit/>
+            <a:noAutofit/>
           </a:bodyPr>
           <a:lstStyle/>
           <a:p>
@@ -21049,7 +21049,7 @@
         </p:spPr>
         <p:txBody>
           <a:bodyPr wrap="square">
-            <a:normAutofit/>
+            <a:noAutofit/>
           </a:bodyPr>
           <a:lstStyle/>
           <a:p>
@@ -21127,7 +21127,7 @@
         </p:spPr>
         <p:txBody>
           <a:bodyPr wrap="square">
-            <a:normAutofit/>
+            <a:noAutofit/>
           </a:bodyPr>
           <a:lstStyle/>
           <a:p>
@@ -21205,7 +21205,7 @@
         </p:spPr>
         <p:txBody>
           <a:bodyPr wrap="square">
-            <a:normAutofit/>
+            <a:noAutofit/>
           </a:bodyPr>
           <a:lstStyle/>
           <a:p>
@@ -21240,7 +21240,7 @@
         </p:spPr>
         <p:txBody>
           <a:bodyPr wrap="square">
-            <a:normAutofit/>
+            <a:noAutofit/>
           </a:bodyPr>
           <a:lstStyle/>
           <a:p>
@@ -21434,7 +21434,7 @@
         </p:spPr>
         <p:txBody>
           <a:bodyPr wrap="square">
-            <a:normAutofit/>
+            <a:noAutofit/>
           </a:bodyPr>
           <a:lstStyle/>
           <a:p>
@@ -21469,7 +21469,7 @@
         </p:spPr>
         <p:txBody>
           <a:bodyPr wrap="square">
-            <a:normAutofit/>
+            <a:noAutofit/>
           </a:bodyPr>
           <a:lstStyle/>
           <a:p>
@@ -21679,7 +21679,7 @@
         </p:spPr>
         <p:txBody>
           <a:bodyPr wrap="square">
-            <a:normAutofit/>
+            <a:noAutofit/>
           </a:bodyPr>
           <a:lstStyle/>
           <a:p>
@@ -21714,7 +21714,7 @@
         </p:spPr>
         <p:txBody>
           <a:bodyPr wrap="square">
-            <a:normAutofit/>
+            <a:noAutofit/>
           </a:bodyPr>
           <a:lstStyle/>
           <a:p>
@@ -22044,7 +22044,7 @@
         </p:spPr>
         <p:txBody>
           <a:bodyPr wrap="square">
-            <a:normAutofit/>
+            <a:noAutofit/>
           </a:bodyPr>
           <a:lstStyle/>
           <a:p>
@@ -22079,7 +22079,7 @@
         </p:spPr>
         <p:txBody>
           <a:bodyPr wrap="square">
-            <a:normAutofit/>
+            <a:noAutofit/>
           </a:bodyPr>
           <a:lstStyle/>
           <a:p>
@@ -22157,7 +22157,7 @@
         </p:spPr>
         <p:txBody>
           <a:bodyPr wrap="square">
-            <a:normAutofit/>
+            <a:noAutofit/>
           </a:bodyPr>
           <a:lstStyle/>
           <a:p>
@@ -22235,7 +22235,7 @@
         </p:spPr>
         <p:txBody>
           <a:bodyPr wrap="square">
-            <a:normAutofit/>
+            <a:noAutofit/>
           </a:bodyPr>
           <a:lstStyle/>
           <a:p>
@@ -22270,7 +22270,7 @@
         </p:spPr>
         <p:txBody>
           <a:bodyPr wrap="square">
-            <a:normAutofit/>
+            <a:noAutofit/>
           </a:bodyPr>
           <a:lstStyle/>
           <a:p>
@@ -22496,7 +22496,7 @@
         </p:spPr>
         <p:txBody>
           <a:bodyPr wrap="square">
-            <a:normAutofit/>
+            <a:noAutofit/>
           </a:bodyPr>
           <a:lstStyle/>
           <a:p>
@@ -22531,7 +22531,7 @@
         </p:spPr>
         <p:txBody>
           <a:bodyPr wrap="square">
-            <a:normAutofit/>
+            <a:noAutofit/>
           </a:bodyPr>
           <a:lstStyle/>
           <a:p>
@@ -22773,7 +22773,7 @@
         </p:spPr>
         <p:txBody>
           <a:bodyPr wrap="square">
-            <a:normAutofit/>
+            <a:noAutofit/>
           </a:bodyPr>
           <a:lstStyle/>
           <a:p>
@@ -22808,7 +22808,7 @@
         </p:spPr>
         <p:txBody>
           <a:bodyPr wrap="square">
-            <a:normAutofit/>
+            <a:noAutofit/>
           </a:bodyPr>
           <a:lstStyle/>
           <a:p>
@@ -22991,7 +22991,7 @@
         </p:spPr>
         <p:txBody>
           <a:bodyPr wrap="square">
-            <a:normAutofit/>
+            <a:noAutofit/>
           </a:bodyPr>
           <a:lstStyle/>
           <a:p>
@@ -23216,7 +23216,7 @@
         </p:spPr>
         <p:txBody>
           <a:bodyPr wrap="square">
-            <a:normAutofit/>
+            <a:noAutofit/>
           </a:bodyPr>
           <a:lstStyle/>
           <a:p>
@@ -23251,7 +23251,7 @@
         </p:spPr>
         <p:txBody>
           <a:bodyPr wrap="square">
-            <a:normAutofit/>
+            <a:noAutofit/>
           </a:bodyPr>
           <a:lstStyle/>
           <a:p>
@@ -23286,7 +23286,7 @@
         </p:spPr>
         <p:txBody>
           <a:bodyPr wrap="square">
-            <a:normAutofit/>
+            <a:noAutofit/>
           </a:bodyPr>
           <a:lstStyle/>
           <a:p>
@@ -23323,13 +23323,13 @@
         </p:spPr>
         <p:txBody>
           <a:bodyPr wrap="square">
-            <a:normAutofit/>
+            <a:noAutofit/>
           </a:bodyPr>
           <a:lstStyle/>
           <a:p>
             <a:pPr algn="l"/>
             <a:r>
-              <a:rPr sz="2800" b="1" i="0">
+              <a:rPr sz="2600" b="1" i="0">
                 <a:solidFill>
                   <a:srgbClr val="1C1917"/>
                 </a:solidFill>
@@ -23391,8 +23391,8 @@
         </p:nvSpPr>
         <p:spPr>
           <a:xfrm>
-            <a:off x="4114800" y="2057400"/>
-            <a:ext cx="7680960" cy="4389120"/>
+            <a:off x="4114800" y="2011680"/>
+            <a:ext cx="7680960" cy="4663440"/>
           </a:xfrm>
           <a:prstGeom prst="rect">
             <a:avLst/>
@@ -23401,17 +23401,17 @@
         </p:spPr>
         <p:txBody>
           <a:bodyPr wrap="square">
-            <a:normAutofit/>
+            <a:noAutofit/>
           </a:bodyPr>
           <a:lstStyle/>
           <a:p>
             <a:pPr>
               <a:spcAft>
-                <a:spcPts val="600"/>
-              </a:spcAft>
-            </a:pPr>
-            <a:r>
-              <a:rPr sz="1300">
+                <a:spcPts val="300"/>
+              </a:spcAft>
+            </a:pPr>
+            <a:r>
+              <a:rPr sz="1000">
                 <a:solidFill>
                   <a:srgbClr val="44403C"/>
                 </a:solidFill>
@@ -23423,11 +23423,11 @@
           <a:p>
             <a:pPr>
               <a:spcAft>
-                <a:spcPts val="600"/>
-              </a:spcAft>
-            </a:pPr>
-            <a:r>
-              <a:rPr sz="1300">
+                <a:spcPts val="300"/>
+              </a:spcAft>
+            </a:pPr>
+            <a:r>
+              <a:rPr sz="1000">
                 <a:solidFill>
                   <a:srgbClr val="44403C"/>
                 </a:solidFill>
@@ -23439,11 +23439,11 @@
           <a:p>
             <a:pPr>
               <a:spcAft>
-                <a:spcPts val="600"/>
-              </a:spcAft>
-            </a:pPr>
-            <a:r>
-              <a:rPr sz="1300">
+                <a:spcPts val="300"/>
+              </a:spcAft>
+            </a:pPr>
+            <a:r>
+              <a:rPr sz="1000">
                 <a:solidFill>
                   <a:srgbClr val="44403C"/>
                 </a:solidFill>
@@ -23455,11 +23455,11 @@
           <a:p>
             <a:pPr>
               <a:spcAft>
-                <a:spcPts val="600"/>
-              </a:spcAft>
-            </a:pPr>
-            <a:r>
-              <a:rPr sz="1300">
+                <a:spcPts val="300"/>
+              </a:spcAft>
+            </a:pPr>
+            <a:r>
+              <a:rPr sz="1000">
                 <a:solidFill>
                   <a:srgbClr val="44403C"/>
                 </a:solidFill>
@@ -23471,11 +23471,11 @@
           <a:p>
             <a:pPr>
               <a:spcAft>
-                <a:spcPts val="600"/>
-              </a:spcAft>
-            </a:pPr>
-            <a:r>
-              <a:rPr sz="1300">
+                <a:spcPts val="300"/>
+              </a:spcAft>
+            </a:pPr>
+            <a:r>
+              <a:rPr sz="1000">
                 <a:solidFill>
                   <a:srgbClr val="44403C"/>
                 </a:solidFill>
@@ -23487,11 +23487,11 @@
           <a:p>
             <a:pPr>
               <a:spcAft>
-                <a:spcPts val="600"/>
-              </a:spcAft>
-            </a:pPr>
-            <a:r>
-              <a:rPr sz="1300">
+                <a:spcPts val="300"/>
+              </a:spcAft>
+            </a:pPr>
+            <a:r>
+              <a:rPr sz="1000">
                 <a:solidFill>
                   <a:srgbClr val="44403C"/>
                 </a:solidFill>
@@ -23503,11 +23503,11 @@
           <a:p>
             <a:pPr>
               <a:spcAft>
-                <a:spcPts val="600"/>
-              </a:spcAft>
-            </a:pPr>
-            <a:r>
-              <a:rPr sz="1300">
+                <a:spcPts val="300"/>
+              </a:spcAft>
+            </a:pPr>
+            <a:r>
+              <a:rPr sz="1000">
                 <a:solidFill>
                   <a:srgbClr val="44403C"/>
                 </a:solidFill>
@@ -23519,11 +23519,11 @@
           <a:p>
             <a:pPr>
               <a:spcAft>
-                <a:spcPts val="600"/>
-              </a:spcAft>
-            </a:pPr>
-            <a:r>
-              <a:rPr sz="1300">
+                <a:spcPts val="300"/>
+              </a:spcAft>
+            </a:pPr>
+            <a:r>
+              <a:rPr sz="1000">
                 <a:solidFill>
                   <a:srgbClr val="44403C"/>
                 </a:solidFill>
@@ -23535,11 +23535,11 @@
           <a:p>
             <a:pPr>
               <a:spcAft>
-                <a:spcPts val="600"/>
-              </a:spcAft>
-            </a:pPr>
-            <a:r>
-              <a:rPr sz="1300">
+                <a:spcPts val="300"/>
+              </a:spcAft>
+            </a:pPr>
+            <a:r>
+              <a:rPr sz="1000">
                 <a:solidFill>
                   <a:srgbClr val="44403C"/>
                 </a:solidFill>
@@ -23551,11 +23551,11 @@
           <a:p>
             <a:pPr>
               <a:spcAft>
-                <a:spcPts val="600"/>
-              </a:spcAft>
-            </a:pPr>
-            <a:r>
-              <a:rPr sz="1300">
+                <a:spcPts val="300"/>
+              </a:spcAft>
+            </a:pPr>
+            <a:r>
+              <a:rPr sz="1000">
                 <a:solidFill>
                   <a:srgbClr val="44403C"/>
                 </a:solidFill>
@@ -23567,11 +23567,11 @@
           <a:p>
             <a:pPr>
               <a:spcAft>
-                <a:spcPts val="600"/>
-              </a:spcAft>
-            </a:pPr>
-            <a:r>
-              <a:rPr sz="1300">
+                <a:spcPts val="300"/>
+              </a:spcAft>
+            </a:pPr>
+            <a:r>
+              <a:rPr sz="1000">
                 <a:solidFill>
                   <a:srgbClr val="44403C"/>
                 </a:solidFill>
@@ -23583,11 +23583,11 @@
           <a:p>
             <a:pPr>
               <a:spcAft>
-                <a:spcPts val="600"/>
-              </a:spcAft>
-            </a:pPr>
-            <a:r>
-              <a:rPr sz="1300">
+                <a:spcPts val="300"/>
+              </a:spcAft>
+            </a:pPr>
+            <a:r>
+              <a:rPr sz="1000">
                 <a:solidFill>
                   <a:srgbClr val="44403C"/>
                 </a:solidFill>
@@ -23599,11 +23599,11 @@
           <a:p>
             <a:pPr>
               <a:spcAft>
-                <a:spcPts val="600"/>
-              </a:spcAft>
-            </a:pPr>
-            <a:r>
-              <a:rPr sz="1300">
+                <a:spcPts val="300"/>
+              </a:spcAft>
+            </a:pPr>
+            <a:r>
+              <a:rPr sz="1000">
                 <a:solidFill>
                   <a:srgbClr val="44403C"/>
                 </a:solidFill>
@@ -23615,11 +23615,11 @@
           <a:p>
             <a:pPr>
               <a:spcAft>
-                <a:spcPts val="600"/>
-              </a:spcAft>
-            </a:pPr>
-            <a:r>
-              <a:rPr sz="1300">
+                <a:spcPts val="300"/>
+              </a:spcAft>
+            </a:pPr>
+            <a:r>
+              <a:rPr sz="1000">
                 <a:solidFill>
                   <a:srgbClr val="44403C"/>
                 </a:solidFill>
@@ -23631,11 +23631,11 @@
           <a:p>
             <a:pPr>
               <a:spcAft>
-                <a:spcPts val="600"/>
-              </a:spcAft>
-            </a:pPr>
-            <a:r>
-              <a:rPr sz="1300">
+                <a:spcPts val="300"/>
+              </a:spcAft>
+            </a:pPr>
+            <a:r>
+              <a:rPr sz="1000">
                 <a:solidFill>
                   <a:srgbClr val="44403C"/>
                 </a:solidFill>
@@ -23647,11 +23647,11 @@
           <a:p>
             <a:pPr>
               <a:spcAft>
-                <a:spcPts val="600"/>
-              </a:spcAft>
-            </a:pPr>
-            <a:r>
-              <a:rPr sz="1300">
+                <a:spcPts val="300"/>
+              </a:spcAft>
+            </a:pPr>
+            <a:r>
+              <a:rPr sz="1000">
                 <a:solidFill>
                   <a:srgbClr val="44403C"/>
                 </a:solidFill>
@@ -23663,11 +23663,11 @@
           <a:p>
             <a:pPr>
               <a:spcAft>
-                <a:spcPts val="600"/>
-              </a:spcAft>
-            </a:pPr>
-            <a:r>
-              <a:rPr sz="1300">
+                <a:spcPts val="300"/>
+              </a:spcAft>
+            </a:pPr>
+            <a:r>
+              <a:rPr sz="1000">
                 <a:solidFill>
                   <a:srgbClr val="44403C"/>
                 </a:solidFill>
@@ -23679,11 +23679,11 @@
           <a:p>
             <a:pPr>
               <a:spcAft>
-                <a:spcPts val="600"/>
-              </a:spcAft>
-            </a:pPr>
-            <a:r>
-              <a:rPr sz="1300">
+                <a:spcPts val="300"/>
+              </a:spcAft>
+            </a:pPr>
+            <a:r>
+              <a:rPr sz="1000">
                 <a:solidFill>
                   <a:srgbClr val="44403C"/>
                 </a:solidFill>

--- a/Santander_LimitedCompany_Walkthrough.pptx
+++ b/Santander_LimitedCompany_Walkthrough.pptx
@@ -4034,7 +4034,7 @@
         <p:spPr>
           <a:xfrm>
             <a:off x="164592" y="6748272"/>
-            <a:ext cx="12188952" cy="109728"/>
+            <a:ext cx="12024360" cy="109728"/>
           </a:xfrm>
           <a:prstGeom prst="rect">
             <a:avLst/>
@@ -10567,7 +10567,7 @@
         <p:spPr>
           <a:xfrm>
             <a:off x="164592" y="6748272"/>
-            <a:ext cx="12188952" cy="109728"/>
+            <a:ext cx="12024360" cy="109728"/>
           </a:xfrm>
           <a:prstGeom prst="rect">
             <a:avLst/>
@@ -11558,7 +11558,7 @@
         <p:spPr>
           <a:xfrm>
             <a:off x="164592" y="6748272"/>
-            <a:ext cx="12188952" cy="109728"/>
+            <a:ext cx="12024360" cy="109728"/>
           </a:xfrm>
           <a:prstGeom prst="rect">
             <a:avLst/>
@@ -16910,7 +16910,7 @@
         <p:spPr>
           <a:xfrm>
             <a:off x="164592" y="6748272"/>
-            <a:ext cx="12188952" cy="109728"/>
+            <a:ext cx="12024360" cy="109728"/>
           </a:xfrm>
           <a:prstGeom prst="rect">
             <a:avLst/>
@@ -20291,7 +20291,7 @@
         <p:spPr>
           <a:xfrm>
             <a:off x="164592" y="6748272"/>
-            <a:ext cx="12188952" cy="109728"/>
+            <a:ext cx="12024360" cy="109728"/>
           </a:xfrm>
           <a:prstGeom prst="rect">
             <a:avLst/>

--- a/Santander_LimitedCompany_Walkthrough.pptx
+++ b/Santander_LimitedCompany_Walkthrough.pptx
@@ -3596,7 +3596,7 @@
             <a:avLst/>
           </a:prstGeom>
           <a:solidFill>
-            <a:srgbClr val="C8102E"/>
+            <a:srgbClr val="DA291C"/>
           </a:solidFill>
           <a:ln>
             <a:noFill/>
@@ -3639,7 +3639,7 @@
             <a:avLst/>
           </a:prstGeom>
           <a:solidFill>
-            <a:srgbClr val="C8102E"/>
+            <a:srgbClr val="DA291C"/>
           </a:solidFill>
           <a:ln>
             <a:noFill/>
@@ -3682,7 +3682,7 @@
             <a:avLst/>
           </a:prstGeom>
           <a:solidFill>
-            <a:srgbClr val="C8102E"/>
+            <a:srgbClr val="DA291C"/>
           </a:solidFill>
           <a:ln>
             <a:noFill/>
@@ -3842,7 +3842,7 @@
             <a:r>
               <a:rPr sz="1800" b="1" i="0">
                 <a:solidFill>
-                  <a:srgbClr val="C8102E"/>
+                  <a:srgbClr val="DA291C"/>
                 </a:solidFill>
                 <a:latin typeface="Calibri"/>
               </a:rPr>
@@ -3997,7 +3997,7 @@
             <a:avLst/>
           </a:prstGeom>
           <a:solidFill>
-            <a:srgbClr val="C8102E"/>
+            <a:srgbClr val="DA291C"/>
           </a:solidFill>
           <a:ln>
             <a:noFill/>
@@ -4040,7 +4040,7 @@
             <a:avLst/>
           </a:prstGeom>
           <a:solidFill>
-            <a:srgbClr val="C8102E"/>
+            <a:srgbClr val="DA291C"/>
           </a:solidFill>
           <a:ln>
             <a:noFill/>
@@ -4094,7 +4094,7 @@
             <a:r>
               <a:rPr sz="1100" b="1" i="0">
                 <a:solidFill>
-                  <a:srgbClr val="C8102E"/>
+                  <a:srgbClr val="DA291C"/>
                 </a:solidFill>
                 <a:latin typeface="Calibri"/>
               </a:rPr>
@@ -4250,7 +4250,7 @@
             <a:avLst/>
           </a:prstGeom>
           <a:solidFill>
-            <a:srgbClr val="C8102E"/>
+            <a:srgbClr val="DA291C"/>
           </a:solidFill>
           <a:ln>
             <a:noFill/>
@@ -4406,7 +4406,7 @@
             <a:avLst/>
           </a:prstGeom>
           <a:solidFill>
-            <a:srgbClr val="C8102E"/>
+            <a:srgbClr val="DA291C"/>
           </a:solidFill>
           <a:ln>
             <a:noFill/>
@@ -4503,7 +4503,7 @@
             <a:r>
               <a:rPr sz="1400" b="1">
                 <a:solidFill>
-                  <a:srgbClr val="C8102E"/>
+                  <a:srgbClr val="DA291C"/>
                 </a:solidFill>
                 <a:latin typeface="Calibri"/>
               </a:rPr>
@@ -4941,7 +4941,7 @@
             <a:avLst/>
           </a:prstGeom>
           <a:solidFill>
-            <a:srgbClr val="C8102E"/>
+            <a:srgbClr val="DA291C"/>
           </a:solidFill>
           <a:ln>
             <a:noFill/>
@@ -5097,7 +5097,7 @@
             <a:avLst/>
           </a:prstGeom>
           <a:solidFill>
-            <a:srgbClr val="C8102E"/>
+            <a:srgbClr val="DA291C"/>
           </a:solidFill>
           <a:ln>
             <a:noFill/>
@@ -5155,7 +5155,7 @@
             <a:r>
               <a:rPr sz="1400" b="1">
                 <a:solidFill>
-                  <a:srgbClr val="C8102E"/>
+                  <a:srgbClr val="DA291C"/>
                 </a:solidFill>
                 <a:latin typeface="Calibri"/>
               </a:rPr>
@@ -5258,7 +5258,7 @@
             <a:r>
               <a:rPr sz="1400" b="1">
                 <a:solidFill>
-                  <a:srgbClr val="C8102E"/>
+                  <a:srgbClr val="DA291C"/>
                 </a:solidFill>
                 <a:latin typeface="Calibri"/>
               </a:rPr>
@@ -5584,7 +5584,7 @@
             <a:avLst/>
           </a:prstGeom>
           <a:solidFill>
-            <a:srgbClr val="C8102E"/>
+            <a:srgbClr val="DA291C"/>
           </a:solidFill>
           <a:ln>
             <a:noFill/>
@@ -5740,7 +5740,7 @@
             <a:avLst/>
           </a:prstGeom>
           <a:solidFill>
-            <a:srgbClr val="C8102E"/>
+            <a:srgbClr val="DA291C"/>
           </a:solidFill>
           <a:ln>
             <a:noFill/>
@@ -5837,7 +5837,7 @@
             <a:r>
               <a:rPr sz="1400" b="1">
                 <a:solidFill>
-                  <a:srgbClr val="C8102E"/>
+                  <a:srgbClr val="DA291C"/>
                 </a:solidFill>
                 <a:latin typeface="Calibri"/>
               </a:rPr>
@@ -5908,7 +5908,7 @@
             <a:r>
               <a:rPr sz="1400" b="1">
                 <a:solidFill>
-                  <a:srgbClr val="C8102E"/>
+                  <a:srgbClr val="DA291C"/>
                 </a:solidFill>
                 <a:latin typeface="Calibri"/>
               </a:rPr>
@@ -5979,7 +5979,7 @@
             <a:r>
               <a:rPr sz="1400" b="1">
                 <a:solidFill>
-                  <a:srgbClr val="C8102E"/>
+                  <a:srgbClr val="DA291C"/>
                 </a:solidFill>
                 <a:latin typeface="Calibri"/>
               </a:rPr>
@@ -6050,7 +6050,7 @@
             <a:r>
               <a:rPr sz="1400" b="1">
                 <a:solidFill>
-                  <a:srgbClr val="C8102E"/>
+                  <a:srgbClr val="DA291C"/>
                 </a:solidFill>
                 <a:latin typeface="Calibri"/>
               </a:rPr>
@@ -6296,7 +6296,7 @@
             <a:avLst/>
           </a:prstGeom>
           <a:solidFill>
-            <a:srgbClr val="C8102E"/>
+            <a:srgbClr val="DA291C"/>
           </a:solidFill>
           <a:ln>
             <a:noFill/>
@@ -6452,7 +6452,7 @@
             <a:avLst/>
           </a:prstGeom>
           <a:solidFill>
-            <a:srgbClr val="C8102E"/>
+            <a:srgbClr val="DA291C"/>
           </a:solidFill>
           <a:ln>
             <a:noFill/>
@@ -6510,7 +6510,7 @@
             <a:r>
               <a:rPr sz="1400" b="1">
                 <a:solidFill>
-                  <a:srgbClr val="C8102E"/>
+                  <a:srgbClr val="DA291C"/>
                 </a:solidFill>
                 <a:latin typeface="Calibri"/>
               </a:rPr>
@@ -6613,7 +6613,7 @@
             <a:r>
               <a:rPr sz="1400" b="1">
                 <a:solidFill>
-                  <a:srgbClr val="C8102E"/>
+                  <a:srgbClr val="DA291C"/>
                 </a:solidFill>
                 <a:latin typeface="Calibri"/>
               </a:rPr>
@@ -6700,7 +6700,7 @@
             <a:r>
               <a:rPr sz="1400" b="1">
                 <a:solidFill>
-                  <a:srgbClr val="C8102E"/>
+                  <a:srgbClr val="DA291C"/>
                 </a:solidFill>
                 <a:latin typeface="Calibri"/>
               </a:rPr>
@@ -6771,7 +6771,7 @@
             <a:r>
               <a:rPr sz="1400" b="1">
                 <a:solidFill>
-                  <a:srgbClr val="C8102E"/>
+                  <a:srgbClr val="DA291C"/>
                 </a:solidFill>
                 <a:latin typeface="Calibri"/>
               </a:rPr>
@@ -7017,7 +7017,7 @@
             <a:avLst/>
           </a:prstGeom>
           <a:solidFill>
-            <a:srgbClr val="C8102E"/>
+            <a:srgbClr val="DA291C"/>
           </a:solidFill>
           <a:ln>
             <a:noFill/>
@@ -7173,7 +7173,7 @@
             <a:avLst/>
           </a:prstGeom>
           <a:solidFill>
-            <a:srgbClr val="C8102E"/>
+            <a:srgbClr val="DA291C"/>
           </a:solidFill>
           <a:ln>
             <a:noFill/>
@@ -7231,7 +7231,7 @@
             <a:r>
               <a:rPr sz="1400" b="1">
                 <a:solidFill>
-                  <a:srgbClr val="C8102E"/>
+                  <a:srgbClr val="DA291C"/>
                 </a:solidFill>
                 <a:latin typeface="Calibri"/>
               </a:rPr>
@@ -7318,7 +7318,7 @@
             <a:r>
               <a:rPr sz="1400" b="1">
                 <a:solidFill>
-                  <a:srgbClr val="C8102E"/>
+                  <a:srgbClr val="DA291C"/>
                 </a:solidFill>
                 <a:latin typeface="Calibri"/>
               </a:rPr>
@@ -7453,7 +7453,7 @@
             <a:r>
               <a:rPr sz="1400" b="1">
                 <a:solidFill>
-                  <a:srgbClr val="C8102E"/>
+                  <a:srgbClr val="DA291C"/>
                 </a:solidFill>
                 <a:latin typeface="Calibri"/>
               </a:rPr>
@@ -7715,7 +7715,7 @@
             <a:avLst/>
           </a:prstGeom>
           <a:solidFill>
-            <a:srgbClr val="C8102E"/>
+            <a:srgbClr val="DA291C"/>
           </a:solidFill>
           <a:ln>
             <a:noFill/>
@@ -7871,7 +7871,7 @@
             <a:avLst/>
           </a:prstGeom>
           <a:solidFill>
-            <a:srgbClr val="C8102E"/>
+            <a:srgbClr val="DA291C"/>
           </a:solidFill>
           <a:ln>
             <a:noFill/>
@@ -7929,7 +7929,7 @@
             <a:r>
               <a:rPr sz="1400" b="1">
                 <a:solidFill>
-                  <a:srgbClr val="C8102E"/>
+                  <a:srgbClr val="DA291C"/>
                 </a:solidFill>
                 <a:latin typeface="Calibri"/>
               </a:rPr>
@@ -8000,7 +8000,7 @@
             <a:r>
               <a:rPr sz="1400" b="1">
                 <a:solidFill>
-                  <a:srgbClr val="C8102E"/>
+                  <a:srgbClr val="DA291C"/>
                 </a:solidFill>
                 <a:latin typeface="Calibri"/>
               </a:rPr>
@@ -8103,7 +8103,7 @@
             <a:r>
               <a:rPr sz="1400" b="1">
                 <a:solidFill>
-                  <a:srgbClr val="C8102E"/>
+                  <a:srgbClr val="DA291C"/>
                 </a:solidFill>
                 <a:latin typeface="Calibri"/>
               </a:rPr>
@@ -8206,7 +8206,7 @@
             <a:r>
               <a:rPr sz="1400" b="1">
                 <a:solidFill>
-                  <a:srgbClr val="C8102E"/>
+                  <a:srgbClr val="DA291C"/>
                 </a:solidFill>
                 <a:latin typeface="Calibri"/>
               </a:rPr>
@@ -8420,7 +8420,7 @@
             <a:avLst/>
           </a:prstGeom>
           <a:solidFill>
-            <a:srgbClr val="C8102E"/>
+            <a:srgbClr val="DA291C"/>
           </a:solidFill>
           <a:ln>
             <a:noFill/>
@@ -8576,7 +8576,7 @@
             <a:avLst/>
           </a:prstGeom>
           <a:solidFill>
-            <a:srgbClr val="C8102E"/>
+            <a:srgbClr val="DA291C"/>
           </a:solidFill>
           <a:ln>
             <a:noFill/>
@@ -8634,7 +8634,7 @@
             <a:r>
               <a:rPr sz="1400" b="1">
                 <a:solidFill>
-                  <a:srgbClr val="C8102E"/>
+                  <a:srgbClr val="DA291C"/>
                 </a:solidFill>
                 <a:latin typeface="Calibri"/>
               </a:rPr>
@@ -8737,7 +8737,7 @@
             <a:r>
               <a:rPr sz="1400" b="1">
                 <a:solidFill>
-                  <a:srgbClr val="C8102E"/>
+                  <a:srgbClr val="DA291C"/>
                 </a:solidFill>
                 <a:latin typeface="Calibri"/>
               </a:rPr>
@@ -8856,7 +8856,7 @@
             <a:r>
               <a:rPr sz="1400" b="1">
                 <a:solidFill>
-                  <a:srgbClr val="C8102E"/>
+                  <a:srgbClr val="DA291C"/>
                 </a:solidFill>
                 <a:latin typeface="Calibri"/>
               </a:rPr>
@@ -9102,7 +9102,7 @@
             <a:avLst/>
           </a:prstGeom>
           <a:solidFill>
-            <a:srgbClr val="C8102E"/>
+            <a:srgbClr val="DA291C"/>
           </a:solidFill>
           <a:ln>
             <a:noFill/>
@@ -9258,7 +9258,7 @@
             <a:avLst/>
           </a:prstGeom>
           <a:solidFill>
-            <a:srgbClr val="C8102E"/>
+            <a:srgbClr val="DA291C"/>
           </a:solidFill>
           <a:ln>
             <a:noFill/>
@@ -9316,7 +9316,7 @@
             <a:r>
               <a:rPr sz="1400" b="1">
                 <a:solidFill>
-                  <a:srgbClr val="C8102E"/>
+                  <a:srgbClr val="DA291C"/>
                 </a:solidFill>
                 <a:latin typeface="Calibri"/>
               </a:rPr>
@@ -9419,7 +9419,7 @@
             <a:r>
               <a:rPr sz="1400" b="1">
                 <a:solidFill>
-                  <a:srgbClr val="C8102E"/>
+                  <a:srgbClr val="DA291C"/>
                 </a:solidFill>
                 <a:latin typeface="Calibri"/>
               </a:rPr>
@@ -9809,7 +9809,7 @@
             <a:avLst/>
           </a:prstGeom>
           <a:solidFill>
-            <a:srgbClr val="C8102E"/>
+            <a:srgbClr val="DA291C"/>
           </a:solidFill>
           <a:ln>
             <a:noFill/>
@@ -9965,7 +9965,7 @@
             <a:avLst/>
           </a:prstGeom>
           <a:solidFill>
-            <a:srgbClr val="C8102E"/>
+            <a:srgbClr val="DA291C"/>
           </a:solidFill>
           <a:ln>
             <a:noFill/>
@@ -10023,7 +10023,7 @@
             <a:r>
               <a:rPr sz="1400" b="1">
                 <a:solidFill>
-                  <a:srgbClr val="C8102E"/>
+                  <a:srgbClr val="DA291C"/>
                 </a:solidFill>
                 <a:latin typeface="Calibri"/>
               </a:rPr>
@@ -10110,7 +10110,7 @@
             <a:r>
               <a:rPr sz="1400" b="1">
                 <a:solidFill>
-                  <a:srgbClr val="C8102E"/>
+                  <a:srgbClr val="DA291C"/>
                 </a:solidFill>
                 <a:latin typeface="Calibri"/>
               </a:rPr>
@@ -10197,7 +10197,7 @@
             <a:r>
               <a:rPr sz="1400" b="1">
                 <a:solidFill>
-                  <a:srgbClr val="C8102E"/>
+                  <a:srgbClr val="DA291C"/>
                 </a:solidFill>
                 <a:latin typeface="Calibri"/>
               </a:rPr>
@@ -10284,7 +10284,7 @@
             <a:r>
               <a:rPr sz="1400" b="1">
                 <a:solidFill>
-                  <a:srgbClr val="C8102E"/>
+                  <a:srgbClr val="DA291C"/>
                 </a:solidFill>
                 <a:latin typeface="Calibri"/>
               </a:rPr>
@@ -10530,7 +10530,7 @@
             <a:avLst/>
           </a:prstGeom>
           <a:solidFill>
-            <a:srgbClr val="C8102E"/>
+            <a:srgbClr val="DA291C"/>
           </a:solidFill>
           <a:ln>
             <a:noFill/>
@@ -10573,7 +10573,7 @@
             <a:avLst/>
           </a:prstGeom>
           <a:solidFill>
-            <a:srgbClr val="C8102E"/>
+            <a:srgbClr val="DA291C"/>
           </a:solidFill>
           <a:ln>
             <a:noFill/>
@@ -10627,7 +10627,7 @@
             <a:r>
               <a:rPr sz="1100" b="1" i="0">
                 <a:solidFill>
-                  <a:srgbClr val="C8102E"/>
+                  <a:srgbClr val="DA291C"/>
                 </a:solidFill>
                 <a:latin typeface="Calibri"/>
               </a:rPr>
@@ -10782,7 +10782,7 @@
             <a:avLst/>
           </a:prstGeom>
           <a:solidFill>
-            <a:srgbClr val="C8102E"/>
+            <a:srgbClr val="DA291C"/>
           </a:solidFill>
           <a:ln>
             <a:noFill/>
@@ -10938,7 +10938,7 @@
             <a:avLst/>
           </a:prstGeom>
           <a:solidFill>
-            <a:srgbClr val="C8102E"/>
+            <a:srgbClr val="DA291C"/>
           </a:solidFill>
           <a:ln>
             <a:noFill/>
@@ -10996,7 +10996,7 @@
             <a:r>
               <a:rPr sz="1400" b="1">
                 <a:solidFill>
-                  <a:srgbClr val="C8102E"/>
+                  <a:srgbClr val="DA291C"/>
                 </a:solidFill>
                 <a:latin typeface="Calibri"/>
               </a:rPr>
@@ -11179,7 +11179,7 @@
             <a:r>
               <a:rPr sz="1400" b="1">
                 <a:solidFill>
-                  <a:srgbClr val="C8102E"/>
+                  <a:srgbClr val="DA291C"/>
                 </a:solidFill>
                 <a:latin typeface="Calibri"/>
               </a:rPr>
@@ -11521,7 +11521,7 @@
             <a:avLst/>
           </a:prstGeom>
           <a:solidFill>
-            <a:srgbClr val="C8102E"/>
+            <a:srgbClr val="DA291C"/>
           </a:solidFill>
           <a:ln>
             <a:noFill/>
@@ -11564,7 +11564,7 @@
             <a:avLst/>
           </a:prstGeom>
           <a:solidFill>
-            <a:srgbClr val="C8102E"/>
+            <a:srgbClr val="DA291C"/>
           </a:solidFill>
           <a:ln>
             <a:noFill/>
@@ -11618,7 +11618,7 @@
             <a:r>
               <a:rPr sz="1100" b="1" i="0">
                 <a:solidFill>
-                  <a:srgbClr val="C8102E"/>
+                  <a:srgbClr val="DA291C"/>
                 </a:solidFill>
                 <a:latin typeface="Calibri"/>
               </a:rPr>
@@ -11774,7 +11774,7 @@
             <a:avLst/>
           </a:prstGeom>
           <a:solidFill>
-            <a:srgbClr val="C8102E"/>
+            <a:srgbClr val="DA291C"/>
           </a:solidFill>
           <a:ln>
             <a:noFill/>
@@ -11930,7 +11930,7 @@
             <a:avLst/>
           </a:prstGeom>
           <a:solidFill>
-            <a:srgbClr val="C8102E"/>
+            <a:srgbClr val="DA291C"/>
           </a:solidFill>
           <a:ln>
             <a:noFill/>
@@ -11988,7 +11988,7 @@
             <a:r>
               <a:rPr sz="1400" b="1">
                 <a:solidFill>
-                  <a:srgbClr val="C8102E"/>
+                  <a:srgbClr val="DA291C"/>
                 </a:solidFill>
                 <a:latin typeface="Calibri"/>
               </a:rPr>
@@ -12075,7 +12075,7 @@
             <a:r>
               <a:rPr sz="1400" b="1">
                 <a:solidFill>
-                  <a:srgbClr val="C8102E"/>
+                  <a:srgbClr val="DA291C"/>
                 </a:solidFill>
                 <a:latin typeface="Calibri"/>
               </a:rPr>
@@ -12274,7 +12274,7 @@
             <a:r>
               <a:rPr sz="1400" b="1">
                 <a:solidFill>
-                  <a:srgbClr val="C8102E"/>
+                  <a:srgbClr val="DA291C"/>
                 </a:solidFill>
                 <a:latin typeface="Calibri"/>
               </a:rPr>
@@ -12504,7 +12504,7 @@
             <a:avLst/>
           </a:prstGeom>
           <a:solidFill>
-            <a:srgbClr val="C8102E"/>
+            <a:srgbClr val="DA291C"/>
           </a:solidFill>
           <a:ln>
             <a:noFill/>
@@ -12660,7 +12660,7 @@
             <a:avLst/>
           </a:prstGeom>
           <a:solidFill>
-            <a:srgbClr val="C8102E"/>
+            <a:srgbClr val="DA291C"/>
           </a:solidFill>
           <a:ln>
             <a:noFill/>
@@ -12718,7 +12718,7 @@
             <a:r>
               <a:rPr sz="1400" b="1">
                 <a:solidFill>
-                  <a:srgbClr val="C8102E"/>
+                  <a:srgbClr val="DA291C"/>
                 </a:solidFill>
                 <a:latin typeface="Calibri"/>
               </a:rPr>
@@ -12789,7 +12789,7 @@
             <a:r>
               <a:rPr sz="1400" b="1">
                 <a:solidFill>
-                  <a:srgbClr val="C8102E"/>
+                  <a:srgbClr val="DA291C"/>
                 </a:solidFill>
                 <a:latin typeface="Calibri"/>
               </a:rPr>
@@ -12876,7 +12876,7 @@
             <a:r>
               <a:rPr sz="1400" b="1">
                 <a:solidFill>
-                  <a:srgbClr val="C8102E"/>
+                  <a:srgbClr val="DA291C"/>
                 </a:solidFill>
                 <a:latin typeface="Calibri"/>
               </a:rPr>
@@ -12979,7 +12979,7 @@
             <a:r>
               <a:rPr sz="1400" b="1">
                 <a:solidFill>
-                  <a:srgbClr val="C8102E"/>
+                  <a:srgbClr val="DA291C"/>
                 </a:solidFill>
                 <a:latin typeface="Calibri"/>
               </a:rPr>
@@ -13050,7 +13050,7 @@
             <a:r>
               <a:rPr sz="1400" b="1">
                 <a:solidFill>
-                  <a:srgbClr val="C8102E"/>
+                  <a:srgbClr val="DA291C"/>
                 </a:solidFill>
                 <a:latin typeface="Calibri"/>
               </a:rPr>
@@ -13264,7 +13264,7 @@
             <a:avLst/>
           </a:prstGeom>
           <a:solidFill>
-            <a:srgbClr val="C8102E"/>
+            <a:srgbClr val="DA291C"/>
           </a:solidFill>
           <a:ln>
             <a:noFill/>
@@ -13420,7 +13420,7 @@
             <a:avLst/>
           </a:prstGeom>
           <a:solidFill>
-            <a:srgbClr val="C8102E"/>
+            <a:srgbClr val="DA291C"/>
           </a:solidFill>
           <a:ln>
             <a:noFill/>
@@ -13478,7 +13478,7 @@
             <a:r>
               <a:rPr sz="1400" b="1">
                 <a:solidFill>
-                  <a:srgbClr val="C8102E"/>
+                  <a:srgbClr val="DA291C"/>
                 </a:solidFill>
                 <a:latin typeface="Calibri"/>
               </a:rPr>
@@ -13821,7 +13821,7 @@
             <a:r>
               <a:rPr sz="1400" b="1">
                 <a:solidFill>
-                  <a:srgbClr val="C8102E"/>
+                  <a:srgbClr val="DA291C"/>
                 </a:solidFill>
                 <a:latin typeface="Calibri"/>
               </a:rPr>
@@ -14335,7 +14335,7 @@
             <a:avLst/>
           </a:prstGeom>
           <a:solidFill>
-            <a:srgbClr val="C8102E"/>
+            <a:srgbClr val="DA291C"/>
           </a:solidFill>
           <a:ln>
             <a:noFill/>
@@ -14491,7 +14491,7 @@
             <a:avLst/>
           </a:prstGeom>
           <a:solidFill>
-            <a:srgbClr val="C8102E"/>
+            <a:srgbClr val="DA291C"/>
           </a:solidFill>
           <a:ln>
             <a:noFill/>
@@ -14549,7 +14549,7 @@
             <a:r>
               <a:rPr sz="1400" b="1">
                 <a:solidFill>
-                  <a:srgbClr val="C8102E"/>
+                  <a:srgbClr val="DA291C"/>
                 </a:solidFill>
                 <a:latin typeface="Calibri"/>
               </a:rPr>
@@ -14915,7 +14915,7 @@
             <a:r>
               <a:rPr sz="1400" b="1">
                 <a:solidFill>
-                  <a:srgbClr val="C8102E"/>
+                  <a:srgbClr val="DA291C"/>
                 </a:solidFill>
                 <a:latin typeface="Calibri"/>
               </a:rPr>
@@ -15445,7 +15445,7 @@
             <a:avLst/>
           </a:prstGeom>
           <a:solidFill>
-            <a:srgbClr val="C8102E"/>
+            <a:srgbClr val="DA291C"/>
           </a:solidFill>
           <a:ln>
             <a:noFill/>
@@ -15601,7 +15601,7 @@
             <a:avLst/>
           </a:prstGeom>
           <a:solidFill>
-            <a:srgbClr val="C8102E"/>
+            <a:srgbClr val="DA291C"/>
           </a:solidFill>
           <a:ln>
             <a:noFill/>
@@ -15659,7 +15659,7 @@
             <a:r>
               <a:rPr sz="1400" b="1">
                 <a:solidFill>
-                  <a:srgbClr val="C8102E"/>
+                  <a:srgbClr val="DA291C"/>
                 </a:solidFill>
                 <a:latin typeface="Calibri"/>
               </a:rPr>
@@ -15778,7 +15778,7 @@
             <a:r>
               <a:rPr sz="1400" b="1">
                 <a:solidFill>
-                  <a:srgbClr val="C8102E"/>
+                  <a:srgbClr val="DA291C"/>
                 </a:solidFill>
                 <a:latin typeface="Calibri"/>
               </a:rPr>
@@ -15881,7 +15881,7 @@
             <a:r>
               <a:rPr sz="1400" b="1">
                 <a:solidFill>
-                  <a:srgbClr val="C8102E"/>
+                  <a:srgbClr val="DA291C"/>
                 </a:solidFill>
                 <a:latin typeface="Calibri"/>
               </a:rPr>
@@ -16143,7 +16143,7 @@
             <a:avLst/>
           </a:prstGeom>
           <a:solidFill>
-            <a:srgbClr val="C8102E"/>
+            <a:srgbClr val="DA291C"/>
           </a:solidFill>
           <a:ln>
             <a:noFill/>
@@ -16299,7 +16299,7 @@
             <a:avLst/>
           </a:prstGeom>
           <a:solidFill>
-            <a:srgbClr val="C8102E"/>
+            <a:srgbClr val="DA291C"/>
           </a:solidFill>
           <a:ln>
             <a:noFill/>
@@ -16357,7 +16357,7 @@
             <a:r>
               <a:rPr sz="1400" b="1">
                 <a:solidFill>
-                  <a:srgbClr val="C8102E"/>
+                  <a:srgbClr val="DA291C"/>
                 </a:solidFill>
                 <a:latin typeface="Calibri"/>
               </a:rPr>
@@ -16476,7 +16476,7 @@
             <a:r>
               <a:rPr sz="1400" b="1">
                 <a:solidFill>
-                  <a:srgbClr val="C8102E"/>
+                  <a:srgbClr val="DA291C"/>
                 </a:solidFill>
                 <a:latin typeface="Calibri"/>
               </a:rPr>
@@ -16627,7 +16627,7 @@
             <a:r>
               <a:rPr sz="1400" b="1">
                 <a:solidFill>
-                  <a:srgbClr val="C8102E"/>
+                  <a:srgbClr val="DA291C"/>
                 </a:solidFill>
                 <a:latin typeface="Calibri"/>
               </a:rPr>
@@ -16873,7 +16873,7 @@
             <a:avLst/>
           </a:prstGeom>
           <a:solidFill>
-            <a:srgbClr val="C8102E"/>
+            <a:srgbClr val="DA291C"/>
           </a:solidFill>
           <a:ln>
             <a:noFill/>
@@ -16916,7 +16916,7 @@
             <a:avLst/>
           </a:prstGeom>
           <a:solidFill>
-            <a:srgbClr val="C8102E"/>
+            <a:srgbClr val="DA291C"/>
           </a:solidFill>
           <a:ln>
             <a:noFill/>
@@ -16970,7 +16970,7 @@
             <a:r>
               <a:rPr sz="1100" b="1" i="0">
                 <a:solidFill>
-                  <a:srgbClr val="C8102E"/>
+                  <a:srgbClr val="DA291C"/>
                 </a:solidFill>
                 <a:latin typeface="Calibri"/>
               </a:rPr>
@@ -17125,7 +17125,7 @@
             <a:avLst/>
           </a:prstGeom>
           <a:solidFill>
-            <a:srgbClr val="C8102E"/>
+            <a:srgbClr val="DA291C"/>
           </a:solidFill>
           <a:ln>
             <a:noFill/>
@@ -17281,7 +17281,7 @@
             <a:avLst/>
           </a:prstGeom>
           <a:solidFill>
-            <a:srgbClr val="C8102E"/>
+            <a:srgbClr val="DA291C"/>
           </a:solidFill>
           <a:ln>
             <a:noFill/>
@@ -17339,7 +17339,7 @@
             <a:r>
               <a:rPr sz="1400" b="1">
                 <a:solidFill>
-                  <a:srgbClr val="C8102E"/>
+                  <a:srgbClr val="DA291C"/>
                 </a:solidFill>
                 <a:latin typeface="Calibri"/>
               </a:rPr>
@@ -17426,7 +17426,7 @@
             <a:r>
               <a:rPr sz="1400" b="1">
                 <a:solidFill>
-                  <a:srgbClr val="C8102E"/>
+                  <a:srgbClr val="DA291C"/>
                 </a:solidFill>
                 <a:latin typeface="Calibri"/>
               </a:rPr>
@@ -17513,7 +17513,7 @@
             <a:r>
               <a:rPr sz="1400" b="1">
                 <a:solidFill>
-                  <a:srgbClr val="C8102E"/>
+                  <a:srgbClr val="DA291C"/>
                 </a:solidFill>
                 <a:latin typeface="Calibri"/>
               </a:rPr>
@@ -17600,7 +17600,7 @@
             <a:r>
               <a:rPr sz="1400" b="1">
                 <a:solidFill>
-                  <a:srgbClr val="C8102E"/>
+                  <a:srgbClr val="DA291C"/>
                 </a:solidFill>
                 <a:latin typeface="Calibri"/>
               </a:rPr>
@@ -17671,7 +17671,7 @@
             <a:r>
               <a:rPr sz="1400" b="1">
                 <a:solidFill>
-                  <a:srgbClr val="C8102E"/>
+                  <a:srgbClr val="DA291C"/>
                 </a:solidFill>
                 <a:latin typeface="Calibri"/>
               </a:rPr>
@@ -17901,7 +17901,7 @@
             <a:avLst/>
           </a:prstGeom>
           <a:solidFill>
-            <a:srgbClr val="C8102E"/>
+            <a:srgbClr val="DA291C"/>
           </a:solidFill>
           <a:ln>
             <a:noFill/>
@@ -18057,7 +18057,7 @@
             <a:avLst/>
           </a:prstGeom>
           <a:solidFill>
-            <a:srgbClr val="C8102E"/>
+            <a:srgbClr val="DA291C"/>
           </a:solidFill>
           <a:ln>
             <a:noFill/>
@@ -18170,7 +18170,7 @@
             <a:r>
               <a:rPr sz="1400" b="1">
                 <a:solidFill>
-                  <a:srgbClr val="C8102E"/>
+                  <a:srgbClr val="DA291C"/>
                 </a:solidFill>
                 <a:latin typeface="Calibri"/>
               </a:rPr>
@@ -18241,7 +18241,7 @@
             <a:r>
               <a:rPr sz="1400" b="1">
                 <a:solidFill>
-                  <a:srgbClr val="C8102E"/>
+                  <a:srgbClr val="DA291C"/>
                 </a:solidFill>
                 <a:latin typeface="Calibri"/>
               </a:rPr>
@@ -18503,7 +18503,7 @@
             <a:avLst/>
           </a:prstGeom>
           <a:solidFill>
-            <a:srgbClr val="C8102E"/>
+            <a:srgbClr val="DA291C"/>
           </a:solidFill>
           <a:ln>
             <a:noFill/>
@@ -18659,7 +18659,7 @@
             <a:avLst/>
           </a:prstGeom>
           <a:solidFill>
-            <a:srgbClr val="C8102E"/>
+            <a:srgbClr val="DA291C"/>
           </a:solidFill>
           <a:ln>
             <a:noFill/>
@@ -18756,7 +18756,7 @@
             <a:r>
               <a:rPr sz="1400" b="1">
                 <a:solidFill>
-                  <a:srgbClr val="C8102E"/>
+                  <a:srgbClr val="DA291C"/>
                 </a:solidFill>
                 <a:latin typeface="Calibri"/>
               </a:rPr>
@@ -18811,7 +18811,7 @@
             <a:r>
               <a:rPr sz="1400" b="1">
                 <a:solidFill>
-                  <a:srgbClr val="C8102E"/>
+                  <a:srgbClr val="DA291C"/>
                 </a:solidFill>
                 <a:latin typeface="Calibri"/>
               </a:rPr>
@@ -18962,7 +18962,7 @@
             <a:r>
               <a:rPr sz="1400" b="1">
                 <a:solidFill>
-                  <a:srgbClr val="C8102E"/>
+                  <a:srgbClr val="DA291C"/>
                 </a:solidFill>
                 <a:latin typeface="Calibri"/>
               </a:rPr>
@@ -19272,7 +19272,7 @@
             <a:avLst/>
           </a:prstGeom>
           <a:solidFill>
-            <a:srgbClr val="C8102E"/>
+            <a:srgbClr val="DA291C"/>
           </a:solidFill>
           <a:ln>
             <a:noFill/>
@@ -19315,7 +19315,7 @@
             <a:avLst/>
           </a:prstGeom>
           <a:solidFill>
-            <a:srgbClr val="C8102E"/>
+            <a:srgbClr val="DA291C"/>
           </a:solidFill>
           <a:ln>
             <a:noFill/>
@@ -19404,7 +19404,7 @@
             <a:r>
               <a:rPr sz="1600" b="1" i="0">
                 <a:solidFill>
-                  <a:srgbClr val="C8102E"/>
+                  <a:srgbClr val="DA291C"/>
                 </a:solidFill>
                 <a:latin typeface="Calibri"/>
               </a:rPr>
@@ -19629,7 +19629,7 @@
             <a:avLst/>
           </a:prstGeom>
           <a:solidFill>
-            <a:srgbClr val="C8102E"/>
+            <a:srgbClr val="DA291C"/>
           </a:solidFill>
           <a:ln>
             <a:noFill/>
@@ -19785,7 +19785,7 @@
             <a:avLst/>
           </a:prstGeom>
           <a:solidFill>
-            <a:srgbClr val="C8102E"/>
+            <a:srgbClr val="DA291C"/>
           </a:solidFill>
           <a:ln>
             <a:noFill/>
@@ -19843,7 +19843,7 @@
             <a:r>
               <a:rPr sz="1400" b="1">
                 <a:solidFill>
-                  <a:srgbClr val="C8102E"/>
+                  <a:srgbClr val="DA291C"/>
                 </a:solidFill>
                 <a:latin typeface="Calibri"/>
               </a:rPr>
@@ -19898,7 +19898,7 @@
             <a:r>
               <a:rPr sz="1400" b="1">
                 <a:solidFill>
-                  <a:srgbClr val="C8102E"/>
+                  <a:srgbClr val="DA291C"/>
                 </a:solidFill>
                 <a:latin typeface="Calibri"/>
               </a:rPr>
@@ -19969,7 +19969,7 @@
             <a:r>
               <a:rPr sz="1400" b="1">
                 <a:solidFill>
-                  <a:srgbClr val="C8102E"/>
+                  <a:srgbClr val="DA291C"/>
                 </a:solidFill>
                 <a:latin typeface="Calibri"/>
               </a:rPr>
@@ -20040,7 +20040,7 @@
             <a:r>
               <a:rPr sz="1400" b="1">
                 <a:solidFill>
-                  <a:srgbClr val="C8102E"/>
+                  <a:srgbClr val="DA291C"/>
                 </a:solidFill>
                 <a:latin typeface="Calibri"/>
               </a:rPr>
@@ -20254,7 +20254,7 @@
             <a:avLst/>
           </a:prstGeom>
           <a:solidFill>
-            <a:srgbClr val="C8102E"/>
+            <a:srgbClr val="DA291C"/>
           </a:solidFill>
           <a:ln>
             <a:noFill/>
@@ -20297,7 +20297,7 @@
             <a:avLst/>
           </a:prstGeom>
           <a:solidFill>
-            <a:srgbClr val="C8102E"/>
+            <a:srgbClr val="DA291C"/>
           </a:solidFill>
           <a:ln>
             <a:noFill/>
@@ -20351,7 +20351,7 @@
             <a:r>
               <a:rPr sz="1100" b="1" i="0">
                 <a:solidFill>
-                  <a:srgbClr val="C8102E"/>
+                  <a:srgbClr val="DA291C"/>
                 </a:solidFill>
                 <a:latin typeface="Calibri"/>
               </a:rPr>
@@ -20506,7 +20506,7 @@
             <a:avLst/>
           </a:prstGeom>
           <a:solidFill>
-            <a:srgbClr val="C8102E"/>
+            <a:srgbClr val="DA291C"/>
           </a:solidFill>
           <a:ln>
             <a:noFill/>
@@ -20662,7 +20662,7 @@
             <a:avLst/>
           </a:prstGeom>
           <a:solidFill>
-            <a:srgbClr val="C8102E"/>
+            <a:srgbClr val="DA291C"/>
           </a:solidFill>
           <a:ln>
             <a:noFill/>
@@ -20743,7 +20743,7 @@
             <a:r>
               <a:rPr sz="1400" b="1">
                 <a:solidFill>
-                  <a:srgbClr val="C8102E"/>
+                  <a:srgbClr val="DA291C"/>
                 </a:solidFill>
                 <a:latin typeface="Calibri"/>
               </a:rPr>
@@ -20798,7 +20798,7 @@
             <a:r>
               <a:rPr sz="1400" b="1">
                 <a:solidFill>
-                  <a:srgbClr val="C8102E"/>
+                  <a:srgbClr val="DA291C"/>
                 </a:solidFill>
                 <a:latin typeface="Calibri"/>
               </a:rPr>
@@ -20853,7 +20853,7 @@
             <a:r>
               <a:rPr sz="1400" b="1">
                 <a:solidFill>
-                  <a:srgbClr val="C8102E"/>
+                  <a:srgbClr val="DA291C"/>
                 </a:solidFill>
                 <a:latin typeface="Calibri"/>
               </a:rPr>
@@ -20908,7 +20908,7 @@
             <a:r>
               <a:rPr sz="1400" b="1">
                 <a:solidFill>
-                  <a:srgbClr val="C8102E"/>
+                  <a:srgbClr val="DA291C"/>
                 </a:solidFill>
                 <a:latin typeface="Calibri"/>
               </a:rPr>
@@ -20963,7 +20963,7 @@
             <a:r>
               <a:rPr sz="1400" b="1">
                 <a:solidFill>
-                  <a:srgbClr val="C8102E"/>
+                  <a:srgbClr val="DA291C"/>
                 </a:solidFill>
                 <a:latin typeface="Calibri"/>
               </a:rPr>
@@ -21193,7 +21193,7 @@
             <a:avLst/>
           </a:prstGeom>
           <a:solidFill>
-            <a:srgbClr val="C8102E"/>
+            <a:srgbClr val="DA291C"/>
           </a:solidFill>
           <a:ln>
             <a:noFill/>
@@ -21349,7 +21349,7 @@
             <a:avLst/>
           </a:prstGeom>
           <a:solidFill>
-            <a:srgbClr val="C8102E"/>
+            <a:srgbClr val="DA291C"/>
           </a:solidFill>
           <a:ln>
             <a:noFill/>
@@ -21446,7 +21446,7 @@
             <a:r>
               <a:rPr sz="1400" b="1">
                 <a:solidFill>
-                  <a:srgbClr val="C8102E"/>
+                  <a:srgbClr val="DA291C"/>
                 </a:solidFill>
                 <a:latin typeface="Calibri"/>
               </a:rPr>
@@ -21533,7 +21533,7 @@
             <a:r>
               <a:rPr sz="1400" b="1">
                 <a:solidFill>
-                  <a:srgbClr val="C8102E"/>
+                  <a:srgbClr val="DA291C"/>
                 </a:solidFill>
                 <a:latin typeface="Calibri"/>
               </a:rPr>
@@ -21604,7 +21604,7 @@
             <a:r>
               <a:rPr sz="1400" b="1">
                 <a:solidFill>
-                  <a:srgbClr val="C8102E"/>
+                  <a:srgbClr val="DA291C"/>
                 </a:solidFill>
                 <a:latin typeface="Calibri"/>
               </a:rPr>
@@ -21834,7 +21834,7 @@
             <a:avLst/>
           </a:prstGeom>
           <a:solidFill>
-            <a:srgbClr val="C8102E"/>
+            <a:srgbClr val="DA291C"/>
           </a:solidFill>
           <a:ln>
             <a:noFill/>
@@ -21990,7 +21990,7 @@
             <a:avLst/>
           </a:prstGeom>
           <a:solidFill>
-            <a:srgbClr val="C8102E"/>
+            <a:srgbClr val="DA291C"/>
           </a:solidFill>
           <a:ln>
             <a:noFill/>
@@ -22087,7 +22087,7 @@
             <a:r>
               <a:rPr sz="1400" b="1">
                 <a:solidFill>
-                  <a:srgbClr val="C8102E"/>
+                  <a:srgbClr val="DA291C"/>
                 </a:solidFill>
                 <a:latin typeface="Calibri"/>
               </a:rPr>
@@ -22206,7 +22206,7 @@
             <a:r>
               <a:rPr sz="1400" b="1">
                 <a:solidFill>
-                  <a:srgbClr val="C8102E"/>
+                  <a:srgbClr val="DA291C"/>
                 </a:solidFill>
                 <a:latin typeface="Calibri"/>
               </a:rPr>
@@ -22277,7 +22277,7 @@
             <a:r>
               <a:rPr sz="1400" b="1">
                 <a:solidFill>
-                  <a:srgbClr val="C8102E"/>
+                  <a:srgbClr val="DA291C"/>
                 </a:solidFill>
                 <a:latin typeface="Calibri"/>
               </a:rPr>
@@ -22523,7 +22523,7 @@
             <a:avLst/>
           </a:prstGeom>
           <a:solidFill>
-            <a:srgbClr val="C8102E"/>
+            <a:srgbClr val="DA291C"/>
           </a:solidFill>
           <a:ln>
             <a:noFill/>
@@ -22679,7 +22679,7 @@
             <a:avLst/>
           </a:prstGeom>
           <a:solidFill>
-            <a:srgbClr val="C8102E"/>
+            <a:srgbClr val="DA291C"/>
           </a:solidFill>
           <a:ln>
             <a:noFill/>
@@ -22737,7 +22737,7 @@
             <a:r>
               <a:rPr sz="1400" b="1">
                 <a:solidFill>
-                  <a:srgbClr val="C8102E"/>
+                  <a:srgbClr val="DA291C"/>
                 </a:solidFill>
                 <a:latin typeface="Calibri"/>
               </a:rPr>
@@ -22792,7 +22792,7 @@
             <a:r>
               <a:rPr sz="1400" b="1">
                 <a:solidFill>
-                  <a:srgbClr val="C8102E"/>
+                  <a:srgbClr val="DA291C"/>
                 </a:solidFill>
                 <a:latin typeface="Calibri"/>
               </a:rPr>
@@ -22879,7 +22879,7 @@
             <a:r>
               <a:rPr sz="1400" b="1">
                 <a:solidFill>
-                  <a:srgbClr val="C8102E"/>
+                  <a:srgbClr val="DA291C"/>
                 </a:solidFill>
                 <a:latin typeface="Calibri"/>
               </a:rPr>
@@ -22934,7 +22934,7 @@
             <a:r>
               <a:rPr sz="1400" b="1">
                 <a:solidFill>
-                  <a:srgbClr val="C8102E"/>
+                  <a:srgbClr val="DA291C"/>
                 </a:solidFill>
                 <a:latin typeface="Calibri"/>
               </a:rPr>
@@ -23005,7 +23005,7 @@
             <a:r>
               <a:rPr sz="1400" b="1">
                 <a:solidFill>
-                  <a:srgbClr val="C8102E"/>
+                  <a:srgbClr val="DA291C"/>
                 </a:solidFill>
                 <a:latin typeface="Calibri"/>
               </a:rPr>

--- a/Santander_LimitedCompany_Walkthrough.pptx
+++ b/Santander_LimitedCompany_Walkthrough.pptx
@@ -3747,14 +3747,14 @@
       </p:sp>
       <p:sp>
         <p:nvSpPr>
-          <p:cNvPr id="7" name="TextBox 6"/>
+          <p:cNvPr id="8" name="TextBox 7"/>
           <p:cNvSpPr txBox="1"/>
           <p:nvPr/>
         </p:nvSpPr>
         <p:spPr>
           <a:xfrm>
-            <a:off x="457200" y="457200"/>
-            <a:ext cx="4572000" cy="457200"/>
+            <a:off x="457200" y="1645920"/>
+            <a:ext cx="9144000" cy="2011680"/>
           </a:xfrm>
           <a:prstGeom prst="rect">
             <a:avLst/>
@@ -3769,27 +3769,28 @@
           <a:p>
             <a:pPr algn="l"/>
             <a:r>
-              <a:rPr sz="1100" b="0" i="0">
-                <a:solidFill>
-                  <a:srgbClr val="A8A299"/>
-                </a:solidFill>
-                <a:latin typeface="Calibri"/>
-              </a:rPr>
-              <a:t>Santander Business Banking</a:t>
-            </a:r>
-          </a:p>
-        </p:txBody>
-      </p:sp>
-      <p:sp>
-        <p:nvSpPr>
-          <p:cNvPr id="8" name="TextBox 7"/>
+              <a:rPr sz="5200" b="1">
+                <a:solidFill>
+                  <a:srgbClr val="FFFFFF"/>
+                </a:solidFill>
+                <a:latin typeface="Calibri"/>
+              </a:rPr>
+              <a:t>Limited Company
+Walkthrough</a:t>
+            </a:r>
+          </a:p>
+        </p:txBody>
+      </p:sp>
+      <p:sp>
+        <p:nvSpPr>
+          <p:cNvPr id="9" name="TextBox 8"/>
           <p:cNvSpPr txBox="1"/>
           <p:nvPr/>
         </p:nvSpPr>
         <p:spPr>
           <a:xfrm>
-            <a:off x="457200" y="1645920"/>
-            <a:ext cx="9144000" cy="2011680"/>
+            <a:off x="457200" y="3840480"/>
+            <a:ext cx="8229600" cy="548640"/>
           </a:xfrm>
           <a:prstGeom prst="rect">
             <a:avLst/>
@@ -3804,28 +3805,27 @@
           <a:p>
             <a:pPr algn="l"/>
             <a:r>
-              <a:rPr sz="5200" b="1">
-                <a:solidFill>
-                  <a:srgbClr val="FFFFFF"/>
-                </a:solidFill>
-                <a:latin typeface="Calibri"/>
-              </a:rPr>
-              <a:t>Limited Company
-Walkthrough</a:t>
-            </a:r>
-          </a:p>
-        </p:txBody>
-      </p:sp>
-      <p:sp>
-        <p:nvSpPr>
-          <p:cNvPr id="9" name="TextBox 8"/>
+              <a:rPr sz="1800" b="1" i="0">
+                <a:solidFill>
+                  <a:srgbClr val="DA291C"/>
+                </a:solidFill>
+                <a:latin typeface="Calibri"/>
+              </a:rPr>
+              <a:t>Santander Business Banking · Concept Prototype</a:t>
+            </a:r>
+          </a:p>
+        </p:txBody>
+      </p:sp>
+      <p:sp>
+        <p:nvSpPr>
+          <p:cNvPr id="10" name="TextBox 9"/>
           <p:cNvSpPr txBox="1"/>
           <p:nvPr/>
         </p:nvSpPr>
         <p:spPr>
           <a:xfrm>
-            <a:off x="457200" y="3840480"/>
-            <a:ext cx="8229600" cy="548640"/>
+            <a:off x="457200" y="4526280"/>
+            <a:ext cx="5486400" cy="365760"/>
           </a:xfrm>
           <a:prstGeom prst="rect">
             <a:avLst/>
@@ -3840,27 +3840,27 @@
           <a:p>
             <a:pPr algn="l"/>
             <a:r>
-              <a:rPr sz="1800" b="1" i="0">
-                <a:solidFill>
-                  <a:srgbClr val="DA291C"/>
-                </a:solidFill>
-                <a:latin typeface="Calibri"/>
-              </a:rPr>
-              <a:t>Santander Business Banking · Concept Prototype</a:t>
-            </a:r>
-          </a:p>
-        </p:txBody>
-      </p:sp>
-      <p:sp>
-        <p:nvSpPr>
-          <p:cNvPr id="10" name="TextBox 9"/>
+              <a:rPr sz="1300" b="0" i="0">
+                <a:solidFill>
+                  <a:srgbClr val="A8A299"/>
+                </a:solidFill>
+                <a:latin typeface="Calibri"/>
+              </a:rPr>
+              <a:t>June 2026  ·  Created by Alan Davidson</a:t>
+            </a:r>
+          </a:p>
+        </p:txBody>
+      </p:sp>
+      <p:sp>
+        <p:nvSpPr>
+          <p:cNvPr id="11" name="TextBox 10"/>
           <p:cNvSpPr txBox="1"/>
           <p:nvPr/>
         </p:nvSpPr>
         <p:spPr>
           <a:xfrm>
-            <a:off x="457200" y="4526280"/>
-            <a:ext cx="5486400" cy="365760"/>
+            <a:off x="7772400" y="6217920"/>
+            <a:ext cx="4114800" cy="365760"/>
           </a:xfrm>
           <a:prstGeom prst="rect">
             <a:avLst/>
@@ -3873,41 +3873,6 @@
           </a:bodyPr>
           <a:lstStyle/>
           <a:p>
-            <a:pPr algn="l"/>
-            <a:r>
-              <a:rPr sz="1300" b="0" i="0">
-                <a:solidFill>
-                  <a:srgbClr val="A8A299"/>
-                </a:solidFill>
-                <a:latin typeface="Calibri"/>
-              </a:rPr>
-              <a:t>June 2026  ·  Created by Alan Davidson</a:t>
-            </a:r>
-          </a:p>
-        </p:txBody>
-      </p:sp>
-      <p:sp>
-        <p:nvSpPr>
-          <p:cNvPr id="11" name="TextBox 10"/>
-          <p:cNvSpPr txBox="1"/>
-          <p:nvPr/>
-        </p:nvSpPr>
-        <p:spPr>
-          <a:xfrm>
-            <a:off x="7772400" y="6217920"/>
-            <a:ext cx="4114800" cy="365760"/>
-          </a:xfrm>
-          <a:prstGeom prst="rect">
-            <a:avLst/>
-          </a:prstGeom>
-          <a:noFill/>
-        </p:spPr>
-        <p:txBody>
-          <a:bodyPr wrap="square">
-            <a:spAutoFit/>
-          </a:bodyPr>
-          <a:lstStyle/>
-          <a:p>
             <a:pPr algn="r"/>
             <a:r>
               <a:rPr sz="1100" b="0" i="0">
@@ -3921,6 +3886,30 @@
           </a:p>
         </p:txBody>
       </p:sp>
+      <p:pic>
+        <p:nvPicPr>
+          <p:cNvPr id="12" name="Santander logo" descr="santander-logo-white.png"/>
+          <p:cNvPicPr>
+            <a:picLocks noChangeAspect="1"/>
+          </p:cNvPicPr>
+          <p:nvPr/>
+        </p:nvPicPr>
+        <p:blipFill>
+          <a:blip r:embed="rId2"/>
+          <a:stretch>
+            <a:fillRect/>
+          </a:stretch>
+        </p:blipFill>
+        <p:spPr>
+          <a:xfrm>
+            <a:off x="502920" y="457200"/>
+            <a:ext cx="2377440" cy="411297"/>
+          </a:xfrm>
+          <a:prstGeom prst="rect">
+            <a:avLst/>
+          </a:prstGeom>
+        </p:spPr>
+      </p:pic>
     </p:spTree>
   </p:cSld>
   <p:clrMapOvr>

--- a/Santander_LimitedCompany_Walkthrough.pptx
+++ b/Santander_LimitedCompany_Walkthrough.pptx
@@ -4704,7 +4704,7 @@
                 </a:solidFill>
                 <a:latin typeface="Calibri"/>
               </a:rPr>
-              <a:t>• 13.  Paperless actions grid — 10 workflow tiles</a:t>
+              <a:t>• 13.  Paperless actions grid — accordion of all 17 workflows</a:t>
             </a:r>
           </a:p>
           <a:p>
@@ -11899,7 +11899,7 @@
                 </a:solidFill>
                 <a:latin typeface="Calibri"/>
               </a:rPr>
-              <a:t>How workflows work — 11 paperless journeys</a:t>
+              <a:t>How workflows work — 17 paperless journeys</a:t>
             </a:r>
           </a:p>
         </p:txBody>
@@ -11970,12 +11970,18 @@
           <a:lstStyle/>
           <a:p>
             <a:pPr>
-              <a:spcBef>
-                <a:spcPts val="800"/>
-              </a:spcBef>
-            </a:pPr>
-            <a:r>
-              <a:rPr sz="1400" b="1">
+              <a:lnSpc>
+                <a:spcPct val="100000"/>
+              </a:lnSpc>
+              <a:spcBef>
+                <a:spcPts val="0"/>
+              </a:spcBef>
+              <a:spcAft>
+                <a:spcPts val="100"/>
+              </a:spcAft>
+            </a:pPr>
+            <a:r>
+              <a:rPr sz="1100" b="1">
                 <a:solidFill>
                   <a:srgbClr val="DA291C"/>
                 </a:solidFill>
@@ -11986,12 +11992,18 @@
           </a:p>
           <a:p>
             <a:pPr lvl="1">
-              <a:spcBef>
-                <a:spcPts val="200"/>
-              </a:spcBef>
-            </a:pPr>
-            <a:r>
-              <a:rPr sz="1200">
+              <a:lnSpc>
+                <a:spcPct val="100000"/>
+              </a:lnSpc>
+              <a:spcBef>
+                <a:spcPts val="0"/>
+              </a:spcBef>
+              <a:spcAft>
+                <a:spcPts val="100"/>
+              </a:spcAft>
+            </a:pPr>
+            <a:r>
+              <a:rPr sz="950">
                 <a:solidFill>
                   <a:srgbClr val="1C1917"/>
                 </a:solidFill>
@@ -12002,12 +12014,18 @@
           </a:p>
           <a:p>
             <a:pPr lvl="1">
-              <a:spcBef>
-                <a:spcPts val="200"/>
-              </a:spcBef>
-            </a:pPr>
-            <a:r>
-              <a:rPr sz="1200">
+              <a:lnSpc>
+                <a:spcPct val="100000"/>
+              </a:lnSpc>
+              <a:spcBef>
+                <a:spcPts val="0"/>
+              </a:spcBef>
+              <a:spcAft>
+                <a:spcPts val="100"/>
+              </a:spcAft>
+            </a:pPr>
+            <a:r>
+              <a:rPr sz="950">
                 <a:solidFill>
                   <a:srgbClr val="1C1917"/>
                 </a:solidFill>
@@ -12018,12 +12036,18 @@
           </a:p>
           <a:p>
             <a:pPr lvl="1">
-              <a:spcBef>
-                <a:spcPts val="200"/>
-              </a:spcBef>
-            </a:pPr>
-            <a:r>
-              <a:rPr sz="1200">
+              <a:lnSpc>
+                <a:spcPct val="100000"/>
+              </a:lnSpc>
+              <a:spcBef>
+                <a:spcPts val="0"/>
+              </a:spcBef>
+              <a:spcAft>
+                <a:spcPts val="100"/>
+              </a:spcAft>
+            </a:pPr>
+            <a:r>
+              <a:rPr sz="950">
                 <a:solidFill>
                   <a:srgbClr val="1C1917"/>
                 </a:solidFill>
@@ -12034,12 +12058,18 @@
           </a:p>
           <a:p>
             <a:pPr lvl="1">
-              <a:spcBef>
-                <a:spcPts val="200"/>
-              </a:spcBef>
-            </a:pPr>
-            <a:r>
-              <a:rPr sz="1200">
+              <a:lnSpc>
+                <a:spcPct val="100000"/>
+              </a:lnSpc>
+              <a:spcBef>
+                <a:spcPts val="0"/>
+              </a:spcBef>
+              <a:spcAft>
+                <a:spcPts val="100"/>
+              </a:spcAft>
+            </a:pPr>
+            <a:r>
+              <a:rPr sz="950">
                 <a:solidFill>
                   <a:srgbClr val="1C1917"/>
                 </a:solidFill>
@@ -12050,35 +12080,53 @@
           </a:p>
           <a:p>
             <a:pPr>
-              <a:spcBef>
-                <a:spcPts val="400"/>
-              </a:spcBef>
+              <a:lnSpc>
+                <a:spcPct val="100000"/>
+              </a:lnSpc>
+              <a:spcBef>
+                <a:spcPts val="0"/>
+              </a:spcBef>
+              <a:spcAft>
+                <a:spcPts val="100"/>
+              </a:spcAft>
             </a:pPr>
           </a:p>
           <a:p>
             <a:pPr>
-              <a:spcBef>
-                <a:spcPts val="800"/>
-              </a:spcBef>
-            </a:pPr>
-            <a:r>
-              <a:rPr sz="1400" b="1">
+              <a:lnSpc>
+                <a:spcPct val="100000"/>
+              </a:lnSpc>
+              <a:spcBef>
+                <a:spcPts val="0"/>
+              </a:spcBef>
+              <a:spcAft>
+                <a:spcPts val="100"/>
+              </a:spcAft>
+            </a:pPr>
+            <a:r>
+              <a:rPr sz="1100" b="1">
                 <a:solidFill>
                   <a:srgbClr val="DA291C"/>
                 </a:solidFill>
                 <a:latin typeface="Calibri"/>
               </a:rPr>
-              <a:t>The 11 workflows</a:t>
-            </a:r>
-          </a:p>
-          <a:p>
-            <a:pPr lvl="1">
-              <a:spcBef>
-                <a:spcPts val="200"/>
-              </a:spcBef>
-            </a:pPr>
-            <a:r>
-              <a:rPr sz="1200">
+              <a:t>The 17 workflows</a:t>
+            </a:r>
+          </a:p>
+          <a:p>
+            <a:pPr lvl="1">
+              <a:lnSpc>
+                <a:spcPct val="100000"/>
+              </a:lnSpc>
+              <a:spcBef>
+                <a:spcPts val="0"/>
+              </a:spcBef>
+              <a:spcAft>
+                <a:spcPts val="100"/>
+              </a:spcAft>
+            </a:pPr>
+            <a:r>
+              <a:rPr sz="950">
                 <a:solidFill>
                   <a:srgbClr val="1C1917"/>
                 </a:solidFill>
@@ -12089,12 +12137,18 @@
           </a:p>
           <a:p>
             <a:pPr lvl="1">
-              <a:spcBef>
-                <a:spcPts val="200"/>
-              </a:spcBef>
-            </a:pPr>
-            <a:r>
-              <a:rPr sz="1200">
+              <a:lnSpc>
+                <a:spcPct val="100000"/>
+              </a:lnSpc>
+              <a:spcBef>
+                <a:spcPts val="0"/>
+              </a:spcBef>
+              <a:spcAft>
+                <a:spcPts val="100"/>
+              </a:spcAft>
+            </a:pPr>
+            <a:r>
+              <a:rPr sz="950">
                 <a:solidFill>
                   <a:srgbClr val="1C1917"/>
                 </a:solidFill>
@@ -12105,12 +12159,18 @@
           </a:p>
           <a:p>
             <a:pPr lvl="1">
-              <a:spcBef>
-                <a:spcPts val="200"/>
-              </a:spcBef>
-            </a:pPr>
-            <a:r>
-              <a:rPr sz="1200">
+              <a:lnSpc>
+                <a:spcPct val="100000"/>
+              </a:lnSpc>
+              <a:spcBef>
+                <a:spcPts val="0"/>
+              </a:spcBef>
+              <a:spcAft>
+                <a:spcPts val="100"/>
+              </a:spcAft>
+            </a:pPr>
+            <a:r>
+              <a:rPr sz="950">
                 <a:solidFill>
                   <a:srgbClr val="1C1917"/>
                 </a:solidFill>
@@ -12121,12 +12181,18 @@
           </a:p>
           <a:p>
             <a:pPr lvl="1">
-              <a:spcBef>
-                <a:spcPts val="200"/>
-              </a:spcBef>
-            </a:pPr>
-            <a:r>
-              <a:rPr sz="1200">
+              <a:lnSpc>
+                <a:spcPct val="100000"/>
+              </a:lnSpc>
+              <a:spcBef>
+                <a:spcPts val="0"/>
+              </a:spcBef>
+              <a:spcAft>
+                <a:spcPts val="100"/>
+              </a:spcAft>
+            </a:pPr>
+            <a:r>
+              <a:rPr sz="950">
                 <a:solidFill>
                   <a:srgbClr val="1C1917"/>
                 </a:solidFill>
@@ -12137,12 +12203,18 @@
           </a:p>
           <a:p>
             <a:pPr lvl="1">
-              <a:spcBef>
-                <a:spcPts val="200"/>
-              </a:spcBef>
-            </a:pPr>
-            <a:r>
-              <a:rPr sz="1200">
+              <a:lnSpc>
+                <a:spcPct val="100000"/>
+              </a:lnSpc>
+              <a:spcBef>
+                <a:spcPts val="0"/>
+              </a:spcBef>
+              <a:spcAft>
+                <a:spcPts val="100"/>
+              </a:spcAft>
+            </a:pPr>
+            <a:r>
+              <a:rPr sz="950">
                 <a:solidFill>
                   <a:srgbClr val="1C1917"/>
                 </a:solidFill>
@@ -12153,12 +12225,18 @@
           </a:p>
           <a:p>
             <a:pPr lvl="1">
-              <a:spcBef>
-                <a:spcPts val="200"/>
-              </a:spcBef>
-            </a:pPr>
-            <a:r>
-              <a:rPr sz="1200">
+              <a:lnSpc>
+                <a:spcPct val="100000"/>
+              </a:lnSpc>
+              <a:spcBef>
+                <a:spcPts val="0"/>
+              </a:spcBef>
+              <a:spcAft>
+                <a:spcPts val="100"/>
+              </a:spcAft>
+            </a:pPr>
+            <a:r>
+              <a:rPr sz="950">
                 <a:solidFill>
                   <a:srgbClr val="1C1917"/>
                 </a:solidFill>
@@ -12169,12 +12247,18 @@
           </a:p>
           <a:p>
             <a:pPr lvl="1">
-              <a:spcBef>
-                <a:spcPts val="200"/>
-              </a:spcBef>
-            </a:pPr>
-            <a:r>
-              <a:rPr sz="1200">
+              <a:lnSpc>
+                <a:spcPct val="100000"/>
+              </a:lnSpc>
+              <a:spcBef>
+                <a:spcPts val="0"/>
+              </a:spcBef>
+              <a:spcAft>
+                <a:spcPts val="100"/>
+              </a:spcAft>
+            </a:pPr>
+            <a:r>
+              <a:rPr sz="950">
                 <a:solidFill>
                   <a:srgbClr val="1C1917"/>
                 </a:solidFill>
@@ -12185,12 +12269,18 @@
           </a:p>
           <a:p>
             <a:pPr lvl="1">
-              <a:spcBef>
-                <a:spcPts val="200"/>
-              </a:spcBef>
-            </a:pPr>
-            <a:r>
-              <a:rPr sz="1200">
+              <a:lnSpc>
+                <a:spcPct val="100000"/>
+              </a:lnSpc>
+              <a:spcBef>
+                <a:spcPts val="0"/>
+              </a:spcBef>
+              <a:spcAft>
+                <a:spcPts val="100"/>
+              </a:spcAft>
+            </a:pPr>
+            <a:r>
+              <a:rPr sz="950">
                 <a:solidFill>
                   <a:srgbClr val="1C1917"/>
                 </a:solidFill>
@@ -12201,12 +12291,18 @@
           </a:p>
           <a:p>
             <a:pPr lvl="1">
-              <a:spcBef>
-                <a:spcPts val="200"/>
-              </a:spcBef>
-            </a:pPr>
-            <a:r>
-              <a:rPr sz="1200">
+              <a:lnSpc>
+                <a:spcPct val="100000"/>
+              </a:lnSpc>
+              <a:spcBef>
+                <a:spcPts val="0"/>
+              </a:spcBef>
+              <a:spcAft>
+                <a:spcPts val="100"/>
+              </a:spcAft>
+            </a:pPr>
+            <a:r>
+              <a:rPr sz="950">
                 <a:solidFill>
                   <a:srgbClr val="1C1917"/>
                 </a:solidFill>
@@ -12217,51 +12313,207 @@
           </a:p>
           <a:p>
             <a:pPr>
-              <a:spcBef>
-                <a:spcPts val="400"/>
-              </a:spcBef>
-            </a:pPr>
-            <a:r>
-              <a:rPr sz="1300" b="0">
-                <a:solidFill>
-                  <a:srgbClr val="1C1917"/>
-                </a:solidFill>
-                <a:latin typeface="Calibri"/>
-              </a:rPr>
-              <a:t>10.  ID register (KYB)      — KYC lists 1, 2 &amp; 3 per signatory · 4 steps</a:t>
+              <a:lnSpc>
+                <a:spcPct val="100000"/>
+              </a:lnSpc>
+              <a:spcBef>
+                <a:spcPts val="0"/>
+              </a:spcBef>
+              <a:spcAft>
+                <a:spcPts val="100"/>
+              </a:spcAft>
+            </a:pPr>
+            <a:r>
+              <a:rPr sz="1000" b="0">
+                <a:solidFill>
+                  <a:srgbClr val="1C1917"/>
+                </a:solidFill>
+                <a:latin typeface="Calibri"/>
+              </a:rPr>
+              <a:t>•  10.  ID register (KYB)      — KYC lists 1, 2 &amp; 3 per signatory · 4 steps</a:t>
             </a:r>
           </a:p>
           <a:p>
             <a:pPr>
-              <a:spcBef>
-                <a:spcPts val="400"/>
-              </a:spcBef>
-            </a:pPr>
-            <a:r>
-              <a:rPr sz="1300" b="0">
-                <a:solidFill>
-                  <a:srgbClr val="1C1917"/>
-                </a:solidFill>
-                <a:latin typeface="Calibri"/>
-              </a:rPr>
-              <a:t>11.  MTD VAT submission     — Transaction review, categorise, declare · 4 steps</a:t>
+              <a:lnSpc>
+                <a:spcPct val="100000"/>
+              </a:lnSpc>
+              <a:spcBef>
+                <a:spcPts val="0"/>
+              </a:spcBef>
+              <a:spcAft>
+                <a:spcPts val="100"/>
+              </a:spcAft>
+            </a:pPr>
+            <a:r>
+              <a:rPr sz="1000" b="0">
+                <a:solidFill>
+                  <a:srgbClr val="1C1917"/>
+                </a:solidFill>
+                <a:latin typeface="Calibri"/>
+              </a:rPr>
+              <a:t>•  11.  MTD VAT submission     — Transaction review, categorise, declare · 4 steps</a:t>
+            </a:r>
+          </a:p>
+          <a:p>
+            <a:pPr lvl="1">
+              <a:lnSpc>
+                <a:spcPct val="100000"/>
+              </a:lnSpc>
+              <a:spcBef>
+                <a:spcPts val="0"/>
+              </a:spcBef>
+              <a:spcAft>
+                <a:spcPts val="100"/>
+              </a:spcAft>
+            </a:pPr>
+            <a:r>
+              <a:rPr sz="950">
+                <a:solidFill>
+                  <a:srgbClr val="1C1917"/>
+                </a:solidFill>
+                <a:latin typeface="Calibri"/>
+              </a:rPr>
+              <a:t>•  12.  Complaint handling     — Intake, triage, denial, FOS · FCA DISP · 4 steps</a:t>
+            </a:r>
+          </a:p>
+          <a:p>
+            <a:pPr lvl="1">
+              <a:lnSpc>
+                <a:spcPct val="100000"/>
+              </a:lnSpc>
+              <a:spcBef>
+                <a:spcPts val="0"/>
+              </a:spcBef>
+              <a:spcAft>
+                <a:spcPts val="100"/>
+              </a:spcAft>
+            </a:pPr>
+            <a:r>
+              <a:rPr sz="950">
+                <a:solidFill>
+                  <a:srgbClr val="1C1917"/>
+                </a:solidFill>
+                <a:latin typeface="Calibri"/>
+              </a:rPr>
+              <a:t>•  13.  Standing orders &amp; DDs  — Set up / cancel · DD Guarantee · up to 3 steps</a:t>
+            </a:r>
+          </a:p>
+          <a:p>
+            <a:pPr lvl="1">
+              <a:lnSpc>
+                <a:spcPct val="100000"/>
+              </a:lnSpc>
+              <a:spcBef>
+                <a:spcPts val="0"/>
+              </a:spcBef>
+              <a:spcAft>
+                <a:spcPts val="100"/>
+              </a:spcAft>
+            </a:pPr>
+            <a:r>
+              <a:rPr sz="950">
+                <a:solidFill>
+                  <a:srgbClr val="1C1917"/>
+                </a:solidFill>
+                <a:latin typeface="Calibri"/>
+              </a:rPr>
+              <a:t>•  14.  Dispute a payment      — Chargeback / fraud / DD Guarantee · 4 steps</a:t>
+            </a:r>
+          </a:p>
+          <a:p>
+            <a:pPr lvl="1">
+              <a:lnSpc>
+                <a:spcPct val="100000"/>
+              </a:lnSpc>
+              <a:spcBef>
+                <a:spcPts val="0"/>
+              </a:spcBef>
+              <a:spcAft>
+                <a:spcPts val="100"/>
+              </a:spcAft>
+            </a:pPr>
+            <a:r>
+              <a:rPr sz="950">
+                <a:solidFill>
+                  <a:srgbClr val="1C1917"/>
+                </a:solidFill>
+                <a:latin typeface="Calibri"/>
+              </a:rPr>
+              <a:t>•  15.  Intl. beneficiary      — IBAN/SWIFT · sanctions screening · 4 steps</a:t>
+            </a:r>
+          </a:p>
+          <a:p>
+            <a:pPr lvl="1">
+              <a:lnSpc>
+                <a:spcPct val="100000"/>
+              </a:lnSpc>
+              <a:spcBef>
+                <a:spcPts val="0"/>
+              </a:spcBef>
+              <a:spcAft>
+                <a:spcPts val="100"/>
+              </a:spcAft>
+            </a:pPr>
+            <a:r>
+              <a:rPr sz="950">
+                <a:solidFill>
+                  <a:srgbClr val="1C1917"/>
+                </a:solidFill>
+                <a:latin typeface="Calibri"/>
+              </a:rPr>
+              <a:t>•  16.  Balance certificate    — Sealed proof of balance · 4 steps</a:t>
+            </a:r>
+          </a:p>
+          <a:p>
+            <a:pPr lvl="1">
+              <a:lnSpc>
+                <a:spcPct val="100000"/>
+              </a:lnSpc>
+              <a:spcBef>
+                <a:spcPts val="0"/>
+              </a:spcBef>
+              <a:spcAft>
+                <a:spcPts val="100"/>
+              </a:spcAft>
+            </a:pPr>
+            <a:r>
+              <a:rPr sz="950">
+                <a:solidFill>
+                  <a:srgbClr val="1C1917"/>
+                </a:solidFill>
+                <a:latin typeface="Calibri"/>
+              </a:rPr>
+              <a:t>•  17.  Devices &amp; sessions     — Review logins, sign out, SCA · 4 steps</a:t>
             </a:r>
           </a:p>
           <a:p>
             <a:pPr>
-              <a:spcBef>
-                <a:spcPts val="400"/>
-              </a:spcBef>
+              <a:lnSpc>
+                <a:spcPct val="100000"/>
+              </a:lnSpc>
+              <a:spcBef>
+                <a:spcPts val="0"/>
+              </a:spcBef>
+              <a:spcAft>
+                <a:spcPts val="100"/>
+              </a:spcAft>
             </a:pPr>
           </a:p>
           <a:p>
             <a:pPr>
-              <a:spcBef>
-                <a:spcPts val="800"/>
-              </a:spcBef>
-            </a:pPr>
-            <a:r>
-              <a:rPr sz="1400" b="1">
+              <a:lnSpc>
+                <a:spcPct val="100000"/>
+              </a:lnSpc>
+              <a:spcBef>
+                <a:spcPts val="0"/>
+              </a:spcBef>
+              <a:spcAft>
+                <a:spcPts val="100"/>
+              </a:spcAft>
+            </a:pPr>
+            <a:r>
+              <a:rPr sz="1100" b="1">
                 <a:solidFill>
                   <a:srgbClr val="DA291C"/>
                 </a:solidFill>
@@ -12272,12 +12524,18 @@
           </a:p>
           <a:p>
             <a:pPr lvl="1">
-              <a:spcBef>
-                <a:spcPts val="200"/>
-              </a:spcBef>
-            </a:pPr>
-            <a:r>
-              <a:rPr sz="1200">
+              <a:lnSpc>
+                <a:spcPct val="100000"/>
+              </a:lnSpc>
+              <a:spcBef>
+                <a:spcPts val="0"/>
+              </a:spcBef>
+              <a:spcAft>
+                <a:spcPts val="100"/>
+              </a:spcAft>
+            </a:pPr>
+            <a:r>
+              <a:rPr sz="950">
                 <a:solidFill>
                   <a:srgbClr val="1C1917"/>
                 </a:solidFill>
@@ -12288,12 +12546,18 @@
           </a:p>
           <a:p>
             <a:pPr lvl="1">
-              <a:spcBef>
-                <a:spcPts val="200"/>
-              </a:spcBef>
-            </a:pPr>
-            <a:r>
-              <a:rPr sz="1200">
+              <a:lnSpc>
+                <a:spcPct val="100000"/>
+              </a:lnSpc>
+              <a:spcBef>
+                <a:spcPts val="0"/>
+              </a:spcBef>
+              <a:spcAft>
+                <a:spcPts val="100"/>
+              </a:spcAft>
+            </a:pPr>
+            <a:r>
+              <a:rPr sz="950">
                 <a:solidFill>
                   <a:srgbClr val="1C1917"/>
                 </a:solidFill>
@@ -18140,7 +18404,7 @@
                 </a:solidFill>
                 <a:latin typeface="Calibri"/>
               </a:rPr>
-              <a:t>• Built in React (single App.jsx, ~5,700 lines) and deployed on GitHub Pages.</a:t>
+              <a:t>• Built in React (single App.jsx, ~7,400 lines) and deployed on GitHub Pages.</a:t>
             </a:r>
           </a:p>
           <a:p>

--- a/Santander_LimitedCompany_Walkthrough.pptx
+++ b/Santander_LimitedCompany_Walkthrough.pptx
@@ -5180,7 +5180,7 @@
                 </a:solidFill>
                 <a:latin typeface="Calibri"/>
               </a:rPr>
-              <a:t>•  — Large serif headline (Fraunces typeface): 'Good morning, James.' (or Treasurer</a:t>
+              <a:t>•  — Large display headline (Santander Text typeface): 'Good morning, James.' (or Treasurer</a:t>
             </a:r>
           </a:p>
           <a:p>

--- a/Santander_LimitedCompany_Walkthrough.pptx
+++ b/Santander_LimitedCompany_Walkthrough.pptx
@@ -3596,7 +3596,7 @@
             <a:avLst/>
           </a:prstGeom>
           <a:solidFill>
-            <a:srgbClr val="DA291C"/>
+            <a:srgbClr val="EC0000"/>
           </a:solidFill>
           <a:ln>
             <a:noFill/>
@@ -3639,7 +3639,7 @@
             <a:avLst/>
           </a:prstGeom>
           <a:solidFill>
-            <a:srgbClr val="DA291C"/>
+            <a:srgbClr val="EC0000"/>
           </a:solidFill>
           <a:ln>
             <a:noFill/>
@@ -3682,7 +3682,7 @@
             <a:avLst/>
           </a:prstGeom>
           <a:solidFill>
-            <a:srgbClr val="DA291C"/>
+            <a:srgbClr val="EC0000"/>
           </a:solidFill>
           <a:ln>
             <a:noFill/>
@@ -3807,7 +3807,7 @@
             <a:r>
               <a:rPr sz="1800" b="1" i="0">
                 <a:solidFill>
-                  <a:srgbClr val="DA291C"/>
+                  <a:srgbClr val="EC0000"/>
                 </a:solidFill>
                 <a:latin typeface="Calibri"/>
               </a:rPr>
@@ -3986,7 +3986,7 @@
             <a:avLst/>
           </a:prstGeom>
           <a:solidFill>
-            <a:srgbClr val="DA291C"/>
+            <a:srgbClr val="EC0000"/>
           </a:solidFill>
           <a:ln>
             <a:noFill/>
@@ -4029,7 +4029,7 @@
             <a:avLst/>
           </a:prstGeom>
           <a:solidFill>
-            <a:srgbClr val="DA291C"/>
+            <a:srgbClr val="EC0000"/>
           </a:solidFill>
           <a:ln>
             <a:noFill/>
@@ -4083,7 +4083,7 @@
             <a:r>
               <a:rPr sz="1100" b="1" i="0">
                 <a:solidFill>
-                  <a:srgbClr val="DA291C"/>
+                  <a:srgbClr val="EC0000"/>
                 </a:solidFill>
                 <a:latin typeface="Calibri"/>
               </a:rPr>
@@ -4196,7 +4196,7 @@
             <a:avLst/>
           </a:prstGeom>
           <a:solidFill>
-            <a:srgbClr val="FAF6EF"/>
+            <a:srgbClr val="FBF1EA"/>
           </a:solidFill>
           <a:ln>
             <a:noFill/>
@@ -4239,7 +4239,7 @@
             <a:avLst/>
           </a:prstGeom>
           <a:solidFill>
-            <a:srgbClr val="DA291C"/>
+            <a:srgbClr val="EC0000"/>
           </a:solidFill>
           <a:ln>
             <a:noFill/>
@@ -4395,7 +4395,7 @@
             <a:avLst/>
           </a:prstGeom>
           <a:solidFill>
-            <a:srgbClr val="DA291C"/>
+            <a:srgbClr val="EC0000"/>
           </a:solidFill>
           <a:ln>
             <a:noFill/>
@@ -4492,7 +4492,7 @@
             <a:r>
               <a:rPr sz="1400" b="1">
                 <a:solidFill>
-                  <a:srgbClr val="DA291C"/>
+                  <a:srgbClr val="EC0000"/>
                 </a:solidFill>
                 <a:latin typeface="Calibri"/>
               </a:rPr>
@@ -4887,7 +4887,7 @@
             <a:avLst/>
           </a:prstGeom>
           <a:solidFill>
-            <a:srgbClr val="FAF6EF"/>
+            <a:srgbClr val="FBF1EA"/>
           </a:solidFill>
           <a:ln>
             <a:noFill/>
@@ -4930,7 +4930,7 @@
             <a:avLst/>
           </a:prstGeom>
           <a:solidFill>
-            <a:srgbClr val="DA291C"/>
+            <a:srgbClr val="EC0000"/>
           </a:solidFill>
           <a:ln>
             <a:noFill/>
@@ -5086,7 +5086,7 @@
             <a:avLst/>
           </a:prstGeom>
           <a:solidFill>
-            <a:srgbClr val="DA291C"/>
+            <a:srgbClr val="EC0000"/>
           </a:solidFill>
           <a:ln>
             <a:noFill/>
@@ -5144,7 +5144,7 @@
             <a:r>
               <a:rPr sz="1400" b="1">
                 <a:solidFill>
-                  <a:srgbClr val="DA291C"/>
+                  <a:srgbClr val="EC0000"/>
                 </a:solidFill>
                 <a:latin typeface="Calibri"/>
               </a:rPr>
@@ -5247,7 +5247,7 @@
             <a:r>
               <a:rPr sz="1400" b="1">
                 <a:solidFill>
-                  <a:srgbClr val="DA291C"/>
+                  <a:srgbClr val="EC0000"/>
                 </a:solidFill>
                 <a:latin typeface="Calibri"/>
               </a:rPr>
@@ -5530,7 +5530,7 @@
             <a:avLst/>
           </a:prstGeom>
           <a:solidFill>
-            <a:srgbClr val="FAF6EF"/>
+            <a:srgbClr val="FBF1EA"/>
           </a:solidFill>
           <a:ln>
             <a:noFill/>
@@ -5573,7 +5573,7 @@
             <a:avLst/>
           </a:prstGeom>
           <a:solidFill>
-            <a:srgbClr val="DA291C"/>
+            <a:srgbClr val="EC0000"/>
           </a:solidFill>
           <a:ln>
             <a:noFill/>
@@ -5729,7 +5729,7 @@
             <a:avLst/>
           </a:prstGeom>
           <a:solidFill>
-            <a:srgbClr val="DA291C"/>
+            <a:srgbClr val="EC0000"/>
           </a:solidFill>
           <a:ln>
             <a:noFill/>
@@ -5826,7 +5826,7 @@
             <a:r>
               <a:rPr sz="1400" b="1">
                 <a:solidFill>
-                  <a:srgbClr val="DA291C"/>
+                  <a:srgbClr val="EC0000"/>
                 </a:solidFill>
                 <a:latin typeface="Calibri"/>
               </a:rPr>
@@ -5897,7 +5897,7 @@
             <a:r>
               <a:rPr sz="1400" b="1">
                 <a:solidFill>
-                  <a:srgbClr val="DA291C"/>
+                  <a:srgbClr val="EC0000"/>
                 </a:solidFill>
                 <a:latin typeface="Calibri"/>
               </a:rPr>
@@ -5968,7 +5968,7 @@
             <a:r>
               <a:rPr sz="1400" b="1">
                 <a:solidFill>
-                  <a:srgbClr val="DA291C"/>
+                  <a:srgbClr val="EC0000"/>
                 </a:solidFill>
                 <a:latin typeface="Calibri"/>
               </a:rPr>
@@ -6039,7 +6039,7 @@
             <a:r>
               <a:rPr sz="1400" b="1">
                 <a:solidFill>
-                  <a:srgbClr val="DA291C"/>
+                  <a:srgbClr val="EC0000"/>
                 </a:solidFill>
                 <a:latin typeface="Calibri"/>
               </a:rPr>
@@ -6242,7 +6242,7 @@
             <a:avLst/>
           </a:prstGeom>
           <a:solidFill>
-            <a:srgbClr val="FAF6EF"/>
+            <a:srgbClr val="FBF1EA"/>
           </a:solidFill>
           <a:ln>
             <a:noFill/>
@@ -6285,7 +6285,7 @@
             <a:avLst/>
           </a:prstGeom>
           <a:solidFill>
-            <a:srgbClr val="DA291C"/>
+            <a:srgbClr val="EC0000"/>
           </a:solidFill>
           <a:ln>
             <a:noFill/>
@@ -6441,7 +6441,7 @@
             <a:avLst/>
           </a:prstGeom>
           <a:solidFill>
-            <a:srgbClr val="DA291C"/>
+            <a:srgbClr val="EC0000"/>
           </a:solidFill>
           <a:ln>
             <a:noFill/>
@@ -6499,7 +6499,7 @@
             <a:r>
               <a:rPr sz="1400" b="1">
                 <a:solidFill>
-                  <a:srgbClr val="DA291C"/>
+                  <a:srgbClr val="EC0000"/>
                 </a:solidFill>
                 <a:latin typeface="Calibri"/>
               </a:rPr>
@@ -6602,7 +6602,7 @@
             <a:r>
               <a:rPr sz="1400" b="1">
                 <a:solidFill>
-                  <a:srgbClr val="DA291C"/>
+                  <a:srgbClr val="EC0000"/>
                 </a:solidFill>
                 <a:latin typeface="Calibri"/>
               </a:rPr>
@@ -6689,7 +6689,7 @@
             <a:r>
               <a:rPr sz="1400" b="1">
                 <a:solidFill>
-                  <a:srgbClr val="DA291C"/>
+                  <a:srgbClr val="EC0000"/>
                 </a:solidFill>
                 <a:latin typeface="Calibri"/>
               </a:rPr>
@@ -6760,7 +6760,7 @@
             <a:r>
               <a:rPr sz="1400" b="1">
                 <a:solidFill>
-                  <a:srgbClr val="DA291C"/>
+                  <a:srgbClr val="EC0000"/>
                 </a:solidFill>
                 <a:latin typeface="Calibri"/>
               </a:rPr>
@@ -6963,7 +6963,7 @@
             <a:avLst/>
           </a:prstGeom>
           <a:solidFill>
-            <a:srgbClr val="FAF6EF"/>
+            <a:srgbClr val="FBF1EA"/>
           </a:solidFill>
           <a:ln>
             <a:noFill/>
@@ -7006,7 +7006,7 @@
             <a:avLst/>
           </a:prstGeom>
           <a:solidFill>
-            <a:srgbClr val="DA291C"/>
+            <a:srgbClr val="EC0000"/>
           </a:solidFill>
           <a:ln>
             <a:noFill/>
@@ -7162,7 +7162,7 @@
             <a:avLst/>
           </a:prstGeom>
           <a:solidFill>
-            <a:srgbClr val="DA291C"/>
+            <a:srgbClr val="EC0000"/>
           </a:solidFill>
           <a:ln>
             <a:noFill/>
@@ -7220,7 +7220,7 @@
             <a:r>
               <a:rPr sz="1400" b="1">
                 <a:solidFill>
-                  <a:srgbClr val="DA291C"/>
+                  <a:srgbClr val="EC0000"/>
                 </a:solidFill>
                 <a:latin typeface="Calibri"/>
               </a:rPr>
@@ -7307,7 +7307,7 @@
             <a:r>
               <a:rPr sz="1400" b="1">
                 <a:solidFill>
-                  <a:srgbClr val="DA291C"/>
+                  <a:srgbClr val="EC0000"/>
                 </a:solidFill>
                 <a:latin typeface="Calibri"/>
               </a:rPr>
@@ -7442,7 +7442,7 @@
             <a:r>
               <a:rPr sz="1400" b="1">
                 <a:solidFill>
-                  <a:srgbClr val="DA291C"/>
+                  <a:srgbClr val="EC0000"/>
                 </a:solidFill>
                 <a:latin typeface="Calibri"/>
               </a:rPr>
@@ -7661,7 +7661,7 @@
             <a:avLst/>
           </a:prstGeom>
           <a:solidFill>
-            <a:srgbClr val="FAF6EF"/>
+            <a:srgbClr val="FBF1EA"/>
           </a:solidFill>
           <a:ln>
             <a:noFill/>
@@ -7704,7 +7704,7 @@
             <a:avLst/>
           </a:prstGeom>
           <a:solidFill>
-            <a:srgbClr val="DA291C"/>
+            <a:srgbClr val="EC0000"/>
           </a:solidFill>
           <a:ln>
             <a:noFill/>
@@ -7860,7 +7860,7 @@
             <a:avLst/>
           </a:prstGeom>
           <a:solidFill>
-            <a:srgbClr val="DA291C"/>
+            <a:srgbClr val="EC0000"/>
           </a:solidFill>
           <a:ln>
             <a:noFill/>
@@ -7918,7 +7918,7 @@
             <a:r>
               <a:rPr sz="1400" b="1">
                 <a:solidFill>
-                  <a:srgbClr val="DA291C"/>
+                  <a:srgbClr val="EC0000"/>
                 </a:solidFill>
                 <a:latin typeface="Calibri"/>
               </a:rPr>
@@ -7989,7 +7989,7 @@
             <a:r>
               <a:rPr sz="1400" b="1">
                 <a:solidFill>
-                  <a:srgbClr val="DA291C"/>
+                  <a:srgbClr val="EC0000"/>
                 </a:solidFill>
                 <a:latin typeface="Calibri"/>
               </a:rPr>
@@ -8092,7 +8092,7 @@
             <a:r>
               <a:rPr sz="1400" b="1">
                 <a:solidFill>
-                  <a:srgbClr val="DA291C"/>
+                  <a:srgbClr val="EC0000"/>
                 </a:solidFill>
                 <a:latin typeface="Calibri"/>
               </a:rPr>
@@ -8195,7 +8195,7 @@
             <a:r>
               <a:rPr sz="1400" b="1">
                 <a:solidFill>
-                  <a:srgbClr val="DA291C"/>
+                  <a:srgbClr val="EC0000"/>
                 </a:solidFill>
                 <a:latin typeface="Calibri"/>
               </a:rPr>
@@ -8366,7 +8366,7 @@
             <a:avLst/>
           </a:prstGeom>
           <a:solidFill>
-            <a:srgbClr val="FAF6EF"/>
+            <a:srgbClr val="FBF1EA"/>
           </a:solidFill>
           <a:ln>
             <a:noFill/>
@@ -8409,7 +8409,7 @@
             <a:avLst/>
           </a:prstGeom>
           <a:solidFill>
-            <a:srgbClr val="DA291C"/>
+            <a:srgbClr val="EC0000"/>
           </a:solidFill>
           <a:ln>
             <a:noFill/>
@@ -8565,7 +8565,7 @@
             <a:avLst/>
           </a:prstGeom>
           <a:solidFill>
-            <a:srgbClr val="DA291C"/>
+            <a:srgbClr val="EC0000"/>
           </a:solidFill>
           <a:ln>
             <a:noFill/>
@@ -8623,7 +8623,7 @@
             <a:r>
               <a:rPr sz="1400" b="1">
                 <a:solidFill>
-                  <a:srgbClr val="DA291C"/>
+                  <a:srgbClr val="EC0000"/>
                 </a:solidFill>
                 <a:latin typeface="Calibri"/>
               </a:rPr>
@@ -8726,7 +8726,7 @@
             <a:r>
               <a:rPr sz="1400" b="1">
                 <a:solidFill>
-                  <a:srgbClr val="DA291C"/>
+                  <a:srgbClr val="EC0000"/>
                 </a:solidFill>
                 <a:latin typeface="Calibri"/>
               </a:rPr>
@@ -8845,7 +8845,7 @@
             <a:r>
               <a:rPr sz="1400" b="1">
                 <a:solidFill>
-                  <a:srgbClr val="DA291C"/>
+                  <a:srgbClr val="EC0000"/>
                 </a:solidFill>
                 <a:latin typeface="Calibri"/>
               </a:rPr>
@@ -9048,7 +9048,7 @@
             <a:avLst/>
           </a:prstGeom>
           <a:solidFill>
-            <a:srgbClr val="FAF6EF"/>
+            <a:srgbClr val="FBF1EA"/>
           </a:solidFill>
           <a:ln>
             <a:noFill/>
@@ -9091,7 +9091,7 @@
             <a:avLst/>
           </a:prstGeom>
           <a:solidFill>
-            <a:srgbClr val="DA291C"/>
+            <a:srgbClr val="EC0000"/>
           </a:solidFill>
           <a:ln>
             <a:noFill/>
@@ -9247,7 +9247,7 @@
             <a:avLst/>
           </a:prstGeom>
           <a:solidFill>
-            <a:srgbClr val="DA291C"/>
+            <a:srgbClr val="EC0000"/>
           </a:solidFill>
           <a:ln>
             <a:noFill/>
@@ -9305,7 +9305,7 @@
             <a:r>
               <a:rPr sz="1400" b="1">
                 <a:solidFill>
-                  <a:srgbClr val="DA291C"/>
+                  <a:srgbClr val="EC0000"/>
                 </a:solidFill>
                 <a:latin typeface="Calibri"/>
               </a:rPr>
@@ -9408,7 +9408,7 @@
             <a:r>
               <a:rPr sz="1400" b="1">
                 <a:solidFill>
-                  <a:srgbClr val="DA291C"/>
+                  <a:srgbClr val="EC0000"/>
                 </a:solidFill>
                 <a:latin typeface="Calibri"/>
               </a:rPr>
@@ -9755,7 +9755,7 @@
             <a:avLst/>
           </a:prstGeom>
           <a:solidFill>
-            <a:srgbClr val="FAF6EF"/>
+            <a:srgbClr val="FBF1EA"/>
           </a:solidFill>
           <a:ln>
             <a:noFill/>
@@ -9798,7 +9798,7 @@
             <a:avLst/>
           </a:prstGeom>
           <a:solidFill>
-            <a:srgbClr val="DA291C"/>
+            <a:srgbClr val="EC0000"/>
           </a:solidFill>
           <a:ln>
             <a:noFill/>
@@ -9954,7 +9954,7 @@
             <a:avLst/>
           </a:prstGeom>
           <a:solidFill>
-            <a:srgbClr val="DA291C"/>
+            <a:srgbClr val="EC0000"/>
           </a:solidFill>
           <a:ln>
             <a:noFill/>
@@ -10012,7 +10012,7 @@
             <a:r>
               <a:rPr sz="1400" b="1">
                 <a:solidFill>
-                  <a:srgbClr val="DA291C"/>
+                  <a:srgbClr val="EC0000"/>
                 </a:solidFill>
                 <a:latin typeface="Calibri"/>
               </a:rPr>
@@ -10099,7 +10099,7 @@
             <a:r>
               <a:rPr sz="1400" b="1">
                 <a:solidFill>
-                  <a:srgbClr val="DA291C"/>
+                  <a:srgbClr val="EC0000"/>
                 </a:solidFill>
                 <a:latin typeface="Calibri"/>
               </a:rPr>
@@ -10186,7 +10186,7 @@
             <a:r>
               <a:rPr sz="1400" b="1">
                 <a:solidFill>
-                  <a:srgbClr val="DA291C"/>
+                  <a:srgbClr val="EC0000"/>
                 </a:solidFill>
                 <a:latin typeface="Calibri"/>
               </a:rPr>
@@ -10273,7 +10273,7 @@
             <a:r>
               <a:rPr sz="1400" b="1">
                 <a:solidFill>
-                  <a:srgbClr val="DA291C"/>
+                  <a:srgbClr val="EC0000"/>
                 </a:solidFill>
                 <a:latin typeface="Calibri"/>
               </a:rPr>
@@ -10519,7 +10519,7 @@
             <a:avLst/>
           </a:prstGeom>
           <a:solidFill>
-            <a:srgbClr val="DA291C"/>
+            <a:srgbClr val="EC0000"/>
           </a:solidFill>
           <a:ln>
             <a:noFill/>
@@ -10562,7 +10562,7 @@
             <a:avLst/>
           </a:prstGeom>
           <a:solidFill>
-            <a:srgbClr val="DA291C"/>
+            <a:srgbClr val="EC0000"/>
           </a:solidFill>
           <a:ln>
             <a:noFill/>
@@ -10616,7 +10616,7 @@
             <a:r>
               <a:rPr sz="1100" b="1" i="0">
                 <a:solidFill>
-                  <a:srgbClr val="DA291C"/>
+                  <a:srgbClr val="EC0000"/>
                 </a:solidFill>
                 <a:latin typeface="Calibri"/>
               </a:rPr>
@@ -10728,7 +10728,7 @@
             <a:avLst/>
           </a:prstGeom>
           <a:solidFill>
-            <a:srgbClr val="FAF6EF"/>
+            <a:srgbClr val="FBF1EA"/>
           </a:solidFill>
           <a:ln>
             <a:noFill/>
@@ -10771,7 +10771,7 @@
             <a:avLst/>
           </a:prstGeom>
           <a:solidFill>
-            <a:srgbClr val="DA291C"/>
+            <a:srgbClr val="EC0000"/>
           </a:solidFill>
           <a:ln>
             <a:noFill/>
@@ -10927,7 +10927,7 @@
             <a:avLst/>
           </a:prstGeom>
           <a:solidFill>
-            <a:srgbClr val="DA291C"/>
+            <a:srgbClr val="EC0000"/>
           </a:solidFill>
           <a:ln>
             <a:noFill/>
@@ -10985,7 +10985,7 @@
             <a:r>
               <a:rPr sz="1400" b="1">
                 <a:solidFill>
-                  <a:srgbClr val="DA291C"/>
+                  <a:srgbClr val="EC0000"/>
                 </a:solidFill>
                 <a:latin typeface="Calibri"/>
               </a:rPr>
@@ -11168,7 +11168,7 @@
             <a:r>
               <a:rPr sz="1400" b="1">
                 <a:solidFill>
-                  <a:srgbClr val="DA291C"/>
+                  <a:srgbClr val="EC0000"/>
                 </a:solidFill>
                 <a:latin typeface="Calibri"/>
               </a:rPr>
@@ -11510,7 +11510,7 @@
             <a:avLst/>
           </a:prstGeom>
           <a:solidFill>
-            <a:srgbClr val="DA291C"/>
+            <a:srgbClr val="EC0000"/>
           </a:solidFill>
           <a:ln>
             <a:noFill/>
@@ -11553,7 +11553,7 @@
             <a:avLst/>
           </a:prstGeom>
           <a:solidFill>
-            <a:srgbClr val="DA291C"/>
+            <a:srgbClr val="EC0000"/>
           </a:solidFill>
           <a:ln>
             <a:noFill/>
@@ -11607,7 +11607,7 @@
             <a:r>
               <a:rPr sz="1100" b="1" i="0">
                 <a:solidFill>
-                  <a:srgbClr val="DA291C"/>
+                  <a:srgbClr val="EC0000"/>
                 </a:solidFill>
                 <a:latin typeface="Calibri"/>
               </a:rPr>
@@ -11720,7 +11720,7 @@
             <a:avLst/>
           </a:prstGeom>
           <a:solidFill>
-            <a:srgbClr val="FAF6EF"/>
+            <a:srgbClr val="FBF1EA"/>
           </a:solidFill>
           <a:ln>
             <a:noFill/>
@@ -11763,7 +11763,7 @@
             <a:avLst/>
           </a:prstGeom>
           <a:solidFill>
-            <a:srgbClr val="DA291C"/>
+            <a:srgbClr val="EC0000"/>
           </a:solidFill>
           <a:ln>
             <a:noFill/>
@@ -11919,7 +11919,7 @@
             <a:avLst/>
           </a:prstGeom>
           <a:solidFill>
-            <a:srgbClr val="DA291C"/>
+            <a:srgbClr val="EC0000"/>
           </a:solidFill>
           <a:ln>
             <a:noFill/>
@@ -11983,7 +11983,7 @@
             <a:r>
               <a:rPr sz="1100" b="1">
                 <a:solidFill>
-                  <a:srgbClr val="DA291C"/>
+                  <a:srgbClr val="EC0000"/>
                 </a:solidFill>
                 <a:latin typeface="Calibri"/>
               </a:rPr>
@@ -12106,7 +12106,7 @@
             <a:r>
               <a:rPr sz="1100" b="1">
                 <a:solidFill>
-                  <a:srgbClr val="DA291C"/>
+                  <a:srgbClr val="EC0000"/>
                 </a:solidFill>
                 <a:latin typeface="Calibri"/>
               </a:rPr>
@@ -12515,7 +12515,7 @@
             <a:r>
               <a:rPr sz="1100" b="1">
                 <a:solidFill>
-                  <a:srgbClr val="DA291C"/>
+                  <a:srgbClr val="EC0000"/>
                 </a:solidFill>
                 <a:latin typeface="Calibri"/>
               </a:rPr>
@@ -12714,7 +12714,7 @@
             <a:avLst/>
           </a:prstGeom>
           <a:solidFill>
-            <a:srgbClr val="FAF6EF"/>
+            <a:srgbClr val="FBF1EA"/>
           </a:solidFill>
           <a:ln>
             <a:noFill/>
@@ -12757,7 +12757,7 @@
             <a:avLst/>
           </a:prstGeom>
           <a:solidFill>
-            <a:srgbClr val="DA291C"/>
+            <a:srgbClr val="EC0000"/>
           </a:solidFill>
           <a:ln>
             <a:noFill/>
@@ -12913,7 +12913,7 @@
             <a:avLst/>
           </a:prstGeom>
           <a:solidFill>
-            <a:srgbClr val="DA291C"/>
+            <a:srgbClr val="EC0000"/>
           </a:solidFill>
           <a:ln>
             <a:noFill/>
@@ -12971,7 +12971,7 @@
             <a:r>
               <a:rPr sz="1400" b="1">
                 <a:solidFill>
-                  <a:srgbClr val="DA291C"/>
+                  <a:srgbClr val="EC0000"/>
                 </a:solidFill>
                 <a:latin typeface="Calibri"/>
               </a:rPr>
@@ -13042,7 +13042,7 @@
             <a:r>
               <a:rPr sz="1400" b="1">
                 <a:solidFill>
-                  <a:srgbClr val="DA291C"/>
+                  <a:srgbClr val="EC0000"/>
                 </a:solidFill>
                 <a:latin typeface="Calibri"/>
               </a:rPr>
@@ -13129,7 +13129,7 @@
             <a:r>
               <a:rPr sz="1400" b="1">
                 <a:solidFill>
-                  <a:srgbClr val="DA291C"/>
+                  <a:srgbClr val="EC0000"/>
                 </a:solidFill>
                 <a:latin typeface="Calibri"/>
               </a:rPr>
@@ -13232,7 +13232,7 @@
             <a:r>
               <a:rPr sz="1400" b="1">
                 <a:solidFill>
-                  <a:srgbClr val="DA291C"/>
+                  <a:srgbClr val="EC0000"/>
                 </a:solidFill>
                 <a:latin typeface="Calibri"/>
               </a:rPr>
@@ -13303,7 +13303,7 @@
             <a:r>
               <a:rPr sz="1400" b="1">
                 <a:solidFill>
-                  <a:srgbClr val="DA291C"/>
+                  <a:srgbClr val="EC0000"/>
                 </a:solidFill>
                 <a:latin typeface="Calibri"/>
               </a:rPr>
@@ -13474,7 +13474,7 @@
             <a:avLst/>
           </a:prstGeom>
           <a:solidFill>
-            <a:srgbClr val="FAF6EF"/>
+            <a:srgbClr val="FBF1EA"/>
           </a:solidFill>
           <a:ln>
             <a:noFill/>
@@ -13517,7 +13517,7 @@
             <a:avLst/>
           </a:prstGeom>
           <a:solidFill>
-            <a:srgbClr val="DA291C"/>
+            <a:srgbClr val="EC0000"/>
           </a:solidFill>
           <a:ln>
             <a:noFill/>
@@ -13673,7 +13673,7 @@
             <a:avLst/>
           </a:prstGeom>
           <a:solidFill>
-            <a:srgbClr val="DA291C"/>
+            <a:srgbClr val="EC0000"/>
           </a:solidFill>
           <a:ln>
             <a:noFill/>
@@ -13731,7 +13731,7 @@
             <a:r>
               <a:rPr sz="1400" b="1">
                 <a:solidFill>
-                  <a:srgbClr val="DA291C"/>
+                  <a:srgbClr val="EC0000"/>
                 </a:solidFill>
                 <a:latin typeface="Calibri"/>
               </a:rPr>
@@ -14074,7 +14074,7 @@
             <a:r>
               <a:rPr sz="1400" b="1">
                 <a:solidFill>
-                  <a:srgbClr val="DA291C"/>
+                  <a:srgbClr val="EC0000"/>
                 </a:solidFill>
                 <a:latin typeface="Calibri"/>
               </a:rPr>
@@ -14545,7 +14545,7 @@
             <a:avLst/>
           </a:prstGeom>
           <a:solidFill>
-            <a:srgbClr val="FAF6EF"/>
+            <a:srgbClr val="FBF1EA"/>
           </a:solidFill>
           <a:ln>
             <a:noFill/>
@@ -14588,7 +14588,7 @@
             <a:avLst/>
           </a:prstGeom>
           <a:solidFill>
-            <a:srgbClr val="DA291C"/>
+            <a:srgbClr val="EC0000"/>
           </a:solidFill>
           <a:ln>
             <a:noFill/>
@@ -14744,7 +14744,7 @@
             <a:avLst/>
           </a:prstGeom>
           <a:solidFill>
-            <a:srgbClr val="DA291C"/>
+            <a:srgbClr val="EC0000"/>
           </a:solidFill>
           <a:ln>
             <a:noFill/>
@@ -14802,7 +14802,7 @@
             <a:r>
               <a:rPr sz="1400" b="1">
                 <a:solidFill>
-                  <a:srgbClr val="DA291C"/>
+                  <a:srgbClr val="EC0000"/>
                 </a:solidFill>
                 <a:latin typeface="Calibri"/>
               </a:rPr>
@@ -15168,7 +15168,7 @@
             <a:r>
               <a:rPr sz="1400" b="1">
                 <a:solidFill>
-                  <a:srgbClr val="DA291C"/>
+                  <a:srgbClr val="EC0000"/>
                 </a:solidFill>
                 <a:latin typeface="Calibri"/>
               </a:rPr>
@@ -15655,7 +15655,7 @@
             <a:avLst/>
           </a:prstGeom>
           <a:solidFill>
-            <a:srgbClr val="FAF6EF"/>
+            <a:srgbClr val="FBF1EA"/>
           </a:solidFill>
           <a:ln>
             <a:noFill/>
@@ -15698,7 +15698,7 @@
             <a:avLst/>
           </a:prstGeom>
           <a:solidFill>
-            <a:srgbClr val="DA291C"/>
+            <a:srgbClr val="EC0000"/>
           </a:solidFill>
           <a:ln>
             <a:noFill/>
@@ -15854,7 +15854,7 @@
             <a:avLst/>
           </a:prstGeom>
           <a:solidFill>
-            <a:srgbClr val="DA291C"/>
+            <a:srgbClr val="EC0000"/>
           </a:solidFill>
           <a:ln>
             <a:noFill/>
@@ -15912,7 +15912,7 @@
             <a:r>
               <a:rPr sz="1400" b="1">
                 <a:solidFill>
-                  <a:srgbClr val="DA291C"/>
+                  <a:srgbClr val="EC0000"/>
                 </a:solidFill>
                 <a:latin typeface="Calibri"/>
               </a:rPr>
@@ -16031,7 +16031,7 @@
             <a:r>
               <a:rPr sz="1400" b="1">
                 <a:solidFill>
-                  <a:srgbClr val="DA291C"/>
+                  <a:srgbClr val="EC0000"/>
                 </a:solidFill>
                 <a:latin typeface="Calibri"/>
               </a:rPr>
@@ -16134,7 +16134,7 @@
             <a:r>
               <a:rPr sz="1400" b="1">
                 <a:solidFill>
-                  <a:srgbClr val="DA291C"/>
+                  <a:srgbClr val="EC0000"/>
                 </a:solidFill>
                 <a:latin typeface="Calibri"/>
               </a:rPr>
@@ -16353,7 +16353,7 @@
             <a:avLst/>
           </a:prstGeom>
           <a:solidFill>
-            <a:srgbClr val="FAF6EF"/>
+            <a:srgbClr val="FBF1EA"/>
           </a:solidFill>
           <a:ln>
             <a:noFill/>
@@ -16396,7 +16396,7 @@
             <a:avLst/>
           </a:prstGeom>
           <a:solidFill>
-            <a:srgbClr val="DA291C"/>
+            <a:srgbClr val="EC0000"/>
           </a:solidFill>
           <a:ln>
             <a:noFill/>
@@ -16552,7 +16552,7 @@
             <a:avLst/>
           </a:prstGeom>
           <a:solidFill>
-            <a:srgbClr val="DA291C"/>
+            <a:srgbClr val="EC0000"/>
           </a:solidFill>
           <a:ln>
             <a:noFill/>
@@ -16610,7 +16610,7 @@
             <a:r>
               <a:rPr sz="1400" b="1">
                 <a:solidFill>
-                  <a:srgbClr val="DA291C"/>
+                  <a:srgbClr val="EC0000"/>
                 </a:solidFill>
                 <a:latin typeface="Calibri"/>
               </a:rPr>
@@ -16729,7 +16729,7 @@
             <a:r>
               <a:rPr sz="1400" b="1">
                 <a:solidFill>
-                  <a:srgbClr val="DA291C"/>
+                  <a:srgbClr val="EC0000"/>
                 </a:solidFill>
                 <a:latin typeface="Calibri"/>
               </a:rPr>
@@ -16880,7 +16880,7 @@
             <a:r>
               <a:rPr sz="1400" b="1">
                 <a:solidFill>
-                  <a:srgbClr val="DA291C"/>
+                  <a:srgbClr val="EC0000"/>
                 </a:solidFill>
                 <a:latin typeface="Calibri"/>
               </a:rPr>
@@ -17126,7 +17126,7 @@
             <a:avLst/>
           </a:prstGeom>
           <a:solidFill>
-            <a:srgbClr val="DA291C"/>
+            <a:srgbClr val="EC0000"/>
           </a:solidFill>
           <a:ln>
             <a:noFill/>
@@ -17169,7 +17169,7 @@
             <a:avLst/>
           </a:prstGeom>
           <a:solidFill>
-            <a:srgbClr val="DA291C"/>
+            <a:srgbClr val="EC0000"/>
           </a:solidFill>
           <a:ln>
             <a:noFill/>
@@ -17223,7 +17223,7 @@
             <a:r>
               <a:rPr sz="1100" b="1" i="0">
                 <a:solidFill>
-                  <a:srgbClr val="DA291C"/>
+                  <a:srgbClr val="EC0000"/>
                 </a:solidFill>
                 <a:latin typeface="Calibri"/>
               </a:rPr>
@@ -17335,7 +17335,7 @@
             <a:avLst/>
           </a:prstGeom>
           <a:solidFill>
-            <a:srgbClr val="FAF6EF"/>
+            <a:srgbClr val="FBF1EA"/>
           </a:solidFill>
           <a:ln>
             <a:noFill/>
@@ -17378,7 +17378,7 @@
             <a:avLst/>
           </a:prstGeom>
           <a:solidFill>
-            <a:srgbClr val="DA291C"/>
+            <a:srgbClr val="EC0000"/>
           </a:solidFill>
           <a:ln>
             <a:noFill/>
@@ -17534,7 +17534,7 @@
             <a:avLst/>
           </a:prstGeom>
           <a:solidFill>
-            <a:srgbClr val="DA291C"/>
+            <a:srgbClr val="EC0000"/>
           </a:solidFill>
           <a:ln>
             <a:noFill/>
@@ -17592,7 +17592,7 @@
             <a:r>
               <a:rPr sz="1400" b="1">
                 <a:solidFill>
-                  <a:srgbClr val="DA291C"/>
+                  <a:srgbClr val="EC0000"/>
                 </a:solidFill>
                 <a:latin typeface="Calibri"/>
               </a:rPr>
@@ -17679,7 +17679,7 @@
             <a:r>
               <a:rPr sz="1400" b="1">
                 <a:solidFill>
-                  <a:srgbClr val="DA291C"/>
+                  <a:srgbClr val="EC0000"/>
                 </a:solidFill>
                 <a:latin typeface="Calibri"/>
               </a:rPr>
@@ -17766,7 +17766,7 @@
             <a:r>
               <a:rPr sz="1400" b="1">
                 <a:solidFill>
-                  <a:srgbClr val="DA291C"/>
+                  <a:srgbClr val="EC0000"/>
                 </a:solidFill>
                 <a:latin typeface="Calibri"/>
               </a:rPr>
@@ -17853,7 +17853,7 @@
             <a:r>
               <a:rPr sz="1400" b="1">
                 <a:solidFill>
-                  <a:srgbClr val="DA291C"/>
+                  <a:srgbClr val="EC0000"/>
                 </a:solidFill>
                 <a:latin typeface="Calibri"/>
               </a:rPr>
@@ -17924,7 +17924,7 @@
             <a:r>
               <a:rPr sz="1400" b="1">
                 <a:solidFill>
-                  <a:srgbClr val="DA291C"/>
+                  <a:srgbClr val="EC0000"/>
                 </a:solidFill>
                 <a:latin typeface="Calibri"/>
               </a:rPr>
@@ -18111,7 +18111,7 @@
             <a:avLst/>
           </a:prstGeom>
           <a:solidFill>
-            <a:srgbClr val="FAF6EF"/>
+            <a:srgbClr val="FBF1EA"/>
           </a:solidFill>
           <a:ln>
             <a:noFill/>
@@ -18154,7 +18154,7 @@
             <a:avLst/>
           </a:prstGeom>
           <a:solidFill>
-            <a:srgbClr val="DA291C"/>
+            <a:srgbClr val="EC0000"/>
           </a:solidFill>
           <a:ln>
             <a:noFill/>
@@ -18310,7 +18310,7 @@
             <a:avLst/>
           </a:prstGeom>
           <a:solidFill>
-            <a:srgbClr val="DA291C"/>
+            <a:srgbClr val="EC0000"/>
           </a:solidFill>
           <a:ln>
             <a:noFill/>
@@ -18423,7 +18423,7 @@
             <a:r>
               <a:rPr sz="1400" b="1">
                 <a:solidFill>
-                  <a:srgbClr val="DA291C"/>
+                  <a:srgbClr val="EC0000"/>
                 </a:solidFill>
                 <a:latin typeface="Calibri"/>
               </a:rPr>
@@ -18494,7 +18494,7 @@
             <a:r>
               <a:rPr sz="1400" b="1">
                 <a:solidFill>
-                  <a:srgbClr val="DA291C"/>
+                  <a:srgbClr val="EC0000"/>
                 </a:solidFill>
                 <a:latin typeface="Calibri"/>
               </a:rPr>
@@ -18713,7 +18713,7 @@
             <a:avLst/>
           </a:prstGeom>
           <a:solidFill>
-            <a:srgbClr val="FAF6EF"/>
+            <a:srgbClr val="FBF1EA"/>
           </a:solidFill>
           <a:ln>
             <a:noFill/>
@@ -18756,7 +18756,7 @@
             <a:avLst/>
           </a:prstGeom>
           <a:solidFill>
-            <a:srgbClr val="DA291C"/>
+            <a:srgbClr val="EC0000"/>
           </a:solidFill>
           <a:ln>
             <a:noFill/>
@@ -18912,7 +18912,7 @@
             <a:avLst/>
           </a:prstGeom>
           <a:solidFill>
-            <a:srgbClr val="DA291C"/>
+            <a:srgbClr val="EC0000"/>
           </a:solidFill>
           <a:ln>
             <a:noFill/>
@@ -19009,7 +19009,7 @@
             <a:r>
               <a:rPr sz="1400" b="1">
                 <a:solidFill>
-                  <a:srgbClr val="DA291C"/>
+                  <a:srgbClr val="EC0000"/>
                 </a:solidFill>
                 <a:latin typeface="Calibri"/>
               </a:rPr>
@@ -19064,7 +19064,7 @@
             <a:r>
               <a:rPr sz="1400" b="1">
                 <a:solidFill>
-                  <a:srgbClr val="DA291C"/>
+                  <a:srgbClr val="EC0000"/>
                 </a:solidFill>
                 <a:latin typeface="Calibri"/>
               </a:rPr>
@@ -19215,7 +19215,7 @@
             <a:r>
               <a:rPr sz="1400" b="1">
                 <a:solidFill>
-                  <a:srgbClr val="DA291C"/>
+                  <a:srgbClr val="EC0000"/>
                 </a:solidFill>
                 <a:latin typeface="Calibri"/>
               </a:rPr>
@@ -19525,7 +19525,7 @@
             <a:avLst/>
           </a:prstGeom>
           <a:solidFill>
-            <a:srgbClr val="DA291C"/>
+            <a:srgbClr val="EC0000"/>
           </a:solidFill>
           <a:ln>
             <a:noFill/>
@@ -19568,7 +19568,7 @@
             <a:avLst/>
           </a:prstGeom>
           <a:solidFill>
-            <a:srgbClr val="DA291C"/>
+            <a:srgbClr val="EC0000"/>
           </a:solidFill>
           <a:ln>
             <a:noFill/>
@@ -19657,7 +19657,7 @@
             <a:r>
               <a:rPr sz="1600" b="1" i="0">
                 <a:solidFill>
-                  <a:srgbClr val="DA291C"/>
+                  <a:srgbClr val="EC0000"/>
                 </a:solidFill>
                 <a:latin typeface="Calibri"/>
               </a:rPr>
@@ -19839,7 +19839,7 @@
             <a:avLst/>
           </a:prstGeom>
           <a:solidFill>
-            <a:srgbClr val="FAF6EF"/>
+            <a:srgbClr val="FBF1EA"/>
           </a:solidFill>
           <a:ln>
             <a:noFill/>
@@ -19882,7 +19882,7 @@
             <a:avLst/>
           </a:prstGeom>
           <a:solidFill>
-            <a:srgbClr val="DA291C"/>
+            <a:srgbClr val="EC0000"/>
           </a:solidFill>
           <a:ln>
             <a:noFill/>
@@ -20038,7 +20038,7 @@
             <a:avLst/>
           </a:prstGeom>
           <a:solidFill>
-            <a:srgbClr val="DA291C"/>
+            <a:srgbClr val="EC0000"/>
           </a:solidFill>
           <a:ln>
             <a:noFill/>
@@ -20096,7 +20096,7 @@
             <a:r>
               <a:rPr sz="1400" b="1">
                 <a:solidFill>
-                  <a:srgbClr val="DA291C"/>
+                  <a:srgbClr val="EC0000"/>
                 </a:solidFill>
                 <a:latin typeface="Calibri"/>
               </a:rPr>
@@ -20151,7 +20151,7 @@
             <a:r>
               <a:rPr sz="1400" b="1">
                 <a:solidFill>
-                  <a:srgbClr val="DA291C"/>
+                  <a:srgbClr val="EC0000"/>
                 </a:solidFill>
                 <a:latin typeface="Calibri"/>
               </a:rPr>
@@ -20222,7 +20222,7 @@
             <a:r>
               <a:rPr sz="1400" b="1">
                 <a:solidFill>
-                  <a:srgbClr val="DA291C"/>
+                  <a:srgbClr val="EC0000"/>
                 </a:solidFill>
                 <a:latin typeface="Calibri"/>
               </a:rPr>
@@ -20293,7 +20293,7 @@
             <a:r>
               <a:rPr sz="1400" b="1">
                 <a:solidFill>
-                  <a:srgbClr val="DA291C"/>
+                  <a:srgbClr val="EC0000"/>
                 </a:solidFill>
                 <a:latin typeface="Calibri"/>
               </a:rPr>
@@ -20507,7 +20507,7 @@
             <a:avLst/>
           </a:prstGeom>
           <a:solidFill>
-            <a:srgbClr val="DA291C"/>
+            <a:srgbClr val="EC0000"/>
           </a:solidFill>
           <a:ln>
             <a:noFill/>
@@ -20550,7 +20550,7 @@
             <a:avLst/>
           </a:prstGeom>
           <a:solidFill>
-            <a:srgbClr val="DA291C"/>
+            <a:srgbClr val="EC0000"/>
           </a:solidFill>
           <a:ln>
             <a:noFill/>
@@ -20604,7 +20604,7 @@
             <a:r>
               <a:rPr sz="1100" b="1" i="0">
                 <a:solidFill>
-                  <a:srgbClr val="DA291C"/>
+                  <a:srgbClr val="EC0000"/>
                 </a:solidFill>
                 <a:latin typeface="Calibri"/>
               </a:rPr>
@@ -20716,7 +20716,7 @@
             <a:avLst/>
           </a:prstGeom>
           <a:solidFill>
-            <a:srgbClr val="FAF6EF"/>
+            <a:srgbClr val="FBF1EA"/>
           </a:solidFill>
           <a:ln>
             <a:noFill/>
@@ -20759,7 +20759,7 @@
             <a:avLst/>
           </a:prstGeom>
           <a:solidFill>
-            <a:srgbClr val="DA291C"/>
+            <a:srgbClr val="EC0000"/>
           </a:solidFill>
           <a:ln>
             <a:noFill/>
@@ -20915,7 +20915,7 @@
             <a:avLst/>
           </a:prstGeom>
           <a:solidFill>
-            <a:srgbClr val="DA291C"/>
+            <a:srgbClr val="EC0000"/>
           </a:solidFill>
           <a:ln>
             <a:noFill/>
@@ -20996,7 +20996,7 @@
             <a:r>
               <a:rPr sz="1400" b="1">
                 <a:solidFill>
-                  <a:srgbClr val="DA291C"/>
+                  <a:srgbClr val="EC0000"/>
                 </a:solidFill>
                 <a:latin typeface="Calibri"/>
               </a:rPr>
@@ -21051,7 +21051,7 @@
             <a:r>
               <a:rPr sz="1400" b="1">
                 <a:solidFill>
-                  <a:srgbClr val="DA291C"/>
+                  <a:srgbClr val="EC0000"/>
                 </a:solidFill>
                 <a:latin typeface="Calibri"/>
               </a:rPr>
@@ -21106,7 +21106,7 @@
             <a:r>
               <a:rPr sz="1400" b="1">
                 <a:solidFill>
-                  <a:srgbClr val="DA291C"/>
+                  <a:srgbClr val="EC0000"/>
                 </a:solidFill>
                 <a:latin typeface="Calibri"/>
               </a:rPr>
@@ -21161,7 +21161,7 @@
             <a:r>
               <a:rPr sz="1400" b="1">
                 <a:solidFill>
-                  <a:srgbClr val="DA291C"/>
+                  <a:srgbClr val="EC0000"/>
                 </a:solidFill>
                 <a:latin typeface="Calibri"/>
               </a:rPr>
@@ -21216,7 +21216,7 @@
             <a:r>
               <a:rPr sz="1400" b="1">
                 <a:solidFill>
-                  <a:srgbClr val="DA291C"/>
+                  <a:srgbClr val="EC0000"/>
                 </a:solidFill>
                 <a:latin typeface="Calibri"/>
               </a:rPr>
@@ -21403,7 +21403,7 @@
             <a:avLst/>
           </a:prstGeom>
           <a:solidFill>
-            <a:srgbClr val="FAF6EF"/>
+            <a:srgbClr val="FBF1EA"/>
           </a:solidFill>
           <a:ln>
             <a:noFill/>
@@ -21446,7 +21446,7 @@
             <a:avLst/>
           </a:prstGeom>
           <a:solidFill>
-            <a:srgbClr val="DA291C"/>
+            <a:srgbClr val="EC0000"/>
           </a:solidFill>
           <a:ln>
             <a:noFill/>
@@ -21602,7 +21602,7 @@
             <a:avLst/>
           </a:prstGeom>
           <a:solidFill>
-            <a:srgbClr val="DA291C"/>
+            <a:srgbClr val="EC0000"/>
           </a:solidFill>
           <a:ln>
             <a:noFill/>
@@ -21699,7 +21699,7 @@
             <a:r>
               <a:rPr sz="1400" b="1">
                 <a:solidFill>
-                  <a:srgbClr val="DA291C"/>
+                  <a:srgbClr val="EC0000"/>
                 </a:solidFill>
                 <a:latin typeface="Calibri"/>
               </a:rPr>
@@ -21786,7 +21786,7 @@
             <a:r>
               <a:rPr sz="1400" b="1">
                 <a:solidFill>
-                  <a:srgbClr val="DA291C"/>
+                  <a:srgbClr val="EC0000"/>
                 </a:solidFill>
                 <a:latin typeface="Calibri"/>
               </a:rPr>
@@ -21857,7 +21857,7 @@
             <a:r>
               <a:rPr sz="1400" b="1">
                 <a:solidFill>
-                  <a:srgbClr val="DA291C"/>
+                  <a:srgbClr val="EC0000"/>
                 </a:solidFill>
                 <a:latin typeface="Calibri"/>
               </a:rPr>
@@ -22044,7 +22044,7 @@
             <a:avLst/>
           </a:prstGeom>
           <a:solidFill>
-            <a:srgbClr val="FAF6EF"/>
+            <a:srgbClr val="FBF1EA"/>
           </a:solidFill>
           <a:ln>
             <a:noFill/>
@@ -22087,7 +22087,7 @@
             <a:avLst/>
           </a:prstGeom>
           <a:solidFill>
-            <a:srgbClr val="DA291C"/>
+            <a:srgbClr val="EC0000"/>
           </a:solidFill>
           <a:ln>
             <a:noFill/>
@@ -22243,7 +22243,7 @@
             <a:avLst/>
           </a:prstGeom>
           <a:solidFill>
-            <a:srgbClr val="DA291C"/>
+            <a:srgbClr val="EC0000"/>
           </a:solidFill>
           <a:ln>
             <a:noFill/>
@@ -22340,7 +22340,7 @@
             <a:r>
               <a:rPr sz="1400" b="1">
                 <a:solidFill>
-                  <a:srgbClr val="DA291C"/>
+                  <a:srgbClr val="EC0000"/>
                 </a:solidFill>
                 <a:latin typeface="Calibri"/>
               </a:rPr>
@@ -22459,7 +22459,7 @@
             <a:r>
               <a:rPr sz="1400" b="1">
                 <a:solidFill>
-                  <a:srgbClr val="DA291C"/>
+                  <a:srgbClr val="EC0000"/>
                 </a:solidFill>
                 <a:latin typeface="Calibri"/>
               </a:rPr>
@@ -22530,7 +22530,7 @@
             <a:r>
               <a:rPr sz="1400" b="1">
                 <a:solidFill>
-                  <a:srgbClr val="DA291C"/>
+                  <a:srgbClr val="EC0000"/>
                 </a:solidFill>
                 <a:latin typeface="Calibri"/>
               </a:rPr>
@@ -22733,7 +22733,7 @@
             <a:avLst/>
           </a:prstGeom>
           <a:solidFill>
-            <a:srgbClr val="FAF6EF"/>
+            <a:srgbClr val="FBF1EA"/>
           </a:solidFill>
           <a:ln>
             <a:noFill/>
@@ -22776,7 +22776,7 @@
             <a:avLst/>
           </a:prstGeom>
           <a:solidFill>
-            <a:srgbClr val="DA291C"/>
+            <a:srgbClr val="EC0000"/>
           </a:solidFill>
           <a:ln>
             <a:noFill/>
@@ -22932,7 +22932,7 @@
             <a:avLst/>
           </a:prstGeom>
           <a:solidFill>
-            <a:srgbClr val="DA291C"/>
+            <a:srgbClr val="EC0000"/>
           </a:solidFill>
           <a:ln>
             <a:noFill/>
@@ -22990,7 +22990,7 @@
             <a:r>
               <a:rPr sz="1400" b="1">
                 <a:solidFill>
-                  <a:srgbClr val="DA291C"/>
+                  <a:srgbClr val="EC0000"/>
                 </a:solidFill>
                 <a:latin typeface="Calibri"/>
               </a:rPr>
@@ -23045,7 +23045,7 @@
             <a:r>
               <a:rPr sz="1400" b="1">
                 <a:solidFill>
-                  <a:srgbClr val="DA291C"/>
+                  <a:srgbClr val="EC0000"/>
                 </a:solidFill>
                 <a:latin typeface="Calibri"/>
               </a:rPr>
@@ -23132,7 +23132,7 @@
             <a:r>
               <a:rPr sz="1400" b="1">
                 <a:solidFill>
-                  <a:srgbClr val="DA291C"/>
+                  <a:srgbClr val="EC0000"/>
                 </a:solidFill>
                 <a:latin typeface="Calibri"/>
               </a:rPr>
@@ -23187,7 +23187,7 @@
             <a:r>
               <a:rPr sz="1400" b="1">
                 <a:solidFill>
-                  <a:srgbClr val="DA291C"/>
+                  <a:srgbClr val="EC0000"/>
                 </a:solidFill>
                 <a:latin typeface="Calibri"/>
               </a:rPr>
@@ -23258,7 +23258,7 @@
             <a:r>
               <a:rPr sz="1400" b="1">
                 <a:solidFill>
-                  <a:srgbClr val="DA291C"/>
+                  <a:srgbClr val="EC0000"/>
                 </a:solidFill>
                 <a:latin typeface="Calibri"/>
               </a:rPr>

--- a/Santander_LimitedCompany_Walkthrough.pptx
+++ b/Santander_LimitedCompany_Walkthrough.pptx
@@ -3846,7 +3846,7 @@
                 </a:solidFill>
                 <a:latin typeface="Calibri"/>
               </a:rPr>
-              <a:t>June 2026  ·  Created by Alan Davidson</a:t>
+              <a:t>July 2026  ·  Created by Alan Davidson</a:t>
             </a:r>
           </a:p>
         </p:txBody>
@@ -4849,7 +4849,7 @@
                 </a:solidFill>
                 <a:latin typeface="Calibri"/>
               </a:rPr>
-              <a:t>Santander Business Banking · Limited Company Walkthrough · June 2026</a:t>
+              <a:t>Santander Business Banking · Limited Company Walkthrough · July 2026</a:t>
             </a:r>
           </a:p>
         </p:txBody>
@@ -5492,7 +5492,7 @@
                 </a:solidFill>
                 <a:latin typeface="Calibri"/>
               </a:rPr>
-              <a:t>Santander Business Banking · Limited Company Walkthrough · June 2026</a:t>
+              <a:t>Santander Business Banking · Limited Company Walkthrough · July 2026</a:t>
             </a:r>
           </a:p>
         </p:txBody>
@@ -6204,7 +6204,7 @@
                 </a:solidFill>
                 <a:latin typeface="Calibri"/>
               </a:rPr>
-              <a:t>Santander Business Banking · Limited Company Walkthrough · June 2026</a:t>
+              <a:t>Santander Business Banking · Limited Company Walkthrough · July 2026</a:t>
             </a:r>
           </a:p>
         </p:txBody>
@@ -6925,7 +6925,7 @@
                 </a:solidFill>
                 <a:latin typeface="Calibri"/>
               </a:rPr>
-              <a:t>Santander Business Banking · Limited Company Walkthrough · June 2026</a:t>
+              <a:t>Santander Business Banking · Limited Company Walkthrough · July 2026</a:t>
             </a:r>
           </a:p>
         </p:txBody>
@@ -7623,7 +7623,7 @@
                 </a:solidFill>
                 <a:latin typeface="Calibri"/>
               </a:rPr>
-              <a:t>Santander Business Banking · Limited Company Walkthrough · June 2026</a:t>
+              <a:t>Santander Business Banking · Limited Company Walkthrough · July 2026</a:t>
             </a:r>
           </a:p>
         </p:txBody>
@@ -8328,7 +8328,7 @@
                 </a:solidFill>
                 <a:latin typeface="Calibri"/>
               </a:rPr>
-              <a:t>Santander Business Banking · Limited Company Walkthrough · June 2026</a:t>
+              <a:t>Santander Business Banking · Limited Company Walkthrough · July 2026</a:t>
             </a:r>
           </a:p>
         </p:txBody>
@@ -9010,7 +9010,7 @@
                 </a:solidFill>
                 <a:latin typeface="Calibri"/>
               </a:rPr>
-              <a:t>Santander Business Banking · Limited Company Walkthrough · June 2026</a:t>
+              <a:t>Santander Business Banking · Limited Company Walkthrough · July 2026</a:t>
             </a:r>
           </a:p>
         </p:txBody>
@@ -9717,7 +9717,7 @@
                 </a:solidFill>
                 <a:latin typeface="Calibri"/>
               </a:rPr>
-              <a:t>Santander Business Banking · Limited Company Walkthrough · June 2026</a:t>
+              <a:t>Santander Business Banking · Limited Company Walkthrough · July 2026</a:t>
             </a:r>
           </a:p>
         </p:txBody>
@@ -10438,7 +10438,7 @@
                 </a:solidFill>
                 <a:latin typeface="Calibri"/>
               </a:rPr>
-              <a:t>Santander Business Banking · Limited Company Walkthrough · June 2026</a:t>
+              <a:t>Santander Business Banking · Limited Company Walkthrough · July 2026</a:t>
             </a:r>
           </a:p>
         </p:txBody>
@@ -11429,7 +11429,7 @@
                 </a:solidFill>
                 <a:latin typeface="Calibri"/>
               </a:rPr>
-              <a:t>Santander Business Banking · Limited Company Walkthrough · June 2026</a:t>
+              <a:t>Santander Business Banking · Limited Company Walkthrough · July 2026</a:t>
             </a:r>
           </a:p>
         </p:txBody>
@@ -12676,7 +12676,7 @@
                 </a:solidFill>
                 <a:latin typeface="Calibri"/>
               </a:rPr>
-              <a:t>Santander Business Banking · Limited Company Walkthrough · June 2026</a:t>
+              <a:t>Santander Business Banking · Limited Company Walkthrough · July 2026</a:t>
             </a:r>
           </a:p>
         </p:txBody>
@@ -13436,7 +13436,7 @@
                 </a:solidFill>
                 <a:latin typeface="Calibri"/>
               </a:rPr>
-              <a:t>Santander Business Banking · Limited Company Walkthrough · June 2026</a:t>
+              <a:t>Santander Business Banking · Limited Company Walkthrough · July 2026</a:t>
             </a:r>
           </a:p>
         </p:txBody>
@@ -14507,7 +14507,7 @@
                 </a:solidFill>
                 <a:latin typeface="Calibri"/>
               </a:rPr>
-              <a:t>Santander Business Banking · Limited Company Walkthrough · June 2026</a:t>
+              <a:t>Santander Business Banking · Limited Company Walkthrough · July 2026</a:t>
             </a:r>
           </a:p>
         </p:txBody>
@@ -15617,7 +15617,7 @@
                 </a:solidFill>
                 <a:latin typeface="Calibri"/>
               </a:rPr>
-              <a:t>Santander Business Banking · Limited Company Walkthrough · June 2026</a:t>
+              <a:t>Santander Business Banking · Limited Company Walkthrough · July 2026</a:t>
             </a:r>
           </a:p>
         </p:txBody>
@@ -16315,7 +16315,7 @@
                 </a:solidFill>
                 <a:latin typeface="Calibri"/>
               </a:rPr>
-              <a:t>Santander Business Banking · Limited Company Walkthrough · June 2026</a:t>
+              <a:t>Santander Business Banking · Limited Company Walkthrough · July 2026</a:t>
             </a:r>
           </a:p>
         </p:txBody>
@@ -17045,7 +17045,7 @@
                 </a:solidFill>
                 <a:latin typeface="Calibri"/>
               </a:rPr>
-              <a:t>Santander Business Banking · Limited Company Walkthrough · June 2026</a:t>
+              <a:t>Santander Business Banking · Limited Company Walkthrough · July 2026</a:t>
             </a:r>
           </a:p>
         </p:txBody>
@@ -18073,7 +18073,7 @@
                 </a:solidFill>
                 <a:latin typeface="Calibri"/>
               </a:rPr>
-              <a:t>Santander Business Banking · Limited Company Walkthrough · June 2026</a:t>
+              <a:t>Santander Business Banking · Limited Company Walkthrough · July 2026</a:t>
             </a:r>
           </a:p>
         </p:txBody>
@@ -18675,7 +18675,7 @@
                 </a:solidFill>
                 <a:latin typeface="Calibri"/>
               </a:rPr>
-              <a:t>Santander Business Banking · Limited Company Walkthrough · June 2026</a:t>
+              <a:t>Santander Business Banking · Limited Company Walkthrough · July 2026</a:t>
             </a:r>
           </a:p>
         </p:txBody>
@@ -19444,7 +19444,7 @@
                 </a:solidFill>
                 <a:latin typeface="Calibri"/>
               </a:rPr>
-              <a:t>Santander Business Banking · Limited Company Walkthrough · June 2026</a:t>
+              <a:t>Santander Business Banking · Limited Company Walkthrough · July 2026</a:t>
             </a:r>
           </a:p>
         </p:txBody>
@@ -19801,7 +19801,7 @@
                 </a:solidFill>
                 <a:latin typeface="Calibri"/>
               </a:rPr>
-              <a:t>June 2026</a:t>
+              <a:t>July 2026</a:t>
             </a:r>
           </a:p>
         </p:txBody>
@@ -20426,7 +20426,7 @@
                 </a:solidFill>
                 <a:latin typeface="Calibri"/>
               </a:rPr>
-              <a:t>Santander Business Banking · Limited Company Walkthrough · June 2026</a:t>
+              <a:t>Santander Business Banking · Limited Company Walkthrough · July 2026</a:t>
             </a:r>
           </a:p>
         </p:txBody>
@@ -21365,7 +21365,7 @@
                 </a:solidFill>
                 <a:latin typeface="Calibri"/>
               </a:rPr>
-              <a:t>Santander Business Banking · Limited Company Walkthrough · June 2026</a:t>
+              <a:t>Santander Business Banking · Limited Company Walkthrough · July 2026</a:t>
             </a:r>
           </a:p>
         </p:txBody>
@@ -22006,7 +22006,7 @@
                 </a:solidFill>
                 <a:latin typeface="Calibri"/>
               </a:rPr>
-              <a:t>Santander Business Banking · Limited Company Walkthrough · June 2026</a:t>
+              <a:t>Santander Business Banking · Limited Company Walkthrough · July 2026</a:t>
             </a:r>
           </a:p>
         </p:txBody>
@@ -22695,7 +22695,7 @@
                 </a:solidFill>
                 <a:latin typeface="Calibri"/>
               </a:rPr>
-              <a:t>Santander Business Banking · Limited Company Walkthrough · June 2026</a:t>
+              <a:t>Santander Business Banking · Limited Company Walkthrough · July 2026</a:t>
             </a:r>
           </a:p>
         </p:txBody>
@@ -23423,7 +23423,7 @@
                 </a:solidFill>
                 <a:latin typeface="Calibri"/>
               </a:rPr>
-              <a:t>Santander Business Banking · Limited Company Walkthrough · June 2026</a:t>
+              <a:t>Santander Business Banking · Limited Company Walkthrough · July 2026</a:t>
             </a:r>
           </a:p>
         </p:txBody>

--- a/Santander_LimitedCompany_Walkthrough.pptx
+++ b/Santander_LimitedCompany_Walkthrough.pptx
@@ -5816,11 +5816,68 @@
                 <a:spcPts val="400"/>
               </a:spcBef>
             </a:pPr>
+            <a:r>
+              <a:rPr sz="1400" b="1">
+                <a:solidFill>
+                  <a:srgbClr val="EC0000"/>
+                </a:solidFill>
+                <a:latin typeface="Calibri"/>
+              </a:rPr>
+              <a:t>Card 1 — Payroll run (amber border)</a:t>
+            </a:r>
+          </a:p>
+          <a:p>
+            <a:pPr lvl="1">
+              <a:spcBef>
+                <a:spcPts val="200"/>
+              </a:spcBef>
+            </a:pPr>
+            <a:r>
+              <a:rPr sz="1200">
+                <a:solidFill>
+                  <a:srgbClr val="1C1917"/>
+                </a:solidFill>
+                <a:latin typeface="Calibri"/>
+              </a:rPr>
+              <a:t>•  — 'In 3 days'  ·  'Payroll run · £42,180'</a:t>
+            </a:r>
+          </a:p>
+          <a:p>
+            <a:pPr lvl="1">
+              <a:spcBef>
+                <a:spcPts val="200"/>
+              </a:spcBef>
+            </a:pPr>
+            <a:r>
+              <a:rPr sz="1200">
+                <a:solidFill>
+                  <a:srgbClr val="1C1917"/>
+                </a:solidFill>
+                <a:latin typeface="Calibri"/>
+              </a:rPr>
+              <a:t>•  — 'Balance covers it — review if payees changed'</a:t>
+            </a:r>
+          </a:p>
+          <a:p>
+            <a:pPr lvl="1">
+              <a:spcBef>
+                <a:spcPts val="200"/>
+              </a:spcBef>
+            </a:pPr>
+            <a:r>
+              <a:rPr sz="1200">
+                <a:solidFill>
+                  <a:srgbClr val="1C1917"/>
+                </a:solidFill>
+                <a:latin typeface="Calibri"/>
+              </a:rPr>
+              <a:t>•  — Taps directly into the Bulk Payments (Wages) workflow.</a:t>
+            </a:r>
           </a:p>
           <a:p>
             <a:pPr>
               <a:spcBef>
-                <a:spcPts val="800"/>
+                <a:spcPts val="1100"/>
               </a:spcBef>
             </a:pPr>
             <a:r>
@@ -5830,7 +5887,7 @@
                 </a:solidFill>
                 <a:latin typeface="Calibri"/>
               </a:rPr>
-              <a:t>Card 1 — Payroll run (amber border)</a:t>
+              <a:t>Card 2 — VAT return due (red border)</a:t>
             </a:r>
           </a:p>
           <a:p>
@@ -5846,7 +5903,7 @@
                 </a:solidFill>
                 <a:latin typeface="Calibri"/>
               </a:rPr>
-              <a:t>•  — 'In 3 days'  ·  'Payroll run · £42,180'</a:t>
+              <a:t>•  — '22 days'  ·  'VAT return due 7 Aug'</a:t>
             </a:r>
           </a:p>
           <a:p>
@@ -5862,7 +5919,7 @@
                 </a:solidFill>
                 <a:latin typeface="Calibri"/>
               </a:rPr>
-              <a:t>•  — 'Balance covers it — review if payees changed'</a:t>
+              <a:t>•  — 'Q3 Making Tax Digital · HMRC submission'</a:t>
             </a:r>
           </a:p>
           <a:p>
@@ -5878,162 +5935,77 @@
                 </a:solidFill>
                 <a:latin typeface="Calibri"/>
               </a:rPr>
-              <a:t>•  — Taps directly into the Bulk Payments (Wages) workflow.</a:t>
+              <a:t>•  — Taps directly into the MTD/Tax tab.</a:t>
             </a:r>
           </a:p>
           <a:p>
             <a:pPr>
               <a:spcBef>
-                <a:spcPts val="400"/>
-              </a:spcBef>
-            </a:pPr>
+                <a:spcPts val="1100"/>
+              </a:spcBef>
+            </a:pPr>
+            <a:r>
+              <a:rPr sz="1400" b="1">
+                <a:solidFill>
+                  <a:srgbClr val="EC0000"/>
+                </a:solidFill>
+                <a:latin typeface="Calibri"/>
+              </a:rPr>
+              <a:t>Card 3 — Companies House (blue border)</a:t>
+            </a:r>
+          </a:p>
+          <a:p>
+            <a:pPr lvl="1">
+              <a:spcBef>
+                <a:spcPts val="200"/>
+              </a:spcBef>
+            </a:pPr>
+            <a:r>
+              <a:rPr sz="1200">
+                <a:solidFill>
+                  <a:srgbClr val="1C1917"/>
+                </a:solidFill>
+                <a:latin typeface="Calibri"/>
+              </a:rPr>
+              <a:t>•  — '14 days'  ·  'Annual confirmation due'</a:t>
+            </a:r>
+          </a:p>
+          <a:p>
+            <a:pPr lvl="1">
+              <a:spcBef>
+                <a:spcPts val="200"/>
+              </a:spcBef>
+            </a:pPr>
+            <a:r>
+              <a:rPr sz="1200">
+                <a:solidFill>
+                  <a:srgbClr val="1C1917"/>
+                </a:solidFill>
+                <a:latin typeface="Calibri"/>
+              </a:rPr>
+              <a:t>•  — 'Companies House · Whitfield Holdings Ltd'</a:t>
+            </a:r>
+          </a:p>
+          <a:p>
+            <a:pPr lvl="1">
+              <a:spcBef>
+                <a:spcPts val="200"/>
+              </a:spcBef>
+            </a:pPr>
+            <a:r>
+              <a:rPr sz="1200">
+                <a:solidFill>
+                  <a:srgbClr val="1C1917"/>
+                </a:solidFill>
+                <a:latin typeface="Calibri"/>
+              </a:rPr>
+              <a:t>•  — Taps directly into the KYB / ID register workflow.</a:t>
+            </a:r>
           </a:p>
           <a:p>
             <a:pPr>
               <a:spcBef>
-                <a:spcPts val="800"/>
-              </a:spcBef>
-            </a:pPr>
-            <a:r>
-              <a:rPr sz="1400" b="1">
-                <a:solidFill>
-                  <a:srgbClr val="EC0000"/>
-                </a:solidFill>
-                <a:latin typeface="Calibri"/>
-              </a:rPr>
-              <a:t>Card 2 — VAT return due (red border)</a:t>
-            </a:r>
-          </a:p>
-          <a:p>
-            <a:pPr lvl="1">
-              <a:spcBef>
-                <a:spcPts val="200"/>
-              </a:spcBef>
-            </a:pPr>
-            <a:r>
-              <a:rPr sz="1200">
-                <a:solidFill>
-                  <a:srgbClr val="1C1917"/>
-                </a:solidFill>
-                <a:latin typeface="Calibri"/>
-              </a:rPr>
-              <a:t>•  — '22 days'  ·  'VAT return due 7 Aug'</a:t>
-            </a:r>
-          </a:p>
-          <a:p>
-            <a:pPr lvl="1">
-              <a:spcBef>
-                <a:spcPts val="200"/>
-              </a:spcBef>
-            </a:pPr>
-            <a:r>
-              <a:rPr sz="1200">
-                <a:solidFill>
-                  <a:srgbClr val="1C1917"/>
-                </a:solidFill>
-                <a:latin typeface="Calibri"/>
-              </a:rPr>
-              <a:t>•  — 'Q3 Making Tax Digital · HMRC submission'</a:t>
-            </a:r>
-          </a:p>
-          <a:p>
-            <a:pPr lvl="1">
-              <a:spcBef>
-                <a:spcPts val="200"/>
-              </a:spcBef>
-            </a:pPr>
-            <a:r>
-              <a:rPr sz="1200">
-                <a:solidFill>
-                  <a:srgbClr val="1C1917"/>
-                </a:solidFill>
-                <a:latin typeface="Calibri"/>
-              </a:rPr>
-              <a:t>•  — Taps directly into the MTD/Tax tab.</a:t>
-            </a:r>
-          </a:p>
-          <a:p>
-            <a:pPr>
-              <a:spcBef>
-                <a:spcPts val="400"/>
-              </a:spcBef>
-            </a:pPr>
-          </a:p>
-          <a:p>
-            <a:pPr>
-              <a:spcBef>
-                <a:spcPts val="800"/>
-              </a:spcBef>
-            </a:pPr>
-            <a:r>
-              <a:rPr sz="1400" b="1">
-                <a:solidFill>
-                  <a:srgbClr val="EC0000"/>
-                </a:solidFill>
-                <a:latin typeface="Calibri"/>
-              </a:rPr>
-              <a:t>Card 3 — Companies House (blue border)</a:t>
-            </a:r>
-          </a:p>
-          <a:p>
-            <a:pPr lvl="1">
-              <a:spcBef>
-                <a:spcPts val="200"/>
-              </a:spcBef>
-            </a:pPr>
-            <a:r>
-              <a:rPr sz="1200">
-                <a:solidFill>
-                  <a:srgbClr val="1C1917"/>
-                </a:solidFill>
-                <a:latin typeface="Calibri"/>
-              </a:rPr>
-              <a:t>•  — '14 days'  ·  'Annual confirmation due'</a:t>
-            </a:r>
-          </a:p>
-          <a:p>
-            <a:pPr lvl="1">
-              <a:spcBef>
-                <a:spcPts val="200"/>
-              </a:spcBef>
-            </a:pPr>
-            <a:r>
-              <a:rPr sz="1200">
-                <a:solidFill>
-                  <a:srgbClr val="1C1917"/>
-                </a:solidFill>
-                <a:latin typeface="Calibri"/>
-              </a:rPr>
-              <a:t>•  — 'Companies House · Whitfield Holdings Ltd'</a:t>
-            </a:r>
-          </a:p>
-          <a:p>
-            <a:pPr lvl="1">
-              <a:spcBef>
-                <a:spcPts val="200"/>
-              </a:spcBef>
-            </a:pPr>
-            <a:r>
-              <a:rPr sz="1200">
-                <a:solidFill>
-                  <a:srgbClr val="1C1917"/>
-                </a:solidFill>
-                <a:latin typeface="Calibri"/>
-              </a:rPr>
-              <a:t>•  — Taps directly into the KYB / ID register workflow.</a:t>
-            </a:r>
-          </a:p>
-          <a:p>
-            <a:pPr>
-              <a:spcBef>
-                <a:spcPts val="400"/>
-              </a:spcBef>
-            </a:pPr>
-          </a:p>
-          <a:p>
-            <a:pPr>
-              <a:spcBef>
-                <a:spcPts val="800"/>
+                <a:spcPts val="1100"/>
               </a:spcBef>
             </a:pPr>
             <a:r>
@@ -12965,11 +12937,11 @@
           <a:p>
             <a:pPr>
               <a:spcBef>
-                <a:spcPts val="800"/>
-              </a:spcBef>
-            </a:pPr>
-            <a:r>
-              <a:rPr sz="1400" b="1">
+                <a:spcPts val="360"/>
+              </a:spcBef>
+            </a:pPr>
+            <a:r>
+              <a:rPr sz="1320" b="1">
                 <a:solidFill>
                   <a:srgbClr val="EC0000"/>
                 </a:solidFill>
@@ -12985,7 +12957,7 @@
               </a:spcBef>
             </a:pPr>
             <a:r>
-              <a:rPr sz="1200">
+              <a:rPr sz="1130">
                 <a:solidFill>
                   <a:srgbClr val="1C1917"/>
                 </a:solidFill>
@@ -13001,7 +12973,7 @@
               </a:spcBef>
             </a:pPr>
             <a:r>
-              <a:rPr sz="1100">
+              <a:rPr sz="1030">
                 <a:solidFill>
                   <a:srgbClr val="787169"/>
                 </a:solidFill>
@@ -13017,7 +12989,7 @@
               </a:spcBef>
             </a:pPr>
             <a:r>
-              <a:rPr sz="1200">
+              <a:rPr sz="1130">
                 <a:solidFill>
                   <a:srgbClr val="1C1917"/>
                 </a:solidFill>
@@ -13029,284 +13001,256 @@
           <a:p>
             <a:pPr>
               <a:spcBef>
-                <a:spcPts val="400"/>
-              </a:spcBef>
-            </a:pPr>
+                <a:spcPts val="990"/>
+              </a:spcBef>
+            </a:pPr>
+            <a:r>
+              <a:rPr sz="1320" b="1">
+                <a:solidFill>
+                  <a:srgbClr val="EC0000"/>
+                </a:solidFill>
+                <a:latin typeface="Calibri"/>
+              </a:rPr>
+              <a:t>Current signatories (Limited Company)</a:t>
+            </a:r>
+          </a:p>
+          <a:p>
+            <a:pPr lvl="1">
+              <a:spcBef>
+                <a:spcPts val="200"/>
+              </a:spcBef>
+            </a:pPr>
+            <a:r>
+              <a:rPr sz="1130">
+                <a:solidFill>
+                  <a:srgbClr val="1C1917"/>
+                </a:solidFill>
+                <a:latin typeface="Calibri"/>
+              </a:rPr>
+              <a:t>•  — James Whitfield — Director — verified (passport, council tax, residential match)</a:t>
+            </a:r>
+          </a:p>
+          <a:p>
+            <a:pPr lvl="1">
+              <a:spcBef>
+                <a:spcPts val="200"/>
+              </a:spcBef>
+            </a:pPr>
+            <a:r>
+              <a:rPr sz="1130">
+                <a:solidFill>
+                  <a:srgbClr val="1C1917"/>
+                </a:solidFill>
+                <a:latin typeface="Calibri"/>
+              </a:rPr>
+              <a:t>•  — Sarah Chen — Finance Director — verified (UK photocard, bank statement, lease)</a:t>
+            </a:r>
+          </a:p>
+          <a:p>
+            <a:pPr lvl="1">
+              <a:spcBef>
+                <a:spcPts val="200"/>
+              </a:spcBef>
+            </a:pPr>
+            <a:r>
+              <a:rPr sz="1130">
+                <a:solidFill>
+                  <a:srgbClr val="1C1917"/>
+                </a:solidFill>
+                <a:latin typeface="Calibri"/>
+              </a:rPr>
+              <a:t>•  — Tom Bridges — Operations Lead — under review (documents from Aug 2024 ⚠)</a:t>
+            </a:r>
+          </a:p>
+          <a:p>
+            <a:pPr lvl="1">
+              <a:spcBef>
+                <a:spcPts val="200"/>
+              </a:spcBef>
+            </a:pPr>
+            <a:r>
+              <a:rPr sz="1130">
+                <a:solidFill>
+                  <a:srgbClr val="1C1917"/>
+                </a:solidFill>
+                <a:latin typeface="Calibri"/>
+              </a:rPr>
+              <a:t>•  — Anita Roy — Director — verified (passport, HMRC letter, utility bill)</a:t>
+            </a:r>
           </a:p>
           <a:p>
             <a:pPr>
               <a:spcBef>
-                <a:spcPts val="800"/>
-              </a:spcBef>
-            </a:pPr>
-            <a:r>
-              <a:rPr sz="1400" b="1">
+                <a:spcPts val="990"/>
+              </a:spcBef>
+            </a:pPr>
+            <a:r>
+              <a:rPr sz="1320" b="1">
                 <a:solidFill>
                   <a:srgbClr val="EC0000"/>
                 </a:solidFill>
                 <a:latin typeface="Calibri"/>
               </a:rPr>
-              <a:t>Current signatories (Limited Company)</a:t>
-            </a:r>
-          </a:p>
-          <a:p>
-            <a:pPr lvl="1">
-              <a:spcBef>
-                <a:spcPts val="200"/>
-              </a:spcBef>
-            </a:pPr>
-            <a:r>
-              <a:rPr sz="1200">
-                <a:solidFill>
-                  <a:srgbClr val="1C1917"/>
-                </a:solidFill>
-                <a:latin typeface="Calibri"/>
-              </a:rPr>
-              <a:t>•  — James Whitfield — Director — verified (passport, council tax, residential match)</a:t>
-            </a:r>
-          </a:p>
-          <a:p>
-            <a:pPr lvl="1">
-              <a:spcBef>
-                <a:spcPts val="200"/>
-              </a:spcBef>
-            </a:pPr>
-            <a:r>
-              <a:rPr sz="1200">
-                <a:solidFill>
-                  <a:srgbClr val="1C1917"/>
-                </a:solidFill>
-                <a:latin typeface="Calibri"/>
-              </a:rPr>
-              <a:t>•  — Sarah Chen — Finance Director — verified (UK photocard, bank statement, lease)</a:t>
-            </a:r>
-          </a:p>
-          <a:p>
-            <a:pPr lvl="1">
-              <a:spcBef>
-                <a:spcPts val="200"/>
-              </a:spcBef>
-            </a:pPr>
-            <a:r>
-              <a:rPr sz="1200">
-                <a:solidFill>
-                  <a:srgbClr val="1C1917"/>
-                </a:solidFill>
-                <a:latin typeface="Calibri"/>
-              </a:rPr>
-              <a:t>•  — Tom Bridges — Operations Lead — under review (documents from Aug 2024 ⚠)</a:t>
-            </a:r>
-          </a:p>
-          <a:p>
-            <a:pPr lvl="1">
-              <a:spcBef>
-                <a:spcPts val="200"/>
-              </a:spcBef>
-            </a:pPr>
-            <a:r>
-              <a:rPr sz="1200">
-                <a:solidFill>
-                  <a:srgbClr val="1C1917"/>
-                </a:solidFill>
-                <a:latin typeface="Calibri"/>
-              </a:rPr>
-              <a:t>•  — Anita Roy — Director — verified (passport, HMRC letter, utility bill)</a:t>
+              <a:t>Steps</a:t>
+            </a:r>
+          </a:p>
+          <a:p>
+            <a:pPr lvl="1">
+              <a:spcBef>
+                <a:spcPts val="200"/>
+              </a:spcBef>
+            </a:pPr>
+            <a:r>
+              <a:rPr sz="1130">
+                <a:solidFill>
+                  <a:srgbClr val="1C1917"/>
+                </a:solidFill>
+                <a:latin typeface="Calibri"/>
+              </a:rPr>
+              <a:t>•  1.  Select accounts to modify</a:t>
+            </a:r>
+          </a:p>
+          <a:p>
+            <a:pPr lvl="1">
+              <a:spcBef>
+                <a:spcPts val="200"/>
+              </a:spcBef>
+            </a:pPr>
+            <a:r>
+              <a:rPr sz="1130">
+                <a:solidFill>
+                  <a:srgbClr val="1C1917"/>
+                </a:solidFill>
+                <a:latin typeface="Calibri"/>
+              </a:rPr>
+              <a:t>•  2.  Choose change type: add signatory / remove / change rule</a:t>
+            </a:r>
+          </a:p>
+          <a:p>
+            <a:pPr lvl="1">
+              <a:spcBef>
+                <a:spcPts val="200"/>
+              </a:spcBef>
+            </a:pPr>
+            <a:r>
+              <a:rPr sz="1130">
+                <a:solidFill>
+                  <a:srgbClr val="1C1917"/>
+                </a:solidFill>
+                <a:latin typeface="Calibri"/>
+              </a:rPr>
+              <a:t>•  3.  Configure the change (select person, new rule)</a:t>
+            </a:r>
+          </a:p>
+          <a:p>
+            <a:pPr lvl="1">
+              <a:spcBef>
+                <a:spcPts val="200"/>
+              </a:spcBef>
+            </a:pPr>
+            <a:r>
+              <a:rPr sz="1130">
+                <a:solidFill>
+                  <a:srgbClr val="1C1917"/>
+                </a:solidFill>
+                <a:latin typeface="Calibri"/>
+              </a:rPr>
+              <a:t>•  4.  Review mandate impact — what changes, which accounts are affected</a:t>
+            </a:r>
+          </a:p>
+          <a:p>
+            <a:pPr lvl="1">
+              <a:spcBef>
+                <a:spcPts val="200"/>
+              </a:spcBef>
+            </a:pPr>
+            <a:r>
+              <a:rPr sz="1130">
+                <a:solidFill>
+                  <a:srgbClr val="1C1917"/>
+                </a:solidFill>
+                <a:latin typeface="Calibri"/>
+              </a:rPr>
+              <a:t>•  5.  OTP confirmation → cooling-off (24h) for high-risk changes</a:t>
             </a:r>
           </a:p>
           <a:p>
             <a:pPr>
               <a:spcBef>
-                <a:spcPts val="400"/>
-              </a:spcBef>
-            </a:pPr>
+                <a:spcPts val="990"/>
+              </a:spcBef>
+            </a:pPr>
+            <a:r>
+              <a:rPr sz="1320" b="1">
+                <a:solidFill>
+                  <a:srgbClr val="EC0000"/>
+                </a:solidFill>
+                <a:latin typeface="Calibri"/>
+              </a:rPr>
+              <a:t>Mandate rules by account</a:t>
+            </a:r>
+          </a:p>
+          <a:p>
+            <a:pPr lvl="1">
+              <a:spcBef>
+                <a:spcPts val="200"/>
+              </a:spcBef>
+            </a:pPr>
+            <a:r>
+              <a:rPr sz="1130">
+                <a:solidFill>
+                  <a:srgbClr val="1C1917"/>
+                </a:solidFill>
+                <a:latin typeface="Calibri"/>
+              </a:rPr>
+              <a:t>•  — Strictest rule across selected accounts determines overall requirement.</a:t>
+            </a:r>
+          </a:p>
+          <a:p>
+            <a:pPr lvl="1">
+              <a:spcBef>
+                <a:spcPts val="200"/>
+              </a:spcBef>
+            </a:pPr>
+            <a:r>
+              <a:rPr sz="1130">
+                <a:solidFill>
+                  <a:srgbClr val="1C1917"/>
+                </a:solidFill>
+                <a:latin typeface="Calibri"/>
+              </a:rPr>
+              <a:t>•  — Removing a signatory from a dual-auth account triggers a 24h cooling-off.</a:t>
+            </a:r>
+          </a:p>
+          <a:p>
+            <a:pPr lvl="1">
+              <a:spcBef>
+                <a:spcPts val="200"/>
+              </a:spcBef>
+            </a:pPr>
+            <a:r>
+              <a:rPr sz="1130">
+                <a:solidFill>
+                  <a:srgbClr val="1C1917"/>
+                </a:solidFill>
+                <a:latin typeface="Calibri"/>
+              </a:rPr>
+              <a:t>•  — Adding a signatory on a single-auth account: immediate with OTP only.</a:t>
+            </a:r>
           </a:p>
           <a:p>
             <a:pPr>
               <a:spcBef>
-                <a:spcPts val="800"/>
-              </a:spcBef>
-            </a:pPr>
-            <a:r>
-              <a:rPr sz="1400" b="1">
+                <a:spcPts val="990"/>
+              </a:spcBef>
+            </a:pPr>
+            <a:r>
+              <a:rPr sz="1320" b="1">
                 <a:solidFill>
                   <a:srgbClr val="EC0000"/>
                 </a:solidFill>
                 <a:latin typeface="Calibri"/>
               </a:rPr>
-              <a:t>Steps</a:t>
-            </a:r>
-          </a:p>
-          <a:p>
-            <a:pPr lvl="1">
-              <a:spcBef>
-                <a:spcPts val="200"/>
-              </a:spcBef>
-            </a:pPr>
-            <a:r>
-              <a:rPr sz="1200">
-                <a:solidFill>
-                  <a:srgbClr val="1C1917"/>
-                </a:solidFill>
-                <a:latin typeface="Calibri"/>
-              </a:rPr>
-              <a:t>•  1.  Select accounts to modify</a:t>
-            </a:r>
-          </a:p>
-          <a:p>
-            <a:pPr lvl="1">
-              <a:spcBef>
-                <a:spcPts val="200"/>
-              </a:spcBef>
-            </a:pPr>
-            <a:r>
-              <a:rPr sz="1200">
-                <a:solidFill>
-                  <a:srgbClr val="1C1917"/>
-                </a:solidFill>
-                <a:latin typeface="Calibri"/>
-              </a:rPr>
-              <a:t>•  2.  Choose change type: add signatory / remove / change rule</a:t>
-            </a:r>
-          </a:p>
-          <a:p>
-            <a:pPr lvl="1">
-              <a:spcBef>
-                <a:spcPts val="200"/>
-              </a:spcBef>
-            </a:pPr>
-            <a:r>
-              <a:rPr sz="1200">
-                <a:solidFill>
-                  <a:srgbClr val="1C1917"/>
-                </a:solidFill>
-                <a:latin typeface="Calibri"/>
-              </a:rPr>
-              <a:t>•  3.  Configure the change (select person, new rule)</a:t>
-            </a:r>
-          </a:p>
-          <a:p>
-            <a:pPr lvl="1">
-              <a:spcBef>
-                <a:spcPts val="200"/>
-              </a:spcBef>
-            </a:pPr>
-            <a:r>
-              <a:rPr sz="1200">
-                <a:solidFill>
-                  <a:srgbClr val="1C1917"/>
-                </a:solidFill>
-                <a:latin typeface="Calibri"/>
-              </a:rPr>
-              <a:t>•  4.  Review mandate impact — what changes, which accounts are affected</a:t>
-            </a:r>
-          </a:p>
-          <a:p>
-            <a:pPr lvl="1">
-              <a:spcBef>
-                <a:spcPts val="200"/>
-              </a:spcBef>
-            </a:pPr>
-            <a:r>
-              <a:rPr sz="1200">
-                <a:solidFill>
-                  <a:srgbClr val="1C1917"/>
-                </a:solidFill>
-                <a:latin typeface="Calibri"/>
-              </a:rPr>
-              <a:t>•  5.  OTP confirmation → cooling-off (24h) for high-risk changes</a:t>
-            </a:r>
-          </a:p>
-          <a:p>
-            <a:pPr>
-              <a:spcBef>
-                <a:spcPts val="400"/>
-              </a:spcBef>
-            </a:pPr>
-          </a:p>
-          <a:p>
-            <a:pPr>
-              <a:spcBef>
-                <a:spcPts val="800"/>
-              </a:spcBef>
-            </a:pPr>
-            <a:r>
-              <a:rPr sz="1400" b="1">
-                <a:solidFill>
-                  <a:srgbClr val="EC0000"/>
-                </a:solidFill>
-                <a:latin typeface="Calibri"/>
-              </a:rPr>
-              <a:t>Mandate rules by account</a:t>
-            </a:r>
-          </a:p>
-          <a:p>
-            <a:pPr lvl="1">
-              <a:spcBef>
-                <a:spcPts val="200"/>
-              </a:spcBef>
-            </a:pPr>
-            <a:r>
-              <a:rPr sz="1200">
-                <a:solidFill>
-                  <a:srgbClr val="1C1917"/>
-                </a:solidFill>
-                <a:latin typeface="Calibri"/>
-              </a:rPr>
-              <a:t>•  — Strictest rule across selected accounts determines overall requirement.</a:t>
-            </a:r>
-          </a:p>
-          <a:p>
-            <a:pPr lvl="1">
-              <a:spcBef>
-                <a:spcPts val="200"/>
-              </a:spcBef>
-            </a:pPr>
-            <a:r>
-              <a:rPr sz="1200">
-                <a:solidFill>
-                  <a:srgbClr val="1C1917"/>
-                </a:solidFill>
-                <a:latin typeface="Calibri"/>
-              </a:rPr>
-              <a:t>•  — Removing a signatory from a dual-auth account triggers a 24h cooling-off.</a:t>
-            </a:r>
-          </a:p>
-          <a:p>
-            <a:pPr lvl="1">
-              <a:spcBef>
-                <a:spcPts val="200"/>
-              </a:spcBef>
-            </a:pPr>
-            <a:r>
-              <a:rPr sz="1200">
-                <a:solidFill>
-                  <a:srgbClr val="1C1917"/>
-                </a:solidFill>
-                <a:latin typeface="Calibri"/>
-              </a:rPr>
-              <a:t>•  — Adding a signatory on a single-auth account: immediate with OTP only.</a:t>
-            </a:r>
-          </a:p>
-          <a:p>
-            <a:pPr>
-              <a:spcBef>
-                <a:spcPts val="400"/>
-              </a:spcBef>
-            </a:pPr>
-          </a:p>
-          <a:p>
-            <a:pPr>
-              <a:spcBef>
-                <a:spcPts val="800"/>
-              </a:spcBef>
-            </a:pPr>
-            <a:r>
-              <a:rPr sz="1400" b="1">
-                <a:solidFill>
-                  <a:srgbClr val="EC0000"/>
-                </a:solidFill>
-                <a:latin typeface="Calibri"/>
-              </a:rPr>
               <a:t>Replaces</a:t>
             </a:r>
           </a:p>
@@ -13317,7 +13261,7 @@
               </a:spcBef>
             </a:pPr>
             <a:r>
-              <a:rPr sz="1200">
+              <a:rPr sz="1130">
                 <a:solidFill>
                   <a:srgbClr val="1C1917"/>
                 </a:solidFill>
@@ -17586,11 +17530,11 @@
           <a:p>
             <a:pPr>
               <a:spcBef>
-                <a:spcPts val="800"/>
-              </a:spcBef>
-            </a:pPr>
-            <a:r>
-              <a:rPr sz="1400" b="1">
+                <a:spcPts val="320"/>
+              </a:spcBef>
+            </a:pPr>
+            <a:r>
+              <a:rPr sz="1240" b="1">
                 <a:solidFill>
                   <a:srgbClr val="EC0000"/>
                 </a:solidFill>
@@ -17606,7 +17550,7 @@
               </a:spcBef>
             </a:pPr>
             <a:r>
-              <a:rPr sz="1200">
+              <a:rPr sz="1060">
                 <a:solidFill>
                   <a:srgbClr val="1C1917"/>
                 </a:solidFill>
@@ -17622,7 +17566,7 @@
               </a:spcBef>
             </a:pPr>
             <a:r>
-              <a:rPr sz="1200">
+              <a:rPr sz="1060">
                 <a:solidFill>
                   <a:srgbClr val="1C1917"/>
                 </a:solidFill>
@@ -17638,7 +17582,7 @@
               </a:spcBef>
             </a:pPr>
             <a:r>
-              <a:rPr sz="1200">
+              <a:rPr sz="1060">
                 <a:solidFill>
                   <a:srgbClr val="1C1917"/>
                 </a:solidFill>
@@ -17654,7 +17598,7 @@
               </a:spcBef>
             </a:pPr>
             <a:r>
-              <a:rPr sz="1200">
+              <a:rPr sz="1060">
                 <a:solidFill>
                   <a:srgbClr val="1C1917"/>
                 </a:solidFill>
@@ -17666,295 +17610,267 @@
           <a:p>
             <a:pPr>
               <a:spcBef>
-                <a:spcPts val="400"/>
-              </a:spcBef>
-            </a:pPr>
+                <a:spcPts val="890"/>
+              </a:spcBef>
+            </a:pPr>
+            <a:r>
+              <a:rPr sz="1240" b="1">
+                <a:solidFill>
+                  <a:srgbClr val="EC0000"/>
+                </a:solidFill>
+                <a:latin typeface="Calibri"/>
+              </a:rPr>
+              <a:t>Forecast → Payroll (3 min)</a:t>
+            </a:r>
+          </a:p>
+          <a:p>
+            <a:pPr lvl="1">
+              <a:spcBef>
+                <a:spcPts val="200"/>
+              </a:spcBef>
+            </a:pPr>
+            <a:r>
+              <a:rPr sz="1060">
+                <a:solidFill>
+                  <a:srgbClr val="1C1917"/>
+                </a:solidFill>
+                <a:latin typeface="Calibri"/>
+              </a:rPr>
+              <a:t>•  5. Tap the amber 'Payroll run' forecast card. Walk through the wages workflow.</a:t>
+            </a:r>
+          </a:p>
+          <a:p>
+            <a:pPr lvl="1">
+              <a:spcBef>
+                <a:spcPts val="200"/>
+              </a:spcBef>
+            </a:pPr>
+            <a:r>
+              <a:rPr sz="1060">
+                <a:solidFill>
+                  <a:srgbClr val="1C1917"/>
+                </a:solidFill>
+                <a:latin typeface="Calibri"/>
+              </a:rPr>
+              <a:t>•  6. Show the payee book. Deselect one employee. Show the total update.</a:t>
+            </a:r>
+          </a:p>
+          <a:p>
+            <a:pPr lvl="1">
+              <a:spcBef>
+                <a:spcPts val="200"/>
+              </a:spcBef>
+            </a:pPr>
+            <a:r>
+              <a:rPr sz="1060">
+                <a:solidFill>
+                  <a:srgbClr val="1C1917"/>
+                </a:solidFill>
+                <a:latin typeface="Calibri"/>
+              </a:rPr>
+              <a:t>•  7. Proceed to schedule → mandate check → sign (OTP sheet).</a:t>
+            </a:r>
+          </a:p>
+          <a:p>
+            <a:pPr lvl="1">
+              <a:spcBef>
+                <a:spcPts val="200"/>
+              </a:spcBef>
+            </a:pPr>
+            <a:r>
+              <a:rPr sz="1060">
+                <a:solidFill>
+                  <a:srgbClr val="1C1917"/>
+                </a:solidFill>
+                <a:latin typeface="Calibri"/>
+              </a:rPr>
+              <a:t>•  8. Return to home. Show the 24h cooling-off card if mandate triggered it.</a:t>
+            </a:r>
           </a:p>
           <a:p>
             <a:pPr>
               <a:spcBef>
-                <a:spcPts val="800"/>
-              </a:spcBef>
-            </a:pPr>
-            <a:r>
-              <a:rPr sz="1400" b="1">
+                <a:spcPts val="890"/>
+              </a:spcBef>
+            </a:pPr>
+            <a:r>
+              <a:rPr sz="1240" b="1">
                 <a:solidFill>
                   <a:srgbClr val="EC0000"/>
                 </a:solidFill>
                 <a:latin typeface="Calibri"/>
               </a:rPr>
-              <a:t>Forecast → Payroll (3 min)</a:t>
-            </a:r>
-          </a:p>
-          <a:p>
-            <a:pPr lvl="1">
-              <a:spcBef>
-                <a:spcPts val="200"/>
-              </a:spcBef>
-            </a:pPr>
-            <a:r>
-              <a:rPr sz="1200">
-                <a:solidFill>
-                  <a:srgbClr val="1C1917"/>
-                </a:solidFill>
-                <a:latin typeface="Calibri"/>
-              </a:rPr>
-              <a:t>•  5. Tap the amber 'Payroll run' forecast card. Walk through the wages workflow.</a:t>
-            </a:r>
-          </a:p>
-          <a:p>
-            <a:pPr lvl="1">
-              <a:spcBef>
-                <a:spcPts val="200"/>
-              </a:spcBef>
-            </a:pPr>
-            <a:r>
-              <a:rPr sz="1200">
-                <a:solidFill>
-                  <a:srgbClr val="1C1917"/>
-                </a:solidFill>
-                <a:latin typeface="Calibri"/>
-              </a:rPr>
-              <a:t>•  6. Show the payee book. Deselect one employee. Show the total update.</a:t>
-            </a:r>
-          </a:p>
-          <a:p>
-            <a:pPr lvl="1">
-              <a:spcBef>
-                <a:spcPts val="200"/>
-              </a:spcBef>
-            </a:pPr>
-            <a:r>
-              <a:rPr sz="1200">
-                <a:solidFill>
-                  <a:srgbClr val="1C1917"/>
-                </a:solidFill>
-                <a:latin typeface="Calibri"/>
-              </a:rPr>
-              <a:t>•  7. Proceed to schedule → mandate check → sign (OTP sheet).</a:t>
-            </a:r>
-          </a:p>
-          <a:p>
-            <a:pPr lvl="1">
-              <a:spcBef>
-                <a:spcPts val="200"/>
-              </a:spcBef>
-            </a:pPr>
-            <a:r>
-              <a:rPr sz="1200">
-                <a:solidFill>
-                  <a:srgbClr val="1C1917"/>
-                </a:solidFill>
-                <a:latin typeface="Calibri"/>
-              </a:rPr>
-              <a:t>•  8. Return to home. Show the 24h cooling-off card if mandate triggered it.</a:t>
+              <a:t>MTD VAT (3 min)</a:t>
+            </a:r>
+          </a:p>
+          <a:p>
+            <a:pPr lvl="1">
+              <a:spcBef>
+                <a:spcPts val="200"/>
+              </a:spcBef>
+            </a:pPr>
+            <a:r>
+              <a:rPr sz="1060">
+                <a:solidFill>
+                  <a:srgbClr val="1C1917"/>
+                </a:solidFill>
+                <a:latin typeface="Calibri"/>
+              </a:rPr>
+              <a:t>•  9. Tap the red 'VAT return' forecast card. Switch to the Tax tab.</a:t>
             </a:r>
           </a:p>
           <a:p>
             <a:pPr>
               <a:spcBef>
-                <a:spcPts val="400"/>
-              </a:spcBef>
-            </a:pPr>
+                <a:spcPts val="320"/>
+              </a:spcBef>
+            </a:pPr>
+            <a:r>
+              <a:rPr sz="1150" b="0">
+                <a:solidFill>
+                  <a:srgbClr val="1C1917"/>
+                </a:solidFill>
+                <a:latin typeface="Calibri"/>
+              </a:rPr>
+              <a:t>10. Show the Q3 obligation card — £18,472 due, 22 days, 247 transactions.</a:t>
+            </a:r>
           </a:p>
           <a:p>
             <a:pPr>
               <a:spcBef>
-                <a:spcPts val="800"/>
-              </a:spcBef>
-            </a:pPr>
-            <a:r>
-              <a:rPr sz="1400" b="1">
+                <a:spcPts val="320"/>
+              </a:spcBef>
+            </a:pPr>
+            <a:r>
+              <a:rPr sz="1150" b="0">
+                <a:solidFill>
+                  <a:srgbClr val="1C1917"/>
+                </a:solidFill>
+                <a:latin typeface="Calibri"/>
+              </a:rPr>
+              <a:t>11. Enter the submission workflow. Review 2–3 transactions, categorise one.</a:t>
+            </a:r>
+          </a:p>
+          <a:p>
+            <a:pPr>
+              <a:spcBef>
+                <a:spcPts val="320"/>
+              </a:spcBef>
+            </a:pPr>
+            <a:r>
+              <a:rPr sz="1150" b="0">
+                <a:solidFill>
+                  <a:srgbClr val="1C1917"/>
+                </a:solidFill>
+                <a:latin typeface="Calibri"/>
+              </a:rPr>
+              <a:t>12. Show the countdown timer before HMRC submission fires.</a:t>
+            </a:r>
+          </a:p>
+          <a:p>
+            <a:pPr>
+              <a:spcBef>
+                <a:spcPts val="890"/>
+              </a:spcBef>
+            </a:pPr>
+            <a:r>
+              <a:rPr sz="1240" b="1">
                 <a:solidFill>
                   <a:srgbClr val="EC0000"/>
                 </a:solidFill>
                 <a:latin typeface="Calibri"/>
               </a:rPr>
-              <a:t>MTD VAT (3 min)</a:t>
-            </a:r>
-          </a:p>
-          <a:p>
-            <a:pPr lvl="1">
-              <a:spcBef>
-                <a:spcPts val="200"/>
-              </a:spcBef>
-            </a:pPr>
-            <a:r>
-              <a:rPr sz="1200">
-                <a:solidFill>
-                  <a:srgbClr val="1C1917"/>
-                </a:solidFill>
-                <a:latin typeface="Calibri"/>
-              </a:rPr>
-              <a:t>•  9. Tap the red 'VAT return' forecast card. Switch to the Tax tab.</a:t>
+              <a:t>Stalled co-signer (2 min)</a:t>
             </a:r>
           </a:p>
           <a:p>
             <a:pPr>
               <a:spcBef>
-                <a:spcPts val="400"/>
-              </a:spcBef>
-            </a:pPr>
-            <a:r>
-              <a:rPr sz="1300" b="0">
-                <a:solidFill>
-                  <a:srgbClr val="1C1917"/>
-                </a:solidFill>
-                <a:latin typeface="Calibri"/>
-              </a:rPr>
-              <a:t>10. Show the Q3 obligation card — £18,472 due, 22 days, 247 transactions.</a:t>
+                <a:spcPts val="320"/>
+              </a:spcBef>
+            </a:pPr>
+            <a:r>
+              <a:rPr sz="1150" b="0">
+                <a:solidFill>
+                  <a:srgbClr val="1C1917"/>
+                </a:solidFill>
+                <a:latin typeface="Calibri"/>
+              </a:rPr>
+              <a:t>13. Return to Home. Tap 'Simulate timeout' — show the 'Priya's on it' card.</a:t>
             </a:r>
           </a:p>
           <a:p>
             <a:pPr>
               <a:spcBef>
-                <a:spcPts val="400"/>
-              </a:spcBef>
-            </a:pPr>
-            <a:r>
-              <a:rPr sz="1300" b="0">
-                <a:solidFill>
-                  <a:srgbClr val="1C1917"/>
-                </a:solidFill>
-                <a:latin typeface="Calibri"/>
-              </a:rPr>
-              <a:t>11. Enter the submission workflow. Review 2–3 transactions, categorise one.</a:t>
+                <a:spcPts val="320"/>
+              </a:spcBef>
+            </a:pPr>
+            <a:r>
+              <a:rPr sz="1150" b="0">
+                <a:solidFill>
+                  <a:srgbClr val="1C1917"/>
+                </a:solidFill>
+                <a:latin typeface="Calibri"/>
+              </a:rPr>
+              <a:t>14. Explain: 'In the current world this would silently expire.'</a:t>
             </a:r>
           </a:p>
           <a:p>
             <a:pPr>
               <a:spcBef>
-                <a:spcPts val="400"/>
-              </a:spcBef>
-            </a:pPr>
-            <a:r>
-              <a:rPr sz="1300" b="0">
-                <a:solidFill>
-                  <a:srgbClr val="1C1917"/>
-                </a:solidFill>
-                <a:latin typeface="Calibri"/>
-              </a:rPr>
-              <a:t>12. Show the countdown timer before HMRC submission fires.</a:t>
+                <a:spcPts val="320"/>
+              </a:spcBef>
+            </a:pPr>
+            <a:r>
+              <a:rPr sz="1150" b="0">
+                <a:solidFill>
+                  <a:srgbClr val="1C1917"/>
+                </a:solidFill>
+                <a:latin typeface="Calibri"/>
+              </a:rPr>
+              <a:t>15. Tap 'Call Priya' to show the RM sheet.</a:t>
             </a:r>
           </a:p>
           <a:p>
             <a:pPr>
               <a:spcBef>
-                <a:spcPts val="400"/>
-              </a:spcBef>
-            </a:pPr>
+                <a:spcPts val="890"/>
+              </a:spcBef>
+            </a:pPr>
+            <a:r>
+              <a:rPr sz="1240" b="1">
+                <a:solidFill>
+                  <a:srgbClr val="EC0000"/>
+                </a:solidFill>
+                <a:latin typeface="Calibri"/>
+              </a:rPr>
+              <a:t>Close (1 min)</a:t>
+            </a:r>
           </a:p>
           <a:p>
             <a:pPr>
               <a:spcBef>
-                <a:spcPts val="800"/>
-              </a:spcBef>
-            </a:pPr>
-            <a:r>
-              <a:rPr sz="1400" b="1">
-                <a:solidFill>
-                  <a:srgbClr val="EC0000"/>
-                </a:solidFill>
-                <a:latin typeface="Calibri"/>
-              </a:rPr>
-              <a:t>Stalled co-signer (2 min)</a:t>
+                <a:spcPts val="320"/>
+              </a:spcBef>
+            </a:pPr>
+            <a:r>
+              <a:rPr sz="1150" b="0">
+                <a:solidFill>
+                  <a:srgbClr val="1C1917"/>
+                </a:solidFill>
+                <a:latin typeface="Calibri"/>
+              </a:rPr>
+              <a:t>16. Show the 'Paperless banner' — 3 forms retired, Sunderland reference.</a:t>
             </a:r>
           </a:p>
           <a:p>
             <a:pPr>
               <a:spcBef>
-                <a:spcPts val="400"/>
-              </a:spcBef>
-            </a:pPr>
-            <a:r>
-              <a:rPr sz="1300" b="0">
-                <a:solidFill>
-                  <a:srgbClr val="1C1917"/>
-                </a:solidFill>
-                <a:latin typeface="Calibri"/>
-              </a:rPr>
-              <a:t>13. Return to Home. Tap 'Simulate timeout' — show the 'Priya's on it' card.</a:t>
-            </a:r>
-          </a:p>
-          <a:p>
-            <a:pPr>
-              <a:spcBef>
-                <a:spcPts val="400"/>
-              </a:spcBef>
-            </a:pPr>
-            <a:r>
-              <a:rPr sz="1300" b="0">
-                <a:solidFill>
-                  <a:srgbClr val="1C1917"/>
-                </a:solidFill>
-                <a:latin typeface="Calibri"/>
-              </a:rPr>
-              <a:t>14. Explain: 'In the current world this would silently expire.'</a:t>
-            </a:r>
-          </a:p>
-          <a:p>
-            <a:pPr>
-              <a:spcBef>
-                <a:spcPts val="400"/>
-              </a:spcBef>
-            </a:pPr>
-            <a:r>
-              <a:rPr sz="1300" b="0">
-                <a:solidFill>
-                  <a:srgbClr val="1C1917"/>
-                </a:solidFill>
-                <a:latin typeface="Calibri"/>
-              </a:rPr>
-              <a:t>15. Tap 'Call Priya' to show the RM sheet.</a:t>
-            </a:r>
-          </a:p>
-          <a:p>
-            <a:pPr>
-              <a:spcBef>
-                <a:spcPts val="400"/>
-              </a:spcBef>
-            </a:pPr>
-          </a:p>
-          <a:p>
-            <a:pPr>
-              <a:spcBef>
-                <a:spcPts val="800"/>
-              </a:spcBef>
-            </a:pPr>
-            <a:r>
-              <a:rPr sz="1400" b="1">
-                <a:solidFill>
-                  <a:srgbClr val="EC0000"/>
-                </a:solidFill>
-                <a:latin typeface="Calibri"/>
-              </a:rPr>
-              <a:t>Close (1 min)</a:t>
-            </a:r>
-          </a:p>
-          <a:p>
-            <a:pPr>
-              <a:spcBef>
-                <a:spcPts val="400"/>
-              </a:spcBef>
-            </a:pPr>
-            <a:r>
-              <a:rPr sz="1300" b="0">
-                <a:solidFill>
-                  <a:srgbClr val="1C1917"/>
-                </a:solidFill>
-                <a:latin typeface="Calibri"/>
-              </a:rPr>
-              <a:t>16. Show the 'Paperless banner' — 3 forms retired, Sunderland reference.</a:t>
-            </a:r>
-          </a:p>
-          <a:p>
-            <a:pPr>
-              <a:spcBef>
-                <a:spcPts val="400"/>
-              </a:spcBef>
-            </a:pPr>
-            <a:r>
-              <a:rPr sz="1300" b="0">
+                <a:spcPts val="320"/>
+              </a:spcBef>
+            </a:pPr>
+            <a:r>
+              <a:rPr sz="1150" b="0">
                 <a:solidFill>
                   <a:srgbClr val="1C1917"/>
                 </a:solidFill>
@@ -18964,11 +18880,11 @@
           <a:p>
             <a:pPr>
               <a:spcBef>
-                <a:spcPts val="400"/>
-              </a:spcBef>
-            </a:pPr>
-            <a:r>
-              <a:rPr sz="1300" b="0">
+                <a:spcPts val="360"/>
+              </a:spcBef>
+            </a:pPr>
+            <a:r>
+              <a:rPr sz="1220" b="0">
                 <a:solidFill>
                   <a:srgbClr val="1C1917"/>
                 </a:solidFill>
@@ -18980,11 +18896,11 @@
           <a:p>
             <a:pPr>
               <a:spcBef>
-                <a:spcPts val="400"/>
-              </a:spcBef>
-            </a:pPr>
-            <a:r>
-              <a:rPr sz="1300" b="0">
+                <a:spcPts val="360"/>
+              </a:spcBef>
+            </a:pPr>
+            <a:r>
+              <a:rPr sz="1220" b="0">
                 <a:solidFill>
                   <a:srgbClr val="1C1917"/>
                 </a:solidFill>
@@ -18996,229 +18912,208 @@
           <a:p>
             <a:pPr>
               <a:spcBef>
-                <a:spcPts val="400"/>
-              </a:spcBef>
-            </a:pPr>
+                <a:spcPts val="360"/>
+              </a:spcBef>
+            </a:pPr>
+            <a:r>
+              <a:rPr sz="1320" b="1">
+                <a:solidFill>
+                  <a:srgbClr val="EC0000"/>
+                </a:solidFill>
+                <a:latin typeface="Calibri"/>
+              </a:rPr>
+              <a:t>How to switch</a:t>
+            </a:r>
+          </a:p>
+          <a:p>
+            <a:pPr lvl="1">
+              <a:spcBef>
+                <a:spcPts val="200"/>
+              </a:spcBef>
+            </a:pPr>
+            <a:r>
+              <a:rPr sz="1130">
+                <a:solidFill>
+                  <a:srgbClr val="1C1917"/>
+                </a:solidFill>
+                <a:latin typeface="Calibri"/>
+              </a:rPr>
+              <a:t>•  — Tap the pill labelled with the current entity name (e.g. 'Limited Company ›').</a:t>
+            </a:r>
+          </a:p>
+          <a:p>
+            <a:pPr lvl="1">
+              <a:spcBef>
+                <a:spcPts val="200"/>
+              </a:spcBef>
+            </a:pPr>
+            <a:r>
+              <a:rPr sz="1130">
+                <a:solidFill>
+                  <a:srgbClr val="1C1917"/>
+                </a:solidFill>
+                <a:latin typeface="Calibri"/>
+              </a:rPr>
+              <a:t>•  — A bottom sheet opens with 7 options. Tap any to switch immediately.</a:t>
+            </a:r>
           </a:p>
           <a:p>
             <a:pPr>
               <a:spcBef>
-                <a:spcPts val="800"/>
-              </a:spcBef>
-            </a:pPr>
-            <a:r>
-              <a:rPr sz="1400" b="1">
+                <a:spcPts val="990"/>
+              </a:spcBef>
+            </a:pPr>
+            <a:r>
+              <a:rPr sz="1320" b="1">
                 <a:solidFill>
                   <a:srgbClr val="EC0000"/>
                 </a:solidFill>
                 <a:latin typeface="Calibri"/>
               </a:rPr>
-              <a:t>How to switch</a:t>
-            </a:r>
-          </a:p>
-          <a:p>
-            <a:pPr lvl="1">
-              <a:spcBef>
-                <a:spcPts val="200"/>
-              </a:spcBef>
-            </a:pPr>
-            <a:r>
-              <a:rPr sz="1200">
-                <a:solidFill>
-                  <a:srgbClr val="1C1917"/>
-                </a:solidFill>
-                <a:latin typeface="Calibri"/>
-              </a:rPr>
-              <a:t>•  — Tap the pill labelled with the current entity name (e.g. 'Limited Company ›').</a:t>
-            </a:r>
-          </a:p>
-          <a:p>
-            <a:pPr lvl="1">
-              <a:spcBef>
-                <a:spcPts val="200"/>
-              </a:spcBef>
-            </a:pPr>
-            <a:r>
-              <a:rPr sz="1200">
-                <a:solidFill>
-                  <a:srgbClr val="1C1917"/>
-                </a:solidFill>
-                <a:latin typeface="Calibri"/>
-              </a:rPr>
-              <a:t>•  — A bottom sheet opens with 7 options. Tap any to switch immediately.</a:t>
+              <a:t>What changes per entity</a:t>
+            </a:r>
+          </a:p>
+          <a:p>
+            <a:pPr lvl="1">
+              <a:spcBef>
+                <a:spcPts val="200"/>
+              </a:spcBef>
+            </a:pPr>
+            <a:r>
+              <a:rPr sz="1130">
+                <a:solidFill>
+                  <a:srgbClr val="1C1917"/>
+                </a:solidFill>
+                <a:latin typeface="Calibri"/>
+              </a:rPr>
+              <a:t>•  — Company name: 'Whitfield Holdings Ltd' → 'Whitfield &amp; Co Partnership' etc.</a:t>
+            </a:r>
+          </a:p>
+          <a:p>
+            <a:pPr lvl="1">
+              <a:spcBef>
+                <a:spcPts val="200"/>
+              </a:spcBef>
+            </a:pPr>
+            <a:r>
+              <a:rPr sz="1130">
+                <a:solidFill>
+                  <a:srgbClr val="1C1917"/>
+                </a:solidFill>
+                <a:latin typeface="Calibri"/>
+              </a:rPr>
+              <a:t>•  — Greeting: 'James' → 'Treasurer' (for charities, clubs, societies)</a:t>
+            </a:r>
+          </a:p>
+          <a:p>
+            <a:pPr lvl="1">
+              <a:spcBef>
+                <a:spcPts val="200"/>
+              </a:spcBef>
+            </a:pPr>
+            <a:r>
+              <a:rPr sz="1130">
+                <a:solidFill>
+                  <a:srgbClr val="1C1917"/>
+                </a:solidFill>
+                <a:latin typeface="Calibri"/>
+              </a:rPr>
+              <a:t>•  — Signatory labels: 'director' → 'partner' / 'trustee' / 'member'</a:t>
+            </a:r>
+          </a:p>
+          <a:p>
+            <a:pPr lvl="1">
+              <a:spcBef>
+                <a:spcPts val="200"/>
+              </a:spcBef>
+            </a:pPr>
+            <a:r>
+              <a:rPr sz="1130">
+                <a:solidFill>
+                  <a:srgbClr val="1C1917"/>
+                </a:solidFill>
+                <a:latin typeface="Calibri"/>
+              </a:rPr>
+              <a:t>•  — Account list: sole trader has 2 accounts; limited has 4; partnership has 3</a:t>
+            </a:r>
+          </a:p>
+          <a:p>
+            <a:pPr lvl="1">
+              <a:spcBef>
+                <a:spcPts val="200"/>
+              </a:spcBef>
+            </a:pPr>
+            <a:r>
+              <a:rPr sz="1130">
+                <a:solidFill>
+                  <a:srgbClr val="1C1917"/>
+                </a:solidFill>
+                <a:latin typeface="Calibri"/>
+              </a:rPr>
+              <a:t>•  — Mandate rules: sole trader is always 'Any 1'; partnership defaults to 'All'</a:t>
+            </a:r>
+          </a:p>
+          <a:p>
+            <a:pPr lvl="1">
+              <a:spcBef>
+                <a:spcPts val="200"/>
+              </a:spcBef>
+            </a:pPr>
+            <a:r>
+              <a:rPr sz="1130">
+                <a:solidFill>
+                  <a:srgbClr val="1C1917"/>
+                </a:solidFill>
+                <a:latin typeface="Calibri"/>
+              </a:rPr>
+              <a:t>•  — Companies House number shown for: Limited (07429183), LLP (OC428192)</a:t>
+            </a:r>
+          </a:p>
+          <a:p>
+            <a:pPr lvl="1">
+              <a:spcBef>
+                <a:spcPts val="200"/>
+              </a:spcBef>
+            </a:pPr>
+            <a:r>
+              <a:rPr sz="1130">
+                <a:solidFill>
+                  <a:srgbClr val="1C1917"/>
+                </a:solidFill>
+                <a:latin typeface="Calibri"/>
+              </a:rPr>
+              <a:t>•  — Charity Commission number shown for: Registered Charity (1192847)</a:t>
+            </a:r>
+          </a:p>
+          <a:p>
+            <a:pPr lvl="1">
+              <a:spcBef>
+                <a:spcPts val="200"/>
+              </a:spcBef>
+            </a:pPr>
+            <a:r>
+              <a:rPr sz="1130">
+                <a:solidFill>
+                  <a:srgbClr val="1C1917"/>
+                </a:solidFill>
+                <a:latin typeface="Calibri"/>
+              </a:rPr>
+              <a:t>•  — Minutes required: Charity, Club, Society — extra document upload step</a:t>
             </a:r>
           </a:p>
           <a:p>
             <a:pPr>
               <a:spcBef>
-                <a:spcPts val="400"/>
-              </a:spcBef>
-            </a:pPr>
-          </a:p>
-          <a:p>
-            <a:pPr>
-              <a:spcBef>
-                <a:spcPts val="800"/>
-              </a:spcBef>
-            </a:pPr>
-            <a:r>
-              <a:rPr sz="1400" b="1">
+                <a:spcPts val="990"/>
+              </a:spcBef>
+            </a:pPr>
+            <a:r>
+              <a:rPr sz="1320" b="1">
                 <a:solidFill>
                   <a:srgbClr val="EC0000"/>
                 </a:solidFill>
                 <a:latin typeface="Calibri"/>
               </a:rPr>
-              <a:t>What changes per entity</a:t>
-            </a:r>
-          </a:p>
-          <a:p>
-            <a:pPr lvl="1">
-              <a:spcBef>
-                <a:spcPts val="200"/>
-              </a:spcBef>
-            </a:pPr>
-            <a:r>
-              <a:rPr sz="1200">
-                <a:solidFill>
-                  <a:srgbClr val="1C1917"/>
-                </a:solidFill>
-                <a:latin typeface="Calibri"/>
-              </a:rPr>
-              <a:t>•  — Company name: 'Whitfield Holdings Ltd' → 'Whitfield &amp; Co Partnership' etc.</a:t>
-            </a:r>
-          </a:p>
-          <a:p>
-            <a:pPr lvl="1">
-              <a:spcBef>
-                <a:spcPts val="200"/>
-              </a:spcBef>
-            </a:pPr>
-            <a:r>
-              <a:rPr sz="1200">
-                <a:solidFill>
-                  <a:srgbClr val="1C1917"/>
-                </a:solidFill>
-                <a:latin typeface="Calibri"/>
-              </a:rPr>
-              <a:t>•  — Greeting: 'James' → 'Treasurer' (for charities, clubs, societies)</a:t>
-            </a:r>
-          </a:p>
-          <a:p>
-            <a:pPr lvl="1">
-              <a:spcBef>
-                <a:spcPts val="200"/>
-              </a:spcBef>
-            </a:pPr>
-            <a:r>
-              <a:rPr sz="1200">
-                <a:solidFill>
-                  <a:srgbClr val="1C1917"/>
-                </a:solidFill>
-                <a:latin typeface="Calibri"/>
-              </a:rPr>
-              <a:t>•  — Signatory labels: 'director' → 'partner' / 'trustee' / 'member'</a:t>
-            </a:r>
-          </a:p>
-          <a:p>
-            <a:pPr lvl="1">
-              <a:spcBef>
-                <a:spcPts val="200"/>
-              </a:spcBef>
-            </a:pPr>
-            <a:r>
-              <a:rPr sz="1200">
-                <a:solidFill>
-                  <a:srgbClr val="1C1917"/>
-                </a:solidFill>
-                <a:latin typeface="Calibri"/>
-              </a:rPr>
-              <a:t>•  — Account list: sole trader has 2 accounts; limited has 4; partnership has 3</a:t>
-            </a:r>
-          </a:p>
-          <a:p>
-            <a:pPr lvl="1">
-              <a:spcBef>
-                <a:spcPts val="200"/>
-              </a:spcBef>
-            </a:pPr>
-            <a:r>
-              <a:rPr sz="1200">
-                <a:solidFill>
-                  <a:srgbClr val="1C1917"/>
-                </a:solidFill>
-                <a:latin typeface="Calibri"/>
-              </a:rPr>
-              <a:t>•  — Mandate rules: sole trader is always 'Any 1'; partnership defaults to 'All'</a:t>
-            </a:r>
-          </a:p>
-          <a:p>
-            <a:pPr lvl="1">
-              <a:spcBef>
-                <a:spcPts val="200"/>
-              </a:spcBef>
-            </a:pPr>
-            <a:r>
-              <a:rPr sz="1200">
-                <a:solidFill>
-                  <a:srgbClr val="1C1917"/>
-                </a:solidFill>
-                <a:latin typeface="Calibri"/>
-              </a:rPr>
-              <a:t>•  — Companies House number shown for: Limited (07429183), LLP (OC428192)</a:t>
-            </a:r>
-          </a:p>
-          <a:p>
-            <a:pPr lvl="1">
-              <a:spcBef>
-                <a:spcPts val="200"/>
-              </a:spcBef>
-            </a:pPr>
-            <a:r>
-              <a:rPr sz="1200">
-                <a:solidFill>
-                  <a:srgbClr val="1C1917"/>
-                </a:solidFill>
-                <a:latin typeface="Calibri"/>
-              </a:rPr>
-              <a:t>•  — Charity Commission number shown for: Registered Charity (1192847)</a:t>
-            </a:r>
-          </a:p>
-          <a:p>
-            <a:pPr lvl="1">
-              <a:spcBef>
-                <a:spcPts val="200"/>
-              </a:spcBef>
-            </a:pPr>
-            <a:r>
-              <a:rPr sz="1200">
-                <a:solidFill>
-                  <a:srgbClr val="1C1917"/>
-                </a:solidFill>
-                <a:latin typeface="Calibri"/>
-              </a:rPr>
-              <a:t>•  — Minutes required: Charity, Club, Society — extra document upload step</a:t>
-            </a:r>
-          </a:p>
-          <a:p>
-            <a:pPr>
-              <a:spcBef>
-                <a:spcPts val="400"/>
-              </a:spcBef>
-            </a:pPr>
-          </a:p>
-          <a:p>
-            <a:pPr>
-              <a:spcBef>
-                <a:spcPts val="800"/>
-              </a:spcBef>
-            </a:pPr>
-            <a:r>
-              <a:rPr sz="1400" b="1">
-                <a:solidFill>
-                  <a:srgbClr val="EC0000"/>
-                </a:solidFill>
-                <a:latin typeface="Calibri"/>
-              </a:rPr>
               <a:t>The 7 entity types</a:t>
             </a:r>
           </a:p>
@@ -19229,7 +19124,7 @@
               </a:spcBef>
             </a:pPr>
             <a:r>
-              <a:rPr sz="1200">
+              <a:rPr sz="1130">
                 <a:solidFill>
                   <a:srgbClr val="1C1917"/>
                 </a:solidFill>
@@ -19245,7 +19140,7 @@
               </a:spcBef>
             </a:pPr>
             <a:r>
-              <a:rPr sz="1200">
+              <a:rPr sz="1130">
                 <a:solidFill>
                   <a:srgbClr val="1C1917"/>
                 </a:solidFill>
@@ -19261,7 +19156,7 @@
               </a:spcBef>
             </a:pPr>
             <a:r>
-              <a:rPr sz="1200">
+              <a:rPr sz="1130">
                 <a:solidFill>
                   <a:srgbClr val="1C1917"/>
                 </a:solidFill>
@@ -19277,7 +19172,7 @@
               </a:spcBef>
             </a:pPr>
             <a:r>
-              <a:rPr sz="1200">
+              <a:rPr sz="1130">
                 <a:solidFill>
                   <a:srgbClr val="1C1917"/>
                 </a:solidFill>
@@ -19293,7 +19188,7 @@
               </a:spcBef>
             </a:pPr>
             <a:r>
-              <a:rPr sz="1200">
+              <a:rPr sz="1130">
                 <a:solidFill>
                   <a:srgbClr val="1C1917"/>
                 </a:solidFill>
@@ -19309,7 +19204,7 @@
               </a:spcBef>
             </a:pPr>
             <a:r>
-              <a:rPr sz="1200">
+              <a:rPr sz="1130">
                 <a:solidFill>
                   <a:srgbClr val="1C1917"/>
                 </a:solidFill>
@@ -19325,7 +19220,7 @@
               </a:spcBef>
             </a:pPr>
             <a:r>
-              <a:rPr sz="1200">
+              <a:rPr sz="1130">
                 <a:solidFill>
                   <a:srgbClr val="1C1917"/>
                 </a:solidFill>
@@ -20986,11 +20881,52 @@
                 <a:spcPts val="400"/>
               </a:spcBef>
             </a:pPr>
+            <a:r>
+              <a:rPr sz="1400" b="1">
+                <a:solidFill>
+                  <a:srgbClr val="EC0000"/>
+                </a:solidFill>
+                <a:latin typeface="Calibri"/>
+              </a:rPr>
+              <a:t>Home — Command Centre</a:t>
+            </a:r>
+          </a:p>
+          <a:p>
+            <a:pPr lvl="1">
+              <a:spcBef>
+                <a:spcPts val="200"/>
+              </a:spcBef>
+            </a:pPr>
+            <a:r>
+              <a:rPr sz="1200">
+                <a:solidFill>
+                  <a:srgbClr val="1C1917"/>
+                </a:solidFill>
+                <a:latin typeface="Calibri"/>
+              </a:rPr>
+              <a:t>•  • The main screen. 15+ cards covering balances, forecasts, approvals, and actions.</a:t>
+            </a:r>
+          </a:p>
+          <a:p>
+            <a:pPr lvl="1">
+              <a:spcBef>
+                <a:spcPts val="200"/>
+              </a:spcBef>
+            </a:pPr>
+            <a:r>
+              <a:rPr sz="1200">
+                <a:solidFill>
+                  <a:srgbClr val="1C1917"/>
+                </a:solidFill>
+                <a:latin typeface="Calibri"/>
+              </a:rPr>
+              <a:t>•  • This is the headline feature — everything about the business on one screen.</a:t>
+            </a:r>
           </a:p>
           <a:p>
             <a:pPr>
               <a:spcBef>
-                <a:spcPts val="800"/>
+                <a:spcPts val="1100"/>
               </a:spcBef>
             </a:pPr>
             <a:r>
@@ -21000,7 +20936,7 @@
                 </a:solidFill>
                 <a:latin typeface="Calibri"/>
               </a:rPr>
-              <a:t>Home — Command Centre</a:t>
+              <a:t>Approve</a:t>
             </a:r>
           </a:p>
           <a:p>
@@ -21016,7 +20952,7 @@
                 </a:solidFill>
                 <a:latin typeface="Calibri"/>
               </a:rPr>
-              <a:t>•  • The main screen. 15+ cards covering balances, forecasts, approvals, and actions.</a:t>
+              <a:t>•  • Pending signature queue. Items waiting for the logged-in director to countersign.</a:t>
             </a:r>
           </a:p>
           <a:p>
@@ -21032,20 +20968,61 @@
                 </a:solidFill>
                 <a:latin typeface="Calibri"/>
               </a:rPr>
-              <a:t>•  • This is the headline feature — everything about the business on one screen.</a:t>
+              <a:t>•  • OTP or biometric confirmation. Shows expiry countdown per request.</a:t>
             </a:r>
           </a:p>
           <a:p>
             <a:pPr>
               <a:spcBef>
-                <a:spcPts val="400"/>
-              </a:spcBef>
-            </a:pPr>
+                <a:spcPts val="1100"/>
+              </a:spcBef>
+            </a:pPr>
+            <a:r>
+              <a:rPr sz="1400" b="1">
+                <a:solidFill>
+                  <a:srgbClr val="EC0000"/>
+                </a:solidFill>
+                <a:latin typeface="Calibri"/>
+              </a:rPr>
+              <a:t>Audit</a:t>
+            </a:r>
+          </a:p>
+          <a:p>
+            <a:pPr lvl="1">
+              <a:spcBef>
+                <a:spcPts val="200"/>
+              </a:spcBef>
+            </a:pPr>
+            <a:r>
+              <a:rPr sz="1200">
+                <a:solidFill>
+                  <a:srgbClr val="1C1917"/>
+                </a:solidFill>
+                <a:latin typeface="Calibri"/>
+              </a:rPr>
+              <a:t>•  • Immutable log of every action taken in the system.</a:t>
+            </a:r>
+          </a:p>
+          <a:p>
+            <a:pPr lvl="1">
+              <a:spcBef>
+                <a:spcPts val="200"/>
+              </a:spcBef>
+            </a:pPr>
+            <a:r>
+              <a:rPr sz="1200">
+                <a:solidFill>
+                  <a:srgbClr val="1C1917"/>
+                </a:solidFill>
+                <a:latin typeface="Calibri"/>
+              </a:rPr>
+              <a:t>•  • Export options for compliance, auditors, and accountants.</a:t>
+            </a:r>
           </a:p>
           <a:p>
             <a:pPr>
               <a:spcBef>
-                <a:spcPts val="800"/>
+                <a:spcPts val="1100"/>
               </a:spcBef>
             </a:pPr>
             <a:r>
@@ -21055,7 +21032,7 @@
                 </a:solidFill>
                 <a:latin typeface="Calibri"/>
               </a:rPr>
-              <a:t>Approve</a:t>
+              <a:t>Tax (MTD)</a:t>
             </a:r>
           </a:p>
           <a:p>
@@ -21071,7 +21048,7 @@
                 </a:solidFill>
                 <a:latin typeface="Calibri"/>
               </a:rPr>
-              <a:t>•  • Pending signature queue. Items waiting for the logged-in director to countersign.</a:t>
+              <a:t>•  • Making Tax Digital hub. VAT obligations, ITSA, and HMRC submission workflow.</a:t>
             </a:r>
           </a:p>
           <a:p>
@@ -21087,130 +21064,13 @@
                 </a:solidFill>
                 <a:latin typeface="Calibri"/>
               </a:rPr>
-              <a:t>•  • OTP or biometric confirmation. Shows expiry countdown per request.</a:t>
+              <a:t>•  • Live countdown to the next VAT deadline. One-tap direct submission to HMRC.</a:t>
             </a:r>
           </a:p>
           <a:p>
             <a:pPr>
               <a:spcBef>
-                <a:spcPts val="400"/>
-              </a:spcBef>
-            </a:pPr>
-          </a:p>
-          <a:p>
-            <a:pPr>
-              <a:spcBef>
-                <a:spcPts val="800"/>
-              </a:spcBef>
-            </a:pPr>
-            <a:r>
-              <a:rPr sz="1400" b="1">
-                <a:solidFill>
-                  <a:srgbClr val="EC0000"/>
-                </a:solidFill>
-                <a:latin typeface="Calibri"/>
-              </a:rPr>
-              <a:t>Audit</a:t>
-            </a:r>
-          </a:p>
-          <a:p>
-            <a:pPr lvl="1">
-              <a:spcBef>
-                <a:spcPts val="200"/>
-              </a:spcBef>
-            </a:pPr>
-            <a:r>
-              <a:rPr sz="1200">
-                <a:solidFill>
-                  <a:srgbClr val="1C1917"/>
-                </a:solidFill>
-                <a:latin typeface="Calibri"/>
-              </a:rPr>
-              <a:t>•  • Immutable log of every action taken in the system.</a:t>
-            </a:r>
-          </a:p>
-          <a:p>
-            <a:pPr lvl="1">
-              <a:spcBef>
-                <a:spcPts val="200"/>
-              </a:spcBef>
-            </a:pPr>
-            <a:r>
-              <a:rPr sz="1200">
-                <a:solidFill>
-                  <a:srgbClr val="1C1917"/>
-                </a:solidFill>
-                <a:latin typeface="Calibri"/>
-              </a:rPr>
-              <a:t>•  • Export options for compliance, auditors, and accountants.</a:t>
-            </a:r>
-          </a:p>
-          <a:p>
-            <a:pPr>
-              <a:spcBef>
-                <a:spcPts val="400"/>
-              </a:spcBef>
-            </a:pPr>
-          </a:p>
-          <a:p>
-            <a:pPr>
-              <a:spcBef>
-                <a:spcPts val="800"/>
-              </a:spcBef>
-            </a:pPr>
-            <a:r>
-              <a:rPr sz="1400" b="1">
-                <a:solidFill>
-                  <a:srgbClr val="EC0000"/>
-                </a:solidFill>
-                <a:latin typeface="Calibri"/>
-              </a:rPr>
-              <a:t>Tax (MTD)</a:t>
-            </a:r>
-          </a:p>
-          <a:p>
-            <a:pPr lvl="1">
-              <a:spcBef>
-                <a:spcPts val="200"/>
-              </a:spcBef>
-            </a:pPr>
-            <a:r>
-              <a:rPr sz="1200">
-                <a:solidFill>
-                  <a:srgbClr val="1C1917"/>
-                </a:solidFill>
-                <a:latin typeface="Calibri"/>
-              </a:rPr>
-              <a:t>•  • Making Tax Digital hub. VAT obligations, ITSA, and HMRC submission workflow.</a:t>
-            </a:r>
-          </a:p>
-          <a:p>
-            <a:pPr lvl="1">
-              <a:spcBef>
-                <a:spcPts val="200"/>
-              </a:spcBef>
-            </a:pPr>
-            <a:r>
-              <a:rPr sz="1200">
-                <a:solidFill>
-                  <a:srgbClr val="1C1917"/>
-                </a:solidFill>
-                <a:latin typeface="Calibri"/>
-              </a:rPr>
-              <a:t>•  • Live countdown to the next VAT deadline. One-tap direct submission to HMRC.</a:t>
-            </a:r>
-          </a:p>
-          <a:p>
-            <a:pPr>
-              <a:spcBef>
-                <a:spcPts val="400"/>
-              </a:spcBef>
-            </a:pPr>
-          </a:p>
-          <a:p>
-            <a:pPr>
-              <a:spcBef>
-                <a:spcPts val="800"/>
+                <a:spcPts val="1100"/>
               </a:spcBef>
             </a:pPr>
             <a:r>
@@ -22984,7 +22844,7 @@
           <a:p>
             <a:pPr>
               <a:spcBef>
-                <a:spcPts val="800"/>
+                <a:spcPts val="400"/>
               </a:spcBef>
             </a:pPr>
             <a:r>
@@ -23032,14 +22892,87 @@
           <a:p>
             <a:pPr>
               <a:spcBef>
-                <a:spcPts val="400"/>
-              </a:spcBef>
-            </a:pPr>
+                <a:spcPts val="1100"/>
+              </a:spcBef>
+            </a:pPr>
+            <a:r>
+              <a:rPr sz="1400" b="1">
+                <a:solidFill>
+                  <a:srgbClr val="EC0000"/>
+                </a:solidFill>
+                <a:latin typeface="Calibri"/>
+              </a:rPr>
+              <a:t>Approve</a:t>
+            </a:r>
+          </a:p>
+          <a:p>
+            <a:pPr lvl="1">
+              <a:spcBef>
+                <a:spcPts val="200"/>
+              </a:spcBef>
+            </a:pPr>
+            <a:r>
+              <a:rPr sz="1200">
+                <a:solidFill>
+                  <a:srgbClr val="1C1917"/>
+                </a:solidFill>
+                <a:latin typeface="Calibri"/>
+              </a:rPr>
+              <a:t>•  — Pending items awaiting the director's signature.</a:t>
+            </a:r>
+          </a:p>
+          <a:p>
+            <a:pPr lvl="1">
+              <a:spcBef>
+                <a:spcPts val="200"/>
+              </a:spcBef>
+            </a:pPr>
+            <a:r>
+              <a:rPr sz="1200">
+                <a:solidFill>
+                  <a:srgbClr val="1C1917"/>
+                </a:solidFill>
+                <a:latin typeface="Calibri"/>
+              </a:rPr>
+              <a:t>•  — Three demo items: Bulk Payment (October Wages £183k), Mandate Change</a:t>
+            </a:r>
+          </a:p>
+          <a:p>
+            <a:pPr lvl="1">
+              <a:spcBef>
+                <a:spcPts val="100"/>
+              </a:spcBef>
+            </a:pPr>
+            <a:r>
+              <a:rPr sz="1100">
+                <a:solidFill>
+                  <a:srgbClr val="787169"/>
+                </a:solidFill>
+                <a:latin typeface="Calibri"/>
+              </a:rPr>
+              <a:t>—  (Add Mark Patel), Account Closure (Legacy Trading ····4422).</a:t>
+            </a:r>
+          </a:p>
+          <a:p>
+            <a:pPr lvl="1">
+              <a:spcBef>
+                <a:spcPts val="200"/>
+              </a:spcBef>
+            </a:pPr>
+            <a:r>
+              <a:rPr sz="1200">
+                <a:solidFill>
+                  <a:srgbClr val="1C1917"/>
+                </a:solidFill>
+                <a:latin typeface="Calibri"/>
+              </a:rPr>
+              <a:t>•  — Use for: demonstrating dual-authorisation, OTP flow, biometric sign-off.</a:t>
+            </a:r>
           </a:p>
           <a:p>
             <a:pPr>
               <a:spcBef>
-                <a:spcPts val="800"/>
+                <a:spcPts val="1100"/>
               </a:spcBef>
             </a:pPr>
             <a:r>
@@ -23049,7 +22982,7 @@
                 </a:solidFill>
                 <a:latin typeface="Calibri"/>
               </a:rPr>
-              <a:t>Approve</a:t>
+              <a:t>Audit</a:t>
             </a:r>
           </a:p>
           <a:p>
@@ -23065,7 +22998,7 @@
                 </a:solidFill>
                 <a:latin typeface="Calibri"/>
               </a:rPr>
-              <a:t>•  — Pending items awaiting the director's signature.</a:t>
+              <a:t>•  — Chronological log of all events. Tamper-evident by design.</a:t>
             </a:r>
           </a:p>
           <a:p>
@@ -23081,23 +23014,23 @@
                 </a:solidFill>
                 <a:latin typeface="Calibri"/>
               </a:rPr>
-              <a:t>•  — Three demo items: Bulk Payment (October Wages £183k), Mandate Change</a:t>
-            </a:r>
-          </a:p>
-          <a:p>
-            <a:pPr lvl="1">
-              <a:spcBef>
-                <a:spcPts val="100"/>
-              </a:spcBef>
-            </a:pPr>
-            <a:r>
-              <a:rPr sz="1100">
-                <a:solidFill>
-                  <a:srgbClr val="787169"/>
-                </a:solidFill>
-                <a:latin typeface="Calibri"/>
-              </a:rPr>
-              <a:t>—  (Add Mark Patel), Account Closure (Legacy Trading ····4422).</a:t>
+              <a:t>•  — Use for: compliance conversations, showing auditability of paperless workflows.</a:t>
+            </a:r>
+          </a:p>
+          <a:p>
+            <a:pPr>
+              <a:spcBef>
+                <a:spcPts val="1100"/>
+              </a:spcBef>
+            </a:pPr>
+            <a:r>
+              <a:rPr sz="1400" b="1">
+                <a:solidFill>
+                  <a:srgbClr val="EC0000"/>
+                </a:solidFill>
+                <a:latin typeface="Calibri"/>
+              </a:rPr>
+              <a:t>Tax (MTD)</a:t>
             </a:r>
           </a:p>
           <a:p>
@@ -23113,146 +23046,45 @@
                 </a:solidFill>
                 <a:latin typeface="Calibri"/>
               </a:rPr>
-              <a:t>•  — Use for: demonstrating dual-authorisation, OTP flow, biometric sign-off.</a:t>
+              <a:t>•  — VAT obligations: Q3 Jul–Sep 2026 (open, £18,472 due), Q2 submitted.</a:t>
+            </a:r>
+          </a:p>
+          <a:p>
+            <a:pPr lvl="1">
+              <a:spcBef>
+                <a:spcPts val="200"/>
+              </a:spcBef>
+            </a:pPr>
+            <a:r>
+              <a:rPr sz="1200">
+                <a:solidFill>
+                  <a:srgbClr val="1C1917"/>
+                </a:solidFill>
+                <a:latin typeface="Calibri"/>
+              </a:rPr>
+              <a:t>•  — HMRC MTD VAT API v1.0. 247 transactions to review.</a:t>
+            </a:r>
+          </a:p>
+          <a:p>
+            <a:pPr lvl="1">
+              <a:spcBef>
+                <a:spcPts val="200"/>
+              </a:spcBef>
+            </a:pPr>
+            <a:r>
+              <a:rPr sz="1200">
+                <a:solidFill>
+                  <a:srgbClr val="1C1917"/>
+                </a:solidFill>
+                <a:latin typeface="Calibri"/>
+              </a:rPr>
+              <a:t>•  — Use for: accountant demos, MTD readiness conversations, VAT submission flow.</a:t>
             </a:r>
           </a:p>
           <a:p>
             <a:pPr>
               <a:spcBef>
-                <a:spcPts val="400"/>
-              </a:spcBef>
-            </a:pPr>
-          </a:p>
-          <a:p>
-            <a:pPr>
-              <a:spcBef>
-                <a:spcPts val="800"/>
-              </a:spcBef>
-            </a:pPr>
-            <a:r>
-              <a:rPr sz="1400" b="1">
-                <a:solidFill>
-                  <a:srgbClr val="EC0000"/>
-                </a:solidFill>
-                <a:latin typeface="Calibri"/>
-              </a:rPr>
-              <a:t>Audit</a:t>
-            </a:r>
-          </a:p>
-          <a:p>
-            <a:pPr lvl="1">
-              <a:spcBef>
-                <a:spcPts val="200"/>
-              </a:spcBef>
-            </a:pPr>
-            <a:r>
-              <a:rPr sz="1200">
-                <a:solidFill>
-                  <a:srgbClr val="1C1917"/>
-                </a:solidFill>
-                <a:latin typeface="Calibri"/>
-              </a:rPr>
-              <a:t>•  — Chronological log of all events. Tamper-evident by design.</a:t>
-            </a:r>
-          </a:p>
-          <a:p>
-            <a:pPr lvl="1">
-              <a:spcBef>
-                <a:spcPts val="200"/>
-              </a:spcBef>
-            </a:pPr>
-            <a:r>
-              <a:rPr sz="1200">
-                <a:solidFill>
-                  <a:srgbClr val="1C1917"/>
-                </a:solidFill>
-                <a:latin typeface="Calibri"/>
-              </a:rPr>
-              <a:t>•  — Use for: compliance conversations, showing auditability of paperless workflows.</a:t>
-            </a:r>
-          </a:p>
-          <a:p>
-            <a:pPr>
-              <a:spcBef>
-                <a:spcPts val="400"/>
-              </a:spcBef>
-            </a:pPr>
-          </a:p>
-          <a:p>
-            <a:pPr>
-              <a:spcBef>
-                <a:spcPts val="800"/>
-              </a:spcBef>
-            </a:pPr>
-            <a:r>
-              <a:rPr sz="1400" b="1">
-                <a:solidFill>
-                  <a:srgbClr val="EC0000"/>
-                </a:solidFill>
-                <a:latin typeface="Calibri"/>
-              </a:rPr>
-              <a:t>Tax (MTD)</a:t>
-            </a:r>
-          </a:p>
-          <a:p>
-            <a:pPr lvl="1">
-              <a:spcBef>
-                <a:spcPts val="200"/>
-              </a:spcBef>
-            </a:pPr>
-            <a:r>
-              <a:rPr sz="1200">
-                <a:solidFill>
-                  <a:srgbClr val="1C1917"/>
-                </a:solidFill>
-                <a:latin typeface="Calibri"/>
-              </a:rPr>
-              <a:t>•  — VAT obligations: Q3 Jul–Sep 2026 (open, £18,472 due), Q2 submitted.</a:t>
-            </a:r>
-          </a:p>
-          <a:p>
-            <a:pPr lvl="1">
-              <a:spcBef>
-                <a:spcPts val="200"/>
-              </a:spcBef>
-            </a:pPr>
-            <a:r>
-              <a:rPr sz="1200">
-                <a:solidFill>
-                  <a:srgbClr val="1C1917"/>
-                </a:solidFill>
-                <a:latin typeface="Calibri"/>
-              </a:rPr>
-              <a:t>•  — HMRC MTD VAT API v1.0. 247 transactions to review.</a:t>
-            </a:r>
-          </a:p>
-          <a:p>
-            <a:pPr lvl="1">
-              <a:spcBef>
-                <a:spcPts val="200"/>
-              </a:spcBef>
-            </a:pPr>
-            <a:r>
-              <a:rPr sz="1200">
-                <a:solidFill>
-                  <a:srgbClr val="1C1917"/>
-                </a:solidFill>
-                <a:latin typeface="Calibri"/>
-              </a:rPr>
-              <a:t>•  — Use for: accountant demos, MTD readiness conversations, VAT submission flow.</a:t>
-            </a:r>
-          </a:p>
-          <a:p>
-            <a:pPr>
-              <a:spcBef>
-                <a:spcPts val="400"/>
-              </a:spcBef>
-            </a:pPr>
-          </a:p>
-          <a:p>
-            <a:pPr>
-              <a:spcBef>
-                <a:spcPts val="800"/>
+                <a:spcPts val="1100"/>
               </a:spcBef>
             </a:pPr>
             <a:r>
